--- a/BystrovMD_4131z_Presentation.pptx
+++ b/BystrovMD_4131z_Presentation.pptx
@@ -7,10 +7,10 @@
     <p:sldMasterId id="2147483833" r:id="rId3"/>
   </p:sldMasterIdLst>
   <p:notesMasterIdLst>
-    <p:notesMasterId r:id="rId17"/>
+    <p:notesMasterId r:id="rId18"/>
   </p:notesMasterIdLst>
   <p:handoutMasterIdLst>
-    <p:handoutMasterId r:id="rId18"/>
+    <p:handoutMasterId r:id="rId19"/>
   </p:handoutMasterIdLst>
   <p:sldIdLst>
     <p:sldId id="1171" r:id="rId4"/>
@@ -19,13 +19,14 @@
     <p:sldId id="1097" r:id="rId7"/>
     <p:sldId id="1172" r:id="rId8"/>
     <p:sldId id="1201" r:id="rId9"/>
-    <p:sldId id="1102" r:id="rId10"/>
+    <p:sldId id="1205" r:id="rId10"/>
     <p:sldId id="1202" r:id="rId11"/>
     <p:sldId id="1203" r:id="rId12"/>
-    <p:sldId id="1185" r:id="rId13"/>
-    <p:sldId id="1199" r:id="rId14"/>
-    <p:sldId id="1200" r:id="rId15"/>
-    <p:sldId id="1197" r:id="rId16"/>
+    <p:sldId id="1204" r:id="rId13"/>
+    <p:sldId id="1185" r:id="rId14"/>
+    <p:sldId id="1199" r:id="rId15"/>
+    <p:sldId id="1200" r:id="rId16"/>
+    <p:sldId id="1197" r:id="rId17"/>
   </p:sldIdLst>
   <p:sldSz cx="12192000" cy="6858000"/>
   <p:notesSz cx="6858000" cy="9144000"/>
@@ -135,9 +136,10 @@
             <p14:sldId id="1097"/>
             <p14:sldId id="1172"/>
             <p14:sldId id="1201"/>
-            <p14:sldId id="1102"/>
+            <p14:sldId id="1205"/>
             <p14:sldId id="1202"/>
             <p14:sldId id="1203"/>
+            <p14:sldId id="1204"/>
             <p14:sldId id="1185"/>
             <p14:sldId id="1199"/>
             <p14:sldId id="1200"/>
@@ -302,7 +304,7 @@
             <a:fld id="{85FFCE6C-E7E6-4C35-A8B5-8F9784AA6873}" type="datetimeFigureOut">
               <a:rPr lang="en-US" smtClean="0"/>
               <a:pPr/>
-              <a:t>5/31/2026</a:t>
+              <a:t>6/14/2026</a:t>
             </a:fld>
             <a:endParaRPr lang="en-US"/>
           </a:p>
@@ -481,7 +483,7 @@
             <a:fld id="{CCD46D5B-6567-794D-8CBA-5CCA973D6774}" type="datetimeFigureOut">
               <a:rPr lang="ru-RU"/>
               <a:pPr/>
-              <a:t>31.05.2026</a:t>
+              <a:t>14.06.2026</a:t>
             </a:fld>
             <a:endParaRPr lang="ru-RU"/>
           </a:p>
@@ -1238,19 +1240,78 @@
           <a:bodyPr/>
           <a:lstStyle/>
           <a:p>
+            <a:pPr marL="0" marR="0" lvl="0" indent="0" algn="r" defTabSz="914400" rtl="0" eaLnBrk="1" fontAlgn="auto" latinLnBrk="0" hangingPunct="1">
+              <a:lnSpc>
+                <a:spcPct val="100000"/>
+              </a:lnSpc>
+              <a:spcBef>
+                <a:spcPts val="0"/>
+              </a:spcBef>
+              <a:spcAft>
+                <a:spcPts val="0"/>
+              </a:spcAft>
+              <a:buClrTx/>
+              <a:buSzTx/>
+              <a:buFontTx/>
+              <a:buNone/>
+              <a:tabLst/>
+              <a:defRPr/>
+            </a:pPr>
             <a:fld id="{BCEDE2F8-02D4-C448-B364-7246A6689E7F}" type="slidenum">
-              <a:rPr lang="ru-RU" smtClean="0"/>
-              <a:pPr/>
+              <a:rPr kumimoji="0" lang="ru-RU" sz="1200" b="0" i="0" u="none" strike="noStrike" kern="1200" cap="none" spc="0" normalizeH="0" baseline="0" noProof="0" smtClean="0">
+                <a:ln>
+                  <a:noFill/>
+                </a:ln>
+                <a:solidFill>
+                  <a:prstClr val="black"/>
+                </a:solidFill>
+                <a:effectLst/>
+                <a:uLnTx/>
+                <a:uFillTx/>
+                <a:latin typeface="Calibri"/>
+                <a:ea typeface="+mn-ea"/>
+                <a:cs typeface="+mn-cs"/>
+              </a:rPr>
+              <a:pPr marL="0" marR="0" lvl="0" indent="0" algn="r" defTabSz="914400" rtl="0" eaLnBrk="1" fontAlgn="auto" latinLnBrk="0" hangingPunct="1">
+                <a:lnSpc>
+                  <a:spcPct val="100000"/>
+                </a:lnSpc>
+                <a:spcBef>
+                  <a:spcPts val="0"/>
+                </a:spcBef>
+                <a:spcAft>
+                  <a:spcPts val="0"/>
+                </a:spcAft>
+                <a:buClrTx/>
+                <a:buSzTx/>
+                <a:buFontTx/>
+                <a:buNone/>
+                <a:tabLst/>
+                <a:defRPr/>
+              </a:pPr>
               <a:t>7</a:t>
             </a:fld>
-            <a:endParaRPr lang="ru-RU" dirty="0"/>
+            <a:endParaRPr kumimoji="0" lang="ru-RU" sz="1200" b="0" i="0" u="none" strike="noStrike" kern="1200" cap="none" spc="0" normalizeH="0" baseline="0" noProof="0" dirty="0">
+              <a:ln>
+                <a:noFill/>
+              </a:ln>
+              <a:solidFill>
+                <a:prstClr val="black"/>
+              </a:solidFill>
+              <a:effectLst/>
+              <a:uLnTx/>
+              <a:uFillTx/>
+              <a:latin typeface="Calibri"/>
+              <a:ea typeface="+mn-ea"/>
+              <a:cs typeface="+mn-cs"/>
+            </a:endParaRPr>
           </a:p>
         </p:txBody>
       </p:sp>
     </p:spTree>
     <p:extLst>
       <p:ext uri="{BB962C8B-B14F-4D97-AF65-F5344CB8AC3E}">
-        <p14:creationId xmlns:p14="http://schemas.microsoft.com/office/powerpoint/2010/main" val="1093752382"/>
+        <p14:creationId xmlns:p14="http://schemas.microsoft.com/office/powerpoint/2010/main" val="546184185"/>
       </p:ext>
     </p:extLst>
   </p:cSld>
@@ -5060,8 +5121,8 @@
         </p:nvSpPr>
         <p:spPr>
           <a:xfrm>
-            <a:off x="3281082" y="1035422"/>
-            <a:ext cx="8278482" cy="2802129"/>
+            <a:off x="2897911" y="1271582"/>
+            <a:ext cx="4217956" cy="4773024"/>
           </a:xfrm>
           <a:prstGeom prst="roundRect">
             <a:avLst/>
@@ -5129,8 +5190,8 @@
         </p:nvSpPr>
         <p:spPr>
           <a:xfrm>
-            <a:off x="3281082" y="4159624"/>
-            <a:ext cx="8355106" cy="2393576"/>
+            <a:off x="7310268" y="1271582"/>
+            <a:ext cx="4215046" cy="4773024"/>
           </a:xfrm>
           <a:prstGeom prst="roundRect">
             <a:avLst/>
@@ -5215,10 +5276,10 @@
       </p:sp>
       <p:pic>
         <p:nvPicPr>
-          <p:cNvPr id="4" name="Рисунок 3">
-            <a:extLst>
-              <a:ext uri="{FF2B5EF4-FFF2-40B4-BE49-F238E27FC236}">
-                <a16:creationId xmlns:a16="http://schemas.microsoft.com/office/drawing/2014/main" id="{CA72AFB1-5797-4602-8492-C4058267F4AD}"/>
+          <p:cNvPr id="9" name="Рисунок 8">
+            <a:extLst>
+              <a:ext uri="{FF2B5EF4-FFF2-40B4-BE49-F238E27FC236}">
+                <a16:creationId xmlns:a16="http://schemas.microsoft.com/office/drawing/2014/main" id="{59D33000-B5B8-479E-AFEB-7BEF90C48131}"/>
               </a:ext>
             </a:extLst>
           </p:cNvPr>
@@ -5235,66 +5296,6 @@
         </p:blipFill>
         <p:spPr>
           <a:xfrm>
-            <a:off x="5810569" y="1161904"/>
-            <a:ext cx="5370154" cy="2593331"/>
-          </a:xfrm>
-          <a:prstGeom prst="roundRect">
-            <a:avLst/>
-          </a:prstGeom>
-        </p:spPr>
-      </p:pic>
-      <p:pic>
-        <p:nvPicPr>
-          <p:cNvPr id="6" name="Рисунок 5">
-            <a:extLst>
-              <a:ext uri="{FF2B5EF4-FFF2-40B4-BE49-F238E27FC236}">
-                <a16:creationId xmlns:a16="http://schemas.microsoft.com/office/drawing/2014/main" id="{E011AC4F-65E5-438D-8341-0BE331B6362F}"/>
-              </a:ext>
-            </a:extLst>
-          </p:cNvPr>
-          <p:cNvPicPr>
-            <a:picLocks noChangeAspect="1"/>
-          </p:cNvPicPr>
-          <p:nvPr/>
-        </p:nvPicPr>
-        <p:blipFill>
-          <a:blip r:embed="rId3"/>
-          <a:stretch>
-            <a:fillRect/>
-          </a:stretch>
-        </p:blipFill>
-        <p:spPr>
-          <a:xfrm>
-            <a:off x="5810569" y="4248761"/>
-            <a:ext cx="5592832" cy="2215301"/>
-          </a:xfrm>
-          <a:prstGeom prst="roundRect">
-            <a:avLst/>
-          </a:prstGeom>
-        </p:spPr>
-      </p:pic>
-      <p:pic>
-        <p:nvPicPr>
-          <p:cNvPr id="9" name="Рисунок 8">
-            <a:extLst>
-              <a:ext uri="{FF2B5EF4-FFF2-40B4-BE49-F238E27FC236}">
-                <a16:creationId xmlns:a16="http://schemas.microsoft.com/office/drawing/2014/main" id="{59D33000-B5B8-479E-AFEB-7BEF90C48131}"/>
-              </a:ext>
-            </a:extLst>
-          </p:cNvPr>
-          <p:cNvPicPr>
-            <a:picLocks noChangeAspect="1"/>
-          </p:cNvPicPr>
-          <p:nvPr/>
-        </p:nvPicPr>
-        <p:blipFill>
-          <a:blip r:embed="rId4"/>
-          <a:stretch>
-            <a:fillRect/>
-          </a:stretch>
-        </p:blipFill>
-        <p:spPr>
-          <a:xfrm>
             <a:off x="666686" y="2957431"/>
             <a:ext cx="1962424" cy="3286584"/>
           </a:xfrm>
@@ -5385,8 +5386,8 @@
         </p:nvSpPr>
         <p:spPr>
           <a:xfrm>
-            <a:off x="3492176" y="1570653"/>
-            <a:ext cx="1962424" cy="1630405"/>
+            <a:off x="3210049" y="1448110"/>
+            <a:ext cx="3643100" cy="1039708"/>
           </a:xfrm>
           <a:prstGeom prst="roundRect">
             <a:avLst/>
@@ -5416,7 +5417,7 @@
         </p:style>
         <p:txBody>
           <a:bodyPr wrap="square" lIns="128016" tIns="91440" rIns="109728" bIns="73152" rtlCol="0" anchor="ctr">
-            <a:normAutofit fontScale="92500"/>
+            <a:normAutofit lnSpcReduction="10000"/>
           </a:bodyPr>
           <a:lstStyle/>
           <a:p>
@@ -5428,7 +5429,7 @@
                 </a:solidFill>
                 <a:latin typeface="Arial"/>
               </a:rPr>
-              <a:t>Реализован функционал пространственно-временного поиска</a:t>
+              <a:t>Позиционное отслеживание актуальных телеметрических данных</a:t>
             </a:r>
             <a:endParaRPr dirty="0">
               <a:solidFill>
@@ -5453,8 +5454,8 @@
         </p:nvSpPr>
         <p:spPr>
           <a:xfrm>
-            <a:off x="3492176" y="4473389"/>
-            <a:ext cx="1962424" cy="1757740"/>
+            <a:off x="7521993" y="1448110"/>
+            <a:ext cx="3544192" cy="1039708"/>
           </a:xfrm>
           <a:prstGeom prst="roundRect">
             <a:avLst/>
@@ -5484,21 +5485,21 @@
         </p:style>
         <p:txBody>
           <a:bodyPr wrap="square" lIns="128016" tIns="91440" rIns="109728" bIns="73152" rtlCol="0" anchor="ctr">
-            <a:normAutofit fontScale="92500" lnSpcReduction="20000"/>
+            <a:normAutofit lnSpcReduction="10000"/>
           </a:bodyPr>
           <a:lstStyle/>
           <a:p>
             <a:pPr algn="l"/>
             <a:r>
-              <a:rPr lang="ru-RU" sz="1600" dirty="0">
+              <a:rPr lang="ru-RU" dirty="0">
                 <a:solidFill>
                   <a:srgbClr val="272D3A"/>
                 </a:solidFill>
                 <a:latin typeface="Arial"/>
               </a:rPr>
-              <a:t>Реализован функционал событий зонального отслеживания с минимальной задержкой</a:t>
-            </a:r>
-            <a:endParaRPr sz="1600" dirty="0">
+              <a:t>Позиционное отслеживание исторических телеметрических данных</a:t>
+            </a:r>
+            <a:endParaRPr dirty="0">
               <a:solidFill>
                 <a:srgbClr val="272D3A"/>
               </a:solidFill>
@@ -5507,10 +5508,66 @@
           </a:p>
         </p:txBody>
       </p:sp>
+      <p:pic>
+        <p:nvPicPr>
+          <p:cNvPr id="13" name="Рисунок 12">
+            <a:extLst>
+              <a:ext uri="{FF2B5EF4-FFF2-40B4-BE49-F238E27FC236}">
+                <a16:creationId xmlns:a16="http://schemas.microsoft.com/office/drawing/2014/main" id="{29FC555F-AFEA-4676-9F0F-75CCB67A0DDD}"/>
+              </a:ext>
+            </a:extLst>
+          </p:cNvPr>
+          <p:cNvPicPr/>
+          <p:nvPr/>
+        </p:nvPicPr>
+        <p:blipFill rotWithShape="1">
+          <a:blip r:embed="rId3"/>
+          <a:srcRect l="26954" t="10709"/>
+          <a:stretch/>
+        </p:blipFill>
+        <p:spPr>
+          <a:xfrm>
+            <a:off x="3024985" y="2687227"/>
+            <a:ext cx="3963808" cy="3157970"/>
+          </a:xfrm>
+          <a:prstGeom prst="roundRect">
+            <a:avLst/>
+          </a:prstGeom>
+        </p:spPr>
+      </p:pic>
+      <p:pic>
+        <p:nvPicPr>
+          <p:cNvPr id="2" name="Рисунок 1">
+            <a:extLst>
+              <a:ext uri="{FF2B5EF4-FFF2-40B4-BE49-F238E27FC236}">
+                <a16:creationId xmlns:a16="http://schemas.microsoft.com/office/drawing/2014/main" id="{5B2800F1-0197-4027-B6F4-68E4563C6982}"/>
+              </a:ext>
+            </a:extLst>
+          </p:cNvPr>
+          <p:cNvPicPr>
+            <a:picLocks noChangeAspect="1"/>
+          </p:cNvPicPr>
+          <p:nvPr/>
+        </p:nvPicPr>
+        <p:blipFill rotWithShape="1">
+          <a:blip r:embed="rId4"/>
+          <a:srcRect l="39156" t="15703" r="1"/>
+          <a:stretch/>
+        </p:blipFill>
+        <p:spPr>
+          <a:xfrm>
+            <a:off x="7434467" y="2687226"/>
+            <a:ext cx="3917455" cy="3157971"/>
+          </a:xfrm>
+          <a:prstGeom prst="roundRect">
+            <a:avLst/>
+          </a:prstGeom>
+        </p:spPr>
+      </p:pic>
     </p:spTree>
     <p:extLst>
       <p:ext uri="{BB962C8B-B14F-4D97-AF65-F5344CB8AC3E}">
-        <p14:creationId xmlns:p14="http://schemas.microsoft.com/office/powerpoint/2010/main" val="3757779701"/>
+        <p14:creationId xmlns:p14="http://schemas.microsoft.com/office/powerpoint/2010/main" val="1080270270"/>
       </p:ext>
     </p:extLst>
   </p:cSld>
@@ -5539,6 +5596,75 @@
       </p:grpSpPr>
       <p:sp>
         <p:nvSpPr>
+          <p:cNvPr id="16" name="Прямоугольник: скругленные противолежащие углы 15">
+            <a:extLst>
+              <a:ext uri="{FF2B5EF4-FFF2-40B4-BE49-F238E27FC236}">
+                <a16:creationId xmlns:a16="http://schemas.microsoft.com/office/drawing/2014/main" id="{2B041327-A20A-4913-9407-35234401A68A}"/>
+              </a:ext>
+            </a:extLst>
+          </p:cNvPr>
+          <p:cNvSpPr/>
+          <p:nvPr/>
+        </p:nvSpPr>
+        <p:spPr>
+          <a:xfrm>
+            <a:off x="417443" y="1035421"/>
+            <a:ext cx="11430000" cy="5633736"/>
+          </a:xfrm>
+          <a:prstGeom prst="round2DiagRect">
+            <a:avLst/>
+          </a:prstGeom>
+          <a:gradFill flip="none" rotWithShape="1">
+            <a:gsLst>
+              <a:gs pos="0">
+                <a:srgbClr val="B6E4B8"/>
+              </a:gs>
+              <a:gs pos="75000">
+                <a:schemeClr val="accent1">
+                  <a:tint val="23500"/>
+                  <a:satMod val="160000"/>
+                </a:schemeClr>
+              </a:gs>
+            </a:gsLst>
+            <a:lin ang="16200000" scaled="1"/>
+            <a:tileRect/>
+          </a:gradFill>
+          <a:ln/>
+        </p:spPr>
+        <p:style>
+          <a:lnRef idx="1">
+            <a:schemeClr val="accent1"/>
+          </a:lnRef>
+          <a:fillRef idx="2">
+            <a:schemeClr val="accent1"/>
+          </a:fillRef>
+          <a:effectRef idx="1">
+            <a:schemeClr val="accent1"/>
+          </a:effectRef>
+          <a:fontRef idx="minor">
+            <a:schemeClr val="dk1"/>
+          </a:fontRef>
+        </p:style>
+        <p:txBody>
+          <a:bodyPr rot="0" spcFirstLastPara="0" vertOverflow="overflow" horzOverflow="overflow" vert="horz" wrap="square" lIns="91440" tIns="45720" rIns="91440" bIns="45720" numCol="1" spcCol="0" rtlCol="0" fromWordArt="0" anchor="ctr" anchorCtr="0" forceAA="0" compatLnSpc="1">
+            <a:prstTxWarp prst="textNoShape">
+              <a:avLst/>
+            </a:prstTxWarp>
+            <a:noAutofit/>
+          </a:bodyPr>
+          <a:lstStyle/>
+          <a:p>
+            <a:pPr algn="ctr"/>
+            <a:endParaRPr lang="ru-RU" sz="1000" dirty="0">
+              <a:solidFill>
+                <a:schemeClr val="tx2"/>
+              </a:solidFill>
+            </a:endParaRPr>
+          </a:p>
+        </p:txBody>
+      </p:sp>
+      <p:sp>
+        <p:nvSpPr>
           <p:cNvPr id="7" name="Заголовок 6">
             <a:extLst>
               <a:ext uri="{FF2B5EF4-FFF2-40B4-BE49-F238E27FC236}">
@@ -5560,17 +5686,77 @@
           <a:p>
             <a:r>
               <a:rPr lang="ru-RU" dirty="0"/>
-              <a:t>Тестирование</a:t>
+              <a:t>Результаты</a:t>
             </a:r>
           </a:p>
         </p:txBody>
       </p:sp>
+      <p:pic>
+        <p:nvPicPr>
+          <p:cNvPr id="4" name="Рисунок 3">
+            <a:extLst>
+              <a:ext uri="{FF2B5EF4-FFF2-40B4-BE49-F238E27FC236}">
+                <a16:creationId xmlns:a16="http://schemas.microsoft.com/office/drawing/2014/main" id="{CA72AFB1-5797-4602-8492-C4058267F4AD}"/>
+              </a:ext>
+            </a:extLst>
+          </p:cNvPr>
+          <p:cNvPicPr>
+            <a:picLocks noChangeAspect="1"/>
+          </p:cNvPicPr>
+          <p:nvPr/>
+        </p:nvPicPr>
+        <p:blipFill>
+          <a:blip r:embed="rId2"/>
+          <a:stretch>
+            <a:fillRect/>
+          </a:stretch>
+        </p:blipFill>
+        <p:spPr>
+          <a:xfrm>
+            <a:off x="550863" y="3622397"/>
+            <a:ext cx="6139486" cy="2964853"/>
+          </a:xfrm>
+          <a:prstGeom prst="roundRect">
+            <a:avLst/>
+          </a:prstGeom>
+        </p:spPr>
+      </p:pic>
+      <p:pic>
+        <p:nvPicPr>
+          <p:cNvPr id="6" name="Рисунок 5">
+            <a:extLst>
+              <a:ext uri="{FF2B5EF4-FFF2-40B4-BE49-F238E27FC236}">
+                <a16:creationId xmlns:a16="http://schemas.microsoft.com/office/drawing/2014/main" id="{E011AC4F-65E5-438D-8341-0BE331B6362F}"/>
+              </a:ext>
+            </a:extLst>
+          </p:cNvPr>
+          <p:cNvPicPr>
+            <a:picLocks noChangeAspect="1"/>
+          </p:cNvPicPr>
+          <p:nvPr/>
+        </p:nvPicPr>
+        <p:blipFill>
+          <a:blip r:embed="rId3"/>
+          <a:stretch>
+            <a:fillRect/>
+          </a:stretch>
+        </p:blipFill>
+        <p:spPr>
+          <a:xfrm>
+            <a:off x="5515122" y="1089239"/>
+            <a:ext cx="6259435" cy="2479340"/>
+          </a:xfrm>
+          <a:prstGeom prst="roundRect">
+            <a:avLst/>
+          </a:prstGeom>
+        </p:spPr>
+      </p:pic>
       <p:sp>
         <p:nvSpPr>
-          <p:cNvPr id="4" name="Rounded Rectangle 18">
-            <a:extLst>
-              <a:ext uri="{FF2B5EF4-FFF2-40B4-BE49-F238E27FC236}">
-                <a16:creationId xmlns:a16="http://schemas.microsoft.com/office/drawing/2014/main" id="{009E8B41-D6A8-4227-AC1C-6E6385FFC964}"/>
+          <p:cNvPr id="11" name="Rounded Rectangle 18">
+            <a:extLst>
+              <a:ext uri="{FF2B5EF4-FFF2-40B4-BE49-F238E27FC236}">
+                <a16:creationId xmlns:a16="http://schemas.microsoft.com/office/drawing/2014/main" id="{EFA6D75D-C076-44B8-ADF6-48C564D4F61B}"/>
               </a:ext>
             </a:extLst>
           </p:cNvPr>
@@ -5579,8 +5765,8 @@
         </p:nvSpPr>
         <p:spPr>
           <a:xfrm>
-            <a:off x="928269" y="1327949"/>
-            <a:ext cx="2487283" cy="1424216"/>
+            <a:off x="6962917" y="4526609"/>
+            <a:ext cx="4129153" cy="1156428"/>
           </a:xfrm>
           <a:prstGeom prst="roundRect">
             <a:avLst/>
@@ -5610,80 +5796,152 @@
         </p:style>
         <p:txBody>
           <a:bodyPr wrap="square" lIns="128016" tIns="91440" rIns="109728" bIns="73152" rtlCol="0" anchor="ctr">
-            <a:normAutofit fontScale="92500" lnSpcReduction="20000"/>
+            <a:normAutofit/>
           </a:bodyPr>
           <a:lstStyle/>
           <a:p>
             <a:pPr algn="l"/>
             <a:r>
-              <a:rPr lang="ru-RU" sz="1600" dirty="0">
+              <a:rPr lang="ru-RU" dirty="0">
                 <a:solidFill>
                   <a:srgbClr val="272D3A"/>
                 </a:solidFill>
                 <a:latin typeface="Arial"/>
               </a:rPr>
-              <a:t>Виды тестирования:</a:t>
-            </a:r>
-          </a:p>
-          <a:p>
-            <a:pPr marL="285750" indent="-285750" algn="l">
-              <a:buFont typeface="Arial" panose="020B0604020202020204" pitchFamily="34" charset="0"/>
-              <a:buChar char="•"/>
-            </a:pPr>
-            <a:r>
-              <a:rPr lang="en-US" sz="1600" dirty="0">
-                <a:solidFill>
-                  <a:srgbClr val="272D3A"/>
-                </a:solidFill>
-                <a:latin typeface="Arial"/>
-              </a:rPr>
-              <a:t>Unit-</a:t>
-            </a:r>
-            <a:r>
-              <a:rPr lang="ru-RU" sz="1600" dirty="0">
-                <a:solidFill>
-                  <a:srgbClr val="272D3A"/>
-                </a:solidFill>
-                <a:latin typeface="Arial"/>
-              </a:rPr>
-              <a:t>тесты</a:t>
-            </a:r>
-          </a:p>
-          <a:p>
-            <a:pPr marL="285750" indent="-285750" algn="l">
-              <a:buFont typeface="Arial" panose="020B0604020202020204" pitchFamily="34" charset="0"/>
-              <a:buChar char="•"/>
-            </a:pPr>
-            <a:r>
-              <a:rPr lang="ru-RU" sz="1600" dirty="0">
-                <a:solidFill>
-                  <a:srgbClr val="272D3A"/>
-                </a:solidFill>
-                <a:latin typeface="Arial"/>
-              </a:rPr>
-              <a:t>Ручное тестирование</a:t>
-            </a:r>
-          </a:p>
-          <a:p>
-            <a:pPr marL="285750" indent="-285750" algn="l">
-              <a:buFont typeface="Arial" panose="020B0604020202020204" pitchFamily="34" charset="0"/>
-              <a:buChar char="•"/>
-            </a:pPr>
-            <a:r>
-              <a:rPr lang="ru-RU" sz="1600" dirty="0">
-                <a:solidFill>
-                  <a:srgbClr val="272D3A"/>
-                </a:solidFill>
-                <a:latin typeface="Arial"/>
-              </a:rPr>
-              <a:t>Нагрузочное тестирование</a:t>
-            </a:r>
-            <a:endParaRPr sz="1600" dirty="0">
+              <a:t>Пространственно-временной поиск исторических телеметрических данных</a:t>
+            </a:r>
+            <a:endParaRPr dirty="0">
               <a:solidFill>
                 <a:srgbClr val="272D3A"/>
               </a:solidFill>
               <a:latin typeface="Arial"/>
             </a:endParaRPr>
+          </a:p>
+        </p:txBody>
+      </p:sp>
+      <p:sp>
+        <p:nvSpPr>
+          <p:cNvPr id="12" name="Rounded Rectangle 18">
+            <a:extLst>
+              <a:ext uri="{FF2B5EF4-FFF2-40B4-BE49-F238E27FC236}">
+                <a16:creationId xmlns:a16="http://schemas.microsoft.com/office/drawing/2014/main" id="{291FAA3A-BCBB-4583-B16D-E8EFE3063A3F}"/>
+              </a:ext>
+            </a:extLst>
+          </p:cNvPr>
+          <p:cNvSpPr/>
+          <p:nvPr/>
+        </p:nvSpPr>
+        <p:spPr>
+          <a:xfrm>
+            <a:off x="894522" y="1679914"/>
+            <a:ext cx="4422913" cy="1152738"/>
+          </a:xfrm>
+          <a:prstGeom prst="roundRect">
+            <a:avLst/>
+          </a:prstGeom>
+          <a:solidFill>
+            <a:srgbClr val="E7F3FD"/>
+          </a:solidFill>
+          <a:ln w="12700">
+            <a:solidFill>
+              <a:srgbClr val="00A3E0"/>
+            </a:solidFill>
+          </a:ln>
+        </p:spPr>
+        <p:style>
+          <a:lnRef idx="1">
+            <a:schemeClr val="accent1"/>
+          </a:lnRef>
+          <a:fillRef idx="3">
+            <a:schemeClr val="accent1"/>
+          </a:fillRef>
+          <a:effectRef idx="2">
+            <a:schemeClr val="accent1"/>
+          </a:effectRef>
+          <a:fontRef idx="minor">
+            <a:schemeClr val="lt1"/>
+          </a:fontRef>
+        </p:style>
+        <p:txBody>
+          <a:bodyPr wrap="square" lIns="128016" tIns="91440" rIns="109728" bIns="73152" rtlCol="0" anchor="ctr">
+            <a:normAutofit/>
+          </a:bodyPr>
+          <a:lstStyle/>
+          <a:p>
+            <a:pPr algn="l"/>
+            <a:r>
+              <a:rPr lang="ru-RU" dirty="0">
+                <a:solidFill>
+                  <a:srgbClr val="272D3A"/>
+                </a:solidFill>
+                <a:latin typeface="Arial"/>
+              </a:rPr>
+              <a:t>Генерация событий зонального отслеживания с минимальной задержкой</a:t>
+            </a:r>
+            <a:endParaRPr dirty="0">
+              <a:solidFill>
+                <a:srgbClr val="272D3A"/>
+              </a:solidFill>
+              <a:latin typeface="Arial"/>
+            </a:endParaRPr>
+          </a:p>
+        </p:txBody>
+      </p:sp>
+    </p:spTree>
+    <p:extLst>
+      <p:ext uri="{BB962C8B-B14F-4D97-AF65-F5344CB8AC3E}">
+        <p14:creationId xmlns:p14="http://schemas.microsoft.com/office/powerpoint/2010/main" val="3757779701"/>
+      </p:ext>
+    </p:extLst>
+  </p:cSld>
+  <p:clrMapOvr>
+    <a:masterClrMapping/>
+  </p:clrMapOvr>
+</p:sld>
+</file>
+
+<file path=ppt/slides/slide12.xml><?xml version="1.0" encoding="utf-8"?>
+<p:sld xmlns:a="http://schemas.openxmlformats.org/drawingml/2006/main" xmlns:r="http://schemas.openxmlformats.org/officeDocument/2006/relationships" xmlns:p="http://schemas.openxmlformats.org/presentationml/2006/main">
+  <p:cSld>
+    <p:spTree>
+      <p:nvGrpSpPr>
+        <p:cNvPr id="1" name=""/>
+        <p:cNvGrpSpPr/>
+        <p:nvPr/>
+      </p:nvGrpSpPr>
+      <p:grpSpPr>
+        <a:xfrm>
+          <a:off x="0" y="0"/>
+          <a:ext cx="0" cy="0"/>
+          <a:chOff x="0" y="0"/>
+          <a:chExt cx="0" cy="0"/>
+        </a:xfrm>
+      </p:grpSpPr>
+      <p:sp>
+        <p:nvSpPr>
+          <p:cNvPr id="7" name="Заголовок 6">
+            <a:extLst>
+              <a:ext uri="{FF2B5EF4-FFF2-40B4-BE49-F238E27FC236}">
+                <a16:creationId xmlns:a16="http://schemas.microsoft.com/office/drawing/2014/main" id="{C950A427-2396-4452-A267-FC25A12F1CCE}"/>
+              </a:ext>
+            </a:extLst>
+          </p:cNvPr>
+          <p:cNvSpPr>
+            <a:spLocks noGrp="1"/>
+          </p:cNvSpPr>
+          <p:nvPr>
+            <p:ph type="title"/>
+          </p:nvPr>
+        </p:nvSpPr>
+        <p:spPr/>
+        <p:txBody>
+          <a:bodyPr/>
+          <a:lstStyle/>
+          <a:p>
+            <a:r>
+              <a:rPr lang="ru-RU" dirty="0"/>
+              <a:t>Тестирование</a:t>
+            </a:r>
           </a:p>
         </p:txBody>
       </p:sp>
@@ -5702,14 +5960,14 @@
           <p:nvPr>
             <p:extLst>
               <p:ext uri="{D42A27DB-BD31-4B8C-83A1-F6EECF244321}">
-                <p14:modId xmlns:p14="http://schemas.microsoft.com/office/powerpoint/2010/main" val="2539523610"/>
+                <p14:modId xmlns:p14="http://schemas.microsoft.com/office/powerpoint/2010/main" val="3178486620"/>
               </p:ext>
             </p:extLst>
           </p:nvPr>
         </p:nvGraphicFramePr>
         <p:xfrm>
-          <a:off x="3918411" y="1761484"/>
-          <a:ext cx="7646060" cy="4120342"/>
+          <a:off x="3556932" y="1224793"/>
+          <a:ext cx="8084205" cy="5033394"/>
         </p:xfrm>
         <a:graphic>
           <a:graphicData uri="http://schemas.openxmlformats.org/drawingml/2006/table">
@@ -5718,14 +5976,14 @@
                 <a:tableStyleId>{5C22544A-7EE6-4342-B048-85BDC9FD1C3A}</a:tableStyleId>
               </a:tblPr>
               <a:tblGrid>
-                <a:gridCol w="1827575">
+                <a:gridCol w="2175083">
                   <a:extLst>
                     <a:ext uri="{9D8B030D-6E8A-4147-A177-3AD203B41FA5}">
                       <a16:colId xmlns:a16="http://schemas.microsoft.com/office/drawing/2014/main" val="1796730915"/>
                     </a:ext>
                   </a:extLst>
                 </a:gridCol>
-                <a:gridCol w="5818485">
+                <a:gridCol w="5909122">
                   <a:extLst>
                     <a:ext uri="{9D8B030D-6E8A-4147-A177-3AD203B41FA5}">
                       <a16:colId xmlns:a16="http://schemas.microsoft.com/office/drawing/2014/main" val="3988056901"/>
@@ -5733,7 +5991,7 @@
                   </a:extLst>
                 </a:gridCol>
               </a:tblGrid>
-              <a:tr h="614094">
+              <a:tr h="746130">
                 <a:tc>
                   <a:txBody>
                     <a:bodyPr/>
@@ -5894,7 +6152,7 @@
                   </a:ext>
                 </a:extLst>
               </a:tr>
-              <a:tr h="998744">
+              <a:tr h="1213484">
                 <a:tc>
                   <a:txBody>
                     <a:bodyPr/>
@@ -5912,25 +6170,7 @@
                           </a:solidFill>
                           <a:latin typeface="Arial"/>
                         </a:rPr>
-                        <a:t>Автоматизированные </a:t>
-                      </a:r>
-                      <a:r>
-                        <a:rPr lang="en-US" sz="1600" b="0" dirty="0">
-                          <a:solidFill>
-                            <a:srgbClr val="272D3A"/>
-                          </a:solidFill>
-                          <a:latin typeface="Arial"/>
-                        </a:rPr>
-                        <a:t>Unit-</a:t>
-                      </a:r>
-                      <a:r>
-                        <a:rPr lang="ru-RU" sz="1600" b="0" dirty="0">
-                          <a:solidFill>
-                            <a:srgbClr val="272D3A"/>
-                          </a:solidFill>
-                          <a:latin typeface="Arial"/>
-                        </a:rPr>
-                        <a:t>тесты</a:t>
+                        <a:t>Автоматизированные модульные тесты</a:t>
                       </a:r>
                       <a:endParaRPr sz="1600" b="0" dirty="0">
                         <a:solidFill>
@@ -6090,7 +6330,7 @@
                   </a:ext>
                 </a:extLst>
               </a:tr>
-              <a:tr h="998744">
+              <a:tr h="1240622">
                 <a:tc>
                   <a:txBody>
                     <a:bodyPr/>
@@ -6108,7 +6348,7 @@
                           </a:solidFill>
                           <a:latin typeface="Arial"/>
                         </a:rPr>
-                        <a:t>Ручное интеграционное тестирование</a:t>
+                        <a:t>Ручное интеграционное функциональное тестирование</a:t>
                       </a:r>
                       <a:endParaRPr sz="1600" b="0" dirty="0">
                         <a:solidFill>
@@ -6251,7 +6491,7 @@
                   </a:ext>
                 </a:extLst>
               </a:tr>
-              <a:tr h="998744">
+              <a:tr h="1833158">
                 <a:tc>
                   <a:txBody>
                     <a:bodyPr/>
@@ -6477,7 +6717,7 @@
         </p:nvSpPr>
         <p:spPr>
           <a:xfrm>
-            <a:off x="928269" y="2967318"/>
+            <a:off x="550863" y="1403865"/>
             <a:ext cx="2487283" cy="1515036"/>
           </a:xfrm>
           <a:prstGeom prst="roundRect">
@@ -6545,7 +6785,7 @@
         </p:nvSpPr>
         <p:spPr>
           <a:xfrm>
-            <a:off x="928268" y="4772533"/>
+            <a:off x="550863" y="4383539"/>
             <a:ext cx="2487283" cy="1515036"/>
           </a:xfrm>
           <a:prstGeom prst="roundRect">
@@ -6591,1926 +6831,6 @@
               <a:t>Узкое место: прием и сохранение телеметрических данных</a:t>
             </a:r>
             <a:endParaRPr dirty="0">
-              <a:solidFill>
-                <a:srgbClr val="272D3A"/>
-              </a:solidFill>
-              <a:latin typeface="Arial"/>
-            </a:endParaRPr>
-          </a:p>
-        </p:txBody>
-      </p:sp>
-    </p:spTree>
-    <p:extLst>
-      <p:ext uri="{BB962C8B-B14F-4D97-AF65-F5344CB8AC3E}">
-        <p14:creationId xmlns:p14="http://schemas.microsoft.com/office/powerpoint/2010/main" val="3757779701"/>
-      </p:ext>
-    </p:extLst>
-  </p:cSld>
-  <p:clrMapOvr>
-    <a:masterClrMapping/>
-  </p:clrMapOvr>
-</p:sld>
-</file>
-
-<file path=ppt/slides/slide12.xml><?xml version="1.0" encoding="utf-8"?>
-<p:sld xmlns:a="http://schemas.openxmlformats.org/drawingml/2006/main" xmlns:r="http://schemas.openxmlformats.org/officeDocument/2006/relationships" xmlns:p="http://schemas.openxmlformats.org/presentationml/2006/main">
-  <p:cSld>
-    <p:spTree>
-      <p:nvGrpSpPr>
-        <p:cNvPr id="1" name=""/>
-        <p:cNvGrpSpPr/>
-        <p:nvPr/>
-      </p:nvGrpSpPr>
-      <p:grpSpPr>
-        <a:xfrm>
-          <a:off x="0" y="0"/>
-          <a:ext cx="0" cy="0"/>
-          <a:chOff x="0" y="0"/>
-          <a:chExt cx="0" cy="0"/>
-        </a:xfrm>
-      </p:grpSpPr>
-      <p:sp>
-        <p:nvSpPr>
-          <p:cNvPr id="7" name="Заголовок 6">
-            <a:extLst>
-              <a:ext uri="{FF2B5EF4-FFF2-40B4-BE49-F238E27FC236}">
-                <a16:creationId xmlns:a16="http://schemas.microsoft.com/office/drawing/2014/main" id="{C950A427-2396-4452-A267-FC25A12F1CCE}"/>
-              </a:ext>
-            </a:extLst>
-          </p:cNvPr>
-          <p:cNvSpPr>
-            <a:spLocks noGrp="1"/>
-          </p:cNvSpPr>
-          <p:nvPr>
-            <p:ph type="title"/>
-          </p:nvPr>
-        </p:nvSpPr>
-        <p:spPr/>
-        <p:txBody>
-          <a:bodyPr/>
-          <a:lstStyle/>
-          <a:p>
-            <a:r>
-              <a:rPr lang="ru-RU" dirty="0"/>
-              <a:t>Заключение</a:t>
-            </a:r>
-          </a:p>
-        </p:txBody>
-      </p:sp>
-      <p:sp>
-        <p:nvSpPr>
-          <p:cNvPr id="4" name="TextBox 3">
-            <a:extLst>
-              <a:ext uri="{FF2B5EF4-FFF2-40B4-BE49-F238E27FC236}">
-                <a16:creationId xmlns:a16="http://schemas.microsoft.com/office/drawing/2014/main" id="{C704F466-5A37-4C58-87B0-E9FCEA41EBC0}"/>
-              </a:ext>
-            </a:extLst>
-          </p:cNvPr>
-          <p:cNvSpPr txBox="1"/>
-          <p:nvPr/>
-        </p:nvSpPr>
-        <p:spPr>
-          <a:xfrm>
-            <a:off x="520550" y="1214180"/>
-            <a:ext cx="4392110" cy="408623"/>
-          </a:xfrm>
-          <a:prstGeom prst="roundRect">
-            <a:avLst/>
-          </a:prstGeom>
-          <a:ln w="19050"/>
-        </p:spPr>
-        <p:style>
-          <a:lnRef idx="2">
-            <a:schemeClr val="accent1"/>
-          </a:lnRef>
-          <a:fillRef idx="1">
-            <a:schemeClr val="lt1"/>
-          </a:fillRef>
-          <a:effectRef idx="0">
-            <a:schemeClr val="accent1"/>
-          </a:effectRef>
-          <a:fontRef idx="minor">
-            <a:schemeClr val="dk1"/>
-          </a:fontRef>
-        </p:style>
-        <p:txBody>
-          <a:bodyPr wrap="square">
-            <a:spAutoFit/>
-          </a:bodyPr>
-          <a:lstStyle/>
-          <a:p>
-            <a:pPr algn="ctr"/>
-            <a:r>
-              <a:rPr lang="ru-RU" sz="1800" b="1" i="0" dirty="0">
-                <a:solidFill>
-                  <a:srgbClr val="005BAA"/>
-                </a:solidFill>
-                <a:latin typeface="Arial"/>
-              </a:rPr>
-              <a:t>В ходе работы выполнены этапы</a:t>
-            </a:r>
-          </a:p>
-        </p:txBody>
-      </p:sp>
-      <p:sp>
-        <p:nvSpPr>
-          <p:cNvPr id="5" name="Rounded Rectangle 18">
-            <a:extLst>
-              <a:ext uri="{FF2B5EF4-FFF2-40B4-BE49-F238E27FC236}">
-                <a16:creationId xmlns:a16="http://schemas.microsoft.com/office/drawing/2014/main" id="{8F9F4DA8-333C-4DDC-8B1A-44131E8F2525}"/>
-              </a:ext>
-            </a:extLst>
-          </p:cNvPr>
-          <p:cNvSpPr/>
-          <p:nvPr/>
-        </p:nvSpPr>
-        <p:spPr>
-          <a:xfrm>
-            <a:off x="1255660" y="1838937"/>
-            <a:ext cx="1371003" cy="859439"/>
-          </a:xfrm>
-          <a:prstGeom prst="roundRect">
-            <a:avLst/>
-          </a:prstGeom>
-          <a:solidFill>
-            <a:srgbClr val="E7F3FD"/>
-          </a:solidFill>
-          <a:ln w="12700">
-            <a:solidFill>
-              <a:srgbClr val="00A3E0"/>
-            </a:solidFill>
-          </a:ln>
-        </p:spPr>
-        <p:style>
-          <a:lnRef idx="1">
-            <a:schemeClr val="accent1"/>
-          </a:lnRef>
-          <a:fillRef idx="3">
-            <a:schemeClr val="accent1"/>
-          </a:fillRef>
-          <a:effectRef idx="2">
-            <a:schemeClr val="accent1"/>
-          </a:effectRef>
-          <a:fontRef idx="minor">
-            <a:schemeClr val="lt1"/>
-          </a:fontRef>
-        </p:style>
-        <p:txBody>
-          <a:bodyPr wrap="square" lIns="128016" tIns="91440" rIns="109728" bIns="73152" rtlCol="0" anchor="ctr">
-            <a:normAutofit lnSpcReduction="10000"/>
-          </a:bodyPr>
-          <a:lstStyle/>
-          <a:p>
-            <a:pPr algn="ctr"/>
-            <a:r>
-              <a:rPr lang="ru-RU" sz="1400" dirty="0">
-                <a:solidFill>
-                  <a:srgbClr val="272D3A"/>
-                </a:solidFill>
-                <a:latin typeface="Arial"/>
-              </a:rPr>
-              <a:t>Анализ предметной области</a:t>
-            </a:r>
-            <a:endParaRPr sz="1400" dirty="0">
-              <a:solidFill>
-                <a:srgbClr val="272D3A"/>
-              </a:solidFill>
-              <a:latin typeface="Arial"/>
-            </a:endParaRPr>
-          </a:p>
-        </p:txBody>
-      </p:sp>
-      <p:sp>
-        <p:nvSpPr>
-          <p:cNvPr id="6" name="Rounded Rectangle 18">
-            <a:extLst>
-              <a:ext uri="{FF2B5EF4-FFF2-40B4-BE49-F238E27FC236}">
-                <a16:creationId xmlns:a16="http://schemas.microsoft.com/office/drawing/2014/main" id="{94A85E6C-31B0-482F-BEDF-8A5C432796AE}"/>
-              </a:ext>
-            </a:extLst>
-          </p:cNvPr>
-          <p:cNvSpPr/>
-          <p:nvPr/>
-        </p:nvSpPr>
-        <p:spPr>
-          <a:xfrm>
-            <a:off x="2887236" y="1829967"/>
-            <a:ext cx="1371003" cy="859439"/>
-          </a:xfrm>
-          <a:prstGeom prst="roundRect">
-            <a:avLst/>
-          </a:prstGeom>
-          <a:solidFill>
-            <a:srgbClr val="E7F3FD"/>
-          </a:solidFill>
-          <a:ln w="12700">
-            <a:solidFill>
-              <a:srgbClr val="00A3E0"/>
-            </a:solidFill>
-          </a:ln>
-        </p:spPr>
-        <p:style>
-          <a:lnRef idx="1">
-            <a:schemeClr val="accent1"/>
-          </a:lnRef>
-          <a:fillRef idx="3">
-            <a:schemeClr val="accent1"/>
-          </a:fillRef>
-          <a:effectRef idx="2">
-            <a:schemeClr val="accent1"/>
-          </a:effectRef>
-          <a:fontRef idx="minor">
-            <a:schemeClr val="lt1"/>
-          </a:fontRef>
-        </p:style>
-        <p:txBody>
-          <a:bodyPr wrap="square" lIns="128016" tIns="91440" rIns="109728" bIns="73152" rtlCol="0" anchor="ctr">
-            <a:normAutofit lnSpcReduction="10000"/>
-          </a:bodyPr>
-          <a:lstStyle/>
-          <a:p>
-            <a:pPr algn="ctr"/>
-            <a:r>
-              <a:rPr lang="ru-RU" sz="1400" dirty="0">
-                <a:solidFill>
-                  <a:srgbClr val="272D3A"/>
-                </a:solidFill>
-                <a:latin typeface="Arial"/>
-              </a:rPr>
-              <a:t>Анализ требований к ПП</a:t>
-            </a:r>
-            <a:endParaRPr sz="1400" dirty="0">
-              <a:solidFill>
-                <a:srgbClr val="272D3A"/>
-              </a:solidFill>
-              <a:latin typeface="Arial"/>
-            </a:endParaRPr>
-          </a:p>
-        </p:txBody>
-      </p:sp>
-      <p:sp>
-        <p:nvSpPr>
-          <p:cNvPr id="8" name="Rounded Rectangle 18">
-            <a:extLst>
-              <a:ext uri="{FF2B5EF4-FFF2-40B4-BE49-F238E27FC236}">
-                <a16:creationId xmlns:a16="http://schemas.microsoft.com/office/drawing/2014/main" id="{1E907D65-AB0D-4A89-9801-32C897A9BD98}"/>
-              </a:ext>
-            </a:extLst>
-          </p:cNvPr>
-          <p:cNvSpPr/>
-          <p:nvPr/>
-        </p:nvSpPr>
-        <p:spPr>
-          <a:xfrm>
-            <a:off x="4518812" y="1838937"/>
-            <a:ext cx="1371003" cy="859439"/>
-          </a:xfrm>
-          <a:prstGeom prst="roundRect">
-            <a:avLst/>
-          </a:prstGeom>
-          <a:solidFill>
-            <a:srgbClr val="E7F3FD"/>
-          </a:solidFill>
-          <a:ln w="12700">
-            <a:solidFill>
-              <a:srgbClr val="00A3E0"/>
-            </a:solidFill>
-          </a:ln>
-        </p:spPr>
-        <p:style>
-          <a:lnRef idx="1">
-            <a:schemeClr val="accent1"/>
-          </a:lnRef>
-          <a:fillRef idx="3">
-            <a:schemeClr val="accent1"/>
-          </a:fillRef>
-          <a:effectRef idx="2">
-            <a:schemeClr val="accent1"/>
-          </a:effectRef>
-          <a:fontRef idx="minor">
-            <a:schemeClr val="lt1"/>
-          </a:fontRef>
-        </p:style>
-        <p:txBody>
-          <a:bodyPr wrap="square" lIns="128016" tIns="91440" rIns="109728" bIns="73152" rtlCol="0" anchor="ctr">
-            <a:normAutofit lnSpcReduction="10000"/>
-          </a:bodyPr>
-          <a:lstStyle/>
-          <a:p>
-            <a:pPr algn="ctr"/>
-            <a:r>
-              <a:rPr lang="ru-RU" sz="1400" dirty="0">
-                <a:solidFill>
-                  <a:srgbClr val="272D3A"/>
-                </a:solidFill>
-                <a:latin typeface="Arial"/>
-              </a:rPr>
-              <a:t>Поиск методов решения</a:t>
-            </a:r>
-            <a:endParaRPr sz="1400" dirty="0">
-              <a:solidFill>
-                <a:srgbClr val="272D3A"/>
-              </a:solidFill>
-              <a:latin typeface="Arial"/>
-            </a:endParaRPr>
-          </a:p>
-        </p:txBody>
-      </p:sp>
-      <p:sp>
-        <p:nvSpPr>
-          <p:cNvPr id="9" name="Rounded Rectangle 18">
-            <a:extLst>
-              <a:ext uri="{FF2B5EF4-FFF2-40B4-BE49-F238E27FC236}">
-                <a16:creationId xmlns:a16="http://schemas.microsoft.com/office/drawing/2014/main" id="{80B00CB9-4C13-45CA-962A-3B9E24108960}"/>
-              </a:ext>
-            </a:extLst>
-          </p:cNvPr>
-          <p:cNvSpPr/>
-          <p:nvPr/>
-        </p:nvSpPr>
-        <p:spPr>
-          <a:xfrm>
-            <a:off x="6150388" y="1829966"/>
-            <a:ext cx="1371003" cy="859439"/>
-          </a:xfrm>
-          <a:prstGeom prst="roundRect">
-            <a:avLst/>
-          </a:prstGeom>
-          <a:solidFill>
-            <a:srgbClr val="E7F3FD"/>
-          </a:solidFill>
-          <a:ln w="12700">
-            <a:solidFill>
-              <a:srgbClr val="00A3E0"/>
-            </a:solidFill>
-          </a:ln>
-        </p:spPr>
-        <p:style>
-          <a:lnRef idx="1">
-            <a:schemeClr val="accent1"/>
-          </a:lnRef>
-          <a:fillRef idx="3">
-            <a:schemeClr val="accent1"/>
-          </a:fillRef>
-          <a:effectRef idx="2">
-            <a:schemeClr val="accent1"/>
-          </a:effectRef>
-          <a:fontRef idx="minor">
-            <a:schemeClr val="lt1"/>
-          </a:fontRef>
-        </p:style>
-        <p:txBody>
-          <a:bodyPr wrap="square" lIns="128016" tIns="91440" rIns="109728" bIns="73152" rtlCol="0" anchor="ctr">
-            <a:normAutofit/>
-          </a:bodyPr>
-          <a:lstStyle/>
-          <a:p>
-            <a:pPr algn="ctr"/>
-            <a:r>
-              <a:rPr lang="ru-RU" sz="1400" dirty="0">
-                <a:solidFill>
-                  <a:srgbClr val="272D3A"/>
-                </a:solidFill>
-                <a:latin typeface="Arial"/>
-              </a:rPr>
-              <a:t>Реализация</a:t>
-            </a:r>
-            <a:endParaRPr sz="1400" dirty="0">
-              <a:solidFill>
-                <a:srgbClr val="272D3A"/>
-              </a:solidFill>
-              <a:latin typeface="Arial"/>
-            </a:endParaRPr>
-          </a:p>
-        </p:txBody>
-      </p:sp>
-      <p:sp>
-        <p:nvSpPr>
-          <p:cNvPr id="10" name="Rounded Rectangle 18">
-            <a:extLst>
-              <a:ext uri="{FF2B5EF4-FFF2-40B4-BE49-F238E27FC236}">
-                <a16:creationId xmlns:a16="http://schemas.microsoft.com/office/drawing/2014/main" id="{831F63E4-B32D-42F2-BC37-31FA9782B58A}"/>
-              </a:ext>
-            </a:extLst>
-          </p:cNvPr>
-          <p:cNvSpPr/>
-          <p:nvPr/>
-        </p:nvSpPr>
-        <p:spPr>
-          <a:xfrm>
-            <a:off x="7781964" y="1838937"/>
-            <a:ext cx="1371003" cy="859439"/>
-          </a:xfrm>
-          <a:prstGeom prst="roundRect">
-            <a:avLst/>
-          </a:prstGeom>
-          <a:solidFill>
-            <a:srgbClr val="E7F3FD"/>
-          </a:solidFill>
-          <a:ln w="12700">
-            <a:solidFill>
-              <a:srgbClr val="00A3E0"/>
-            </a:solidFill>
-          </a:ln>
-        </p:spPr>
-        <p:style>
-          <a:lnRef idx="1">
-            <a:schemeClr val="accent1"/>
-          </a:lnRef>
-          <a:fillRef idx="3">
-            <a:schemeClr val="accent1"/>
-          </a:fillRef>
-          <a:effectRef idx="2">
-            <a:schemeClr val="accent1"/>
-          </a:effectRef>
-          <a:fontRef idx="minor">
-            <a:schemeClr val="lt1"/>
-          </a:fontRef>
-        </p:style>
-        <p:txBody>
-          <a:bodyPr wrap="square" lIns="128016" tIns="91440" rIns="109728" bIns="73152" rtlCol="0" anchor="ctr">
-            <a:normAutofit/>
-          </a:bodyPr>
-          <a:lstStyle/>
-          <a:p>
-            <a:pPr algn="ctr"/>
-            <a:r>
-              <a:rPr lang="ru-RU" sz="1200" dirty="0">
-                <a:solidFill>
-                  <a:srgbClr val="272D3A"/>
-                </a:solidFill>
-                <a:latin typeface="Arial"/>
-              </a:rPr>
-              <a:t>Тестирование</a:t>
-            </a:r>
-            <a:endParaRPr sz="1200" dirty="0">
-              <a:solidFill>
-                <a:srgbClr val="272D3A"/>
-              </a:solidFill>
-              <a:latin typeface="Arial"/>
-            </a:endParaRPr>
-          </a:p>
-        </p:txBody>
-      </p:sp>
-      <p:sp>
-        <p:nvSpPr>
-          <p:cNvPr id="11" name="Rounded Rectangle 18">
-            <a:extLst>
-              <a:ext uri="{FF2B5EF4-FFF2-40B4-BE49-F238E27FC236}">
-                <a16:creationId xmlns:a16="http://schemas.microsoft.com/office/drawing/2014/main" id="{D0665EE1-401A-4346-9897-19704F3697F9}"/>
-              </a:ext>
-            </a:extLst>
-          </p:cNvPr>
-          <p:cNvSpPr/>
-          <p:nvPr/>
-        </p:nvSpPr>
-        <p:spPr>
-          <a:xfrm>
-            <a:off x="9413540" y="1847901"/>
-            <a:ext cx="1371003" cy="859439"/>
-          </a:xfrm>
-          <a:prstGeom prst="roundRect">
-            <a:avLst/>
-          </a:prstGeom>
-          <a:solidFill>
-            <a:srgbClr val="E7F3FD"/>
-          </a:solidFill>
-          <a:ln w="12700">
-            <a:solidFill>
-              <a:srgbClr val="00A3E0"/>
-            </a:solidFill>
-          </a:ln>
-        </p:spPr>
-        <p:style>
-          <a:lnRef idx="1">
-            <a:schemeClr val="accent1"/>
-          </a:lnRef>
-          <a:fillRef idx="3">
-            <a:schemeClr val="accent1"/>
-          </a:fillRef>
-          <a:effectRef idx="2">
-            <a:schemeClr val="accent1"/>
-          </a:effectRef>
-          <a:fontRef idx="minor">
-            <a:schemeClr val="lt1"/>
-          </a:fontRef>
-        </p:style>
-        <p:txBody>
-          <a:bodyPr wrap="square" lIns="128016" tIns="91440" rIns="109728" bIns="73152" rtlCol="0" anchor="ctr">
-            <a:normAutofit/>
-          </a:bodyPr>
-          <a:lstStyle/>
-          <a:p>
-            <a:pPr algn="ctr"/>
-            <a:r>
-              <a:rPr lang="ru-RU" sz="1200" dirty="0">
-                <a:solidFill>
-                  <a:srgbClr val="272D3A"/>
-                </a:solidFill>
-                <a:latin typeface="Arial"/>
-              </a:rPr>
-              <a:t>Ввод в эксплуатацию</a:t>
-            </a:r>
-            <a:endParaRPr sz="1200" dirty="0">
-              <a:solidFill>
-                <a:srgbClr val="272D3A"/>
-              </a:solidFill>
-              <a:latin typeface="Arial"/>
-            </a:endParaRPr>
-          </a:p>
-        </p:txBody>
-      </p:sp>
-      <p:sp>
-        <p:nvSpPr>
-          <p:cNvPr id="2" name="Стрелка: вправо 1">
-            <a:extLst>
-              <a:ext uri="{FF2B5EF4-FFF2-40B4-BE49-F238E27FC236}">
-                <a16:creationId xmlns:a16="http://schemas.microsoft.com/office/drawing/2014/main" id="{7DB38DD1-E8A3-4569-80A8-435CF00AE444}"/>
-              </a:ext>
-            </a:extLst>
-          </p:cNvPr>
-          <p:cNvSpPr/>
-          <p:nvPr/>
-        </p:nvSpPr>
-        <p:spPr>
-          <a:xfrm>
-            <a:off x="2671787" y="2187973"/>
-            <a:ext cx="170325" cy="179294"/>
-          </a:xfrm>
-          <a:prstGeom prst="rightArrow">
-            <a:avLst/>
-          </a:prstGeom>
-          <a:gradFill flip="none" rotWithShape="1">
-            <a:gsLst>
-              <a:gs pos="0">
-                <a:schemeClr val="accent1">
-                  <a:tint val="66000"/>
-                  <a:satMod val="160000"/>
-                </a:schemeClr>
-              </a:gs>
-              <a:gs pos="50000">
-                <a:schemeClr val="accent1">
-                  <a:tint val="44500"/>
-                  <a:satMod val="160000"/>
-                </a:schemeClr>
-              </a:gs>
-              <a:gs pos="100000">
-                <a:schemeClr val="accent1">
-                  <a:tint val="23500"/>
-                  <a:satMod val="160000"/>
-                </a:schemeClr>
-              </a:gs>
-            </a:gsLst>
-            <a:lin ang="16200000" scaled="1"/>
-            <a:tileRect/>
-          </a:gradFill>
-          <a:ln/>
-        </p:spPr>
-        <p:style>
-          <a:lnRef idx="1">
-            <a:schemeClr val="accent1"/>
-          </a:lnRef>
-          <a:fillRef idx="2">
-            <a:schemeClr val="accent1"/>
-          </a:fillRef>
-          <a:effectRef idx="1">
-            <a:schemeClr val="accent1"/>
-          </a:effectRef>
-          <a:fontRef idx="minor">
-            <a:schemeClr val="dk1"/>
-          </a:fontRef>
-        </p:style>
-        <p:txBody>
-          <a:bodyPr rot="0" spcFirstLastPara="0" vertOverflow="overflow" horzOverflow="overflow" vert="horz" wrap="square" lIns="91440" tIns="45720" rIns="91440" bIns="45720" numCol="1" spcCol="0" rtlCol="0" fromWordArt="0" anchor="ctr" anchorCtr="0" forceAA="0" compatLnSpc="1">
-            <a:prstTxWarp prst="textNoShape">
-              <a:avLst/>
-            </a:prstTxWarp>
-            <a:noAutofit/>
-          </a:bodyPr>
-          <a:lstStyle/>
-          <a:p>
-            <a:pPr algn="ctr"/>
-            <a:endParaRPr lang="ru-RU" sz="1000" dirty="0">
-              <a:solidFill>
-                <a:schemeClr val="tx2"/>
-              </a:solidFill>
-            </a:endParaRPr>
-          </a:p>
-        </p:txBody>
-      </p:sp>
-      <p:sp>
-        <p:nvSpPr>
-          <p:cNvPr id="14" name="Стрелка: вправо 13">
-            <a:extLst>
-              <a:ext uri="{FF2B5EF4-FFF2-40B4-BE49-F238E27FC236}">
-                <a16:creationId xmlns:a16="http://schemas.microsoft.com/office/drawing/2014/main" id="{7EBF72DB-AFE9-4BBF-82F3-6C6AD1D5D94A}"/>
-              </a:ext>
-            </a:extLst>
-          </p:cNvPr>
-          <p:cNvSpPr/>
-          <p:nvPr/>
-        </p:nvSpPr>
-        <p:spPr>
-          <a:xfrm>
-            <a:off x="4303363" y="2161079"/>
-            <a:ext cx="170325" cy="179294"/>
-          </a:xfrm>
-          <a:prstGeom prst="rightArrow">
-            <a:avLst/>
-          </a:prstGeom>
-          <a:gradFill flip="none" rotWithShape="1">
-            <a:gsLst>
-              <a:gs pos="0">
-                <a:schemeClr val="accent1">
-                  <a:tint val="66000"/>
-                  <a:satMod val="160000"/>
-                </a:schemeClr>
-              </a:gs>
-              <a:gs pos="50000">
-                <a:schemeClr val="accent1">
-                  <a:tint val="44500"/>
-                  <a:satMod val="160000"/>
-                </a:schemeClr>
-              </a:gs>
-              <a:gs pos="100000">
-                <a:schemeClr val="accent1">
-                  <a:tint val="23500"/>
-                  <a:satMod val="160000"/>
-                </a:schemeClr>
-              </a:gs>
-            </a:gsLst>
-            <a:lin ang="16200000" scaled="1"/>
-            <a:tileRect/>
-          </a:gradFill>
-          <a:ln/>
-        </p:spPr>
-        <p:style>
-          <a:lnRef idx="1">
-            <a:schemeClr val="accent1"/>
-          </a:lnRef>
-          <a:fillRef idx="2">
-            <a:schemeClr val="accent1"/>
-          </a:fillRef>
-          <a:effectRef idx="1">
-            <a:schemeClr val="accent1"/>
-          </a:effectRef>
-          <a:fontRef idx="minor">
-            <a:schemeClr val="dk1"/>
-          </a:fontRef>
-        </p:style>
-        <p:txBody>
-          <a:bodyPr rot="0" spcFirstLastPara="0" vertOverflow="overflow" horzOverflow="overflow" vert="horz" wrap="square" lIns="91440" tIns="45720" rIns="91440" bIns="45720" numCol="1" spcCol="0" rtlCol="0" fromWordArt="0" anchor="ctr" anchorCtr="0" forceAA="0" compatLnSpc="1">
-            <a:prstTxWarp prst="textNoShape">
-              <a:avLst/>
-            </a:prstTxWarp>
-            <a:noAutofit/>
-          </a:bodyPr>
-          <a:lstStyle/>
-          <a:p>
-            <a:pPr algn="ctr"/>
-            <a:endParaRPr lang="ru-RU" sz="1000" dirty="0">
-              <a:solidFill>
-                <a:schemeClr val="tx2"/>
-              </a:solidFill>
-            </a:endParaRPr>
-          </a:p>
-        </p:txBody>
-      </p:sp>
-      <p:sp>
-        <p:nvSpPr>
-          <p:cNvPr id="15" name="Стрелка: вправо 14">
-            <a:extLst>
-              <a:ext uri="{FF2B5EF4-FFF2-40B4-BE49-F238E27FC236}">
-                <a16:creationId xmlns:a16="http://schemas.microsoft.com/office/drawing/2014/main" id="{BD325606-5ECB-4E41-A4C0-96F1BAE54F28}"/>
-              </a:ext>
-            </a:extLst>
-          </p:cNvPr>
-          <p:cNvSpPr/>
-          <p:nvPr/>
-        </p:nvSpPr>
-        <p:spPr>
-          <a:xfrm>
-            <a:off x="5934939" y="2170038"/>
-            <a:ext cx="170325" cy="179294"/>
-          </a:xfrm>
-          <a:prstGeom prst="rightArrow">
-            <a:avLst/>
-          </a:prstGeom>
-          <a:gradFill flip="none" rotWithShape="1">
-            <a:gsLst>
-              <a:gs pos="0">
-                <a:schemeClr val="accent1">
-                  <a:tint val="66000"/>
-                  <a:satMod val="160000"/>
-                </a:schemeClr>
-              </a:gs>
-              <a:gs pos="50000">
-                <a:schemeClr val="accent1">
-                  <a:tint val="44500"/>
-                  <a:satMod val="160000"/>
-                </a:schemeClr>
-              </a:gs>
-              <a:gs pos="100000">
-                <a:schemeClr val="accent1">
-                  <a:tint val="23500"/>
-                  <a:satMod val="160000"/>
-                </a:schemeClr>
-              </a:gs>
-            </a:gsLst>
-            <a:lin ang="16200000" scaled="1"/>
-            <a:tileRect/>
-          </a:gradFill>
-          <a:ln/>
-        </p:spPr>
-        <p:style>
-          <a:lnRef idx="1">
-            <a:schemeClr val="accent1"/>
-          </a:lnRef>
-          <a:fillRef idx="2">
-            <a:schemeClr val="accent1"/>
-          </a:fillRef>
-          <a:effectRef idx="1">
-            <a:schemeClr val="accent1"/>
-          </a:effectRef>
-          <a:fontRef idx="minor">
-            <a:schemeClr val="dk1"/>
-          </a:fontRef>
-        </p:style>
-        <p:txBody>
-          <a:bodyPr rot="0" spcFirstLastPara="0" vertOverflow="overflow" horzOverflow="overflow" vert="horz" wrap="square" lIns="91440" tIns="45720" rIns="91440" bIns="45720" numCol="1" spcCol="0" rtlCol="0" fromWordArt="0" anchor="ctr" anchorCtr="0" forceAA="0" compatLnSpc="1">
-            <a:prstTxWarp prst="textNoShape">
-              <a:avLst/>
-            </a:prstTxWarp>
-            <a:noAutofit/>
-          </a:bodyPr>
-          <a:lstStyle/>
-          <a:p>
-            <a:pPr algn="ctr"/>
-            <a:endParaRPr lang="ru-RU" sz="1000" dirty="0">
-              <a:solidFill>
-                <a:schemeClr val="tx2"/>
-              </a:solidFill>
-            </a:endParaRPr>
-          </a:p>
-        </p:txBody>
-      </p:sp>
-      <p:sp>
-        <p:nvSpPr>
-          <p:cNvPr id="16" name="Стрелка: вправо 15">
-            <a:extLst>
-              <a:ext uri="{FF2B5EF4-FFF2-40B4-BE49-F238E27FC236}">
-                <a16:creationId xmlns:a16="http://schemas.microsoft.com/office/drawing/2014/main" id="{0B131705-ABA6-432B-A29D-739D564E686E}"/>
-              </a:ext>
-            </a:extLst>
-          </p:cNvPr>
-          <p:cNvSpPr/>
-          <p:nvPr/>
-        </p:nvSpPr>
-        <p:spPr>
-          <a:xfrm>
-            <a:off x="7566515" y="2187973"/>
-            <a:ext cx="170325" cy="179294"/>
-          </a:xfrm>
-          <a:prstGeom prst="rightArrow">
-            <a:avLst/>
-          </a:prstGeom>
-          <a:gradFill flip="none" rotWithShape="1">
-            <a:gsLst>
-              <a:gs pos="0">
-                <a:schemeClr val="accent1">
-                  <a:tint val="66000"/>
-                  <a:satMod val="160000"/>
-                </a:schemeClr>
-              </a:gs>
-              <a:gs pos="50000">
-                <a:schemeClr val="accent1">
-                  <a:tint val="44500"/>
-                  <a:satMod val="160000"/>
-                </a:schemeClr>
-              </a:gs>
-              <a:gs pos="100000">
-                <a:schemeClr val="accent1">
-                  <a:tint val="23500"/>
-                  <a:satMod val="160000"/>
-                </a:schemeClr>
-              </a:gs>
-            </a:gsLst>
-            <a:lin ang="16200000" scaled="1"/>
-            <a:tileRect/>
-          </a:gradFill>
-          <a:ln/>
-        </p:spPr>
-        <p:style>
-          <a:lnRef idx="1">
-            <a:schemeClr val="accent1"/>
-          </a:lnRef>
-          <a:fillRef idx="2">
-            <a:schemeClr val="accent1"/>
-          </a:fillRef>
-          <a:effectRef idx="1">
-            <a:schemeClr val="accent1"/>
-          </a:effectRef>
-          <a:fontRef idx="minor">
-            <a:schemeClr val="dk1"/>
-          </a:fontRef>
-        </p:style>
-        <p:txBody>
-          <a:bodyPr rot="0" spcFirstLastPara="0" vertOverflow="overflow" horzOverflow="overflow" vert="horz" wrap="square" lIns="91440" tIns="45720" rIns="91440" bIns="45720" numCol="1" spcCol="0" rtlCol="0" fromWordArt="0" anchor="ctr" anchorCtr="0" forceAA="0" compatLnSpc="1">
-            <a:prstTxWarp prst="textNoShape">
-              <a:avLst/>
-            </a:prstTxWarp>
-            <a:noAutofit/>
-          </a:bodyPr>
-          <a:lstStyle/>
-          <a:p>
-            <a:pPr algn="ctr"/>
-            <a:endParaRPr lang="ru-RU" sz="1000" dirty="0">
-              <a:solidFill>
-                <a:schemeClr val="tx2"/>
-              </a:solidFill>
-            </a:endParaRPr>
-          </a:p>
-        </p:txBody>
-      </p:sp>
-      <p:sp>
-        <p:nvSpPr>
-          <p:cNvPr id="17" name="Стрелка: вправо 16">
-            <a:extLst>
-              <a:ext uri="{FF2B5EF4-FFF2-40B4-BE49-F238E27FC236}">
-                <a16:creationId xmlns:a16="http://schemas.microsoft.com/office/drawing/2014/main" id="{0DD76A16-421C-4F9D-A911-FBD1B7AF0C8B}"/>
-              </a:ext>
-            </a:extLst>
-          </p:cNvPr>
-          <p:cNvSpPr/>
-          <p:nvPr/>
-        </p:nvSpPr>
-        <p:spPr>
-          <a:xfrm>
-            <a:off x="9198091" y="2179009"/>
-            <a:ext cx="170325" cy="179294"/>
-          </a:xfrm>
-          <a:prstGeom prst="rightArrow">
-            <a:avLst/>
-          </a:prstGeom>
-          <a:gradFill flip="none" rotWithShape="1">
-            <a:gsLst>
-              <a:gs pos="0">
-                <a:schemeClr val="accent1">
-                  <a:tint val="66000"/>
-                  <a:satMod val="160000"/>
-                </a:schemeClr>
-              </a:gs>
-              <a:gs pos="50000">
-                <a:schemeClr val="accent1">
-                  <a:tint val="44500"/>
-                  <a:satMod val="160000"/>
-                </a:schemeClr>
-              </a:gs>
-              <a:gs pos="100000">
-                <a:schemeClr val="accent1">
-                  <a:tint val="23500"/>
-                  <a:satMod val="160000"/>
-                </a:schemeClr>
-              </a:gs>
-            </a:gsLst>
-            <a:lin ang="16200000" scaled="1"/>
-            <a:tileRect/>
-          </a:gradFill>
-          <a:ln/>
-        </p:spPr>
-        <p:style>
-          <a:lnRef idx="1">
-            <a:schemeClr val="accent1"/>
-          </a:lnRef>
-          <a:fillRef idx="2">
-            <a:schemeClr val="accent1"/>
-          </a:fillRef>
-          <a:effectRef idx="1">
-            <a:schemeClr val="accent1"/>
-          </a:effectRef>
-          <a:fontRef idx="minor">
-            <a:schemeClr val="dk1"/>
-          </a:fontRef>
-        </p:style>
-        <p:txBody>
-          <a:bodyPr rot="0" spcFirstLastPara="0" vertOverflow="overflow" horzOverflow="overflow" vert="horz" wrap="square" lIns="91440" tIns="45720" rIns="91440" bIns="45720" numCol="1" spcCol="0" rtlCol="0" fromWordArt="0" anchor="ctr" anchorCtr="0" forceAA="0" compatLnSpc="1">
-            <a:prstTxWarp prst="textNoShape">
-              <a:avLst/>
-            </a:prstTxWarp>
-            <a:noAutofit/>
-          </a:bodyPr>
-          <a:lstStyle/>
-          <a:p>
-            <a:pPr algn="ctr"/>
-            <a:endParaRPr lang="ru-RU" sz="1000" dirty="0">
-              <a:solidFill>
-                <a:schemeClr val="tx2"/>
-              </a:solidFill>
-            </a:endParaRPr>
-          </a:p>
-        </p:txBody>
-      </p:sp>
-      <p:sp>
-        <p:nvSpPr>
-          <p:cNvPr id="18" name="TextBox 17">
-            <a:extLst>
-              <a:ext uri="{FF2B5EF4-FFF2-40B4-BE49-F238E27FC236}">
-                <a16:creationId xmlns:a16="http://schemas.microsoft.com/office/drawing/2014/main" id="{0C60F20D-7D3A-4ECB-923E-B5C1694FCE5D}"/>
-              </a:ext>
-            </a:extLst>
-          </p:cNvPr>
-          <p:cNvSpPr txBox="1"/>
-          <p:nvPr/>
-        </p:nvSpPr>
-        <p:spPr>
-          <a:xfrm>
-            <a:off x="475732" y="2932437"/>
-            <a:ext cx="4392110" cy="408623"/>
-          </a:xfrm>
-          <a:prstGeom prst="roundRect">
-            <a:avLst/>
-          </a:prstGeom>
-          <a:ln w="19050"/>
-        </p:spPr>
-        <p:style>
-          <a:lnRef idx="2">
-            <a:schemeClr val="accent1"/>
-          </a:lnRef>
-          <a:fillRef idx="1">
-            <a:schemeClr val="lt1"/>
-          </a:fillRef>
-          <a:effectRef idx="0">
-            <a:schemeClr val="accent1"/>
-          </a:effectRef>
-          <a:fontRef idx="minor">
-            <a:schemeClr val="dk1"/>
-          </a:fontRef>
-        </p:style>
-        <p:txBody>
-          <a:bodyPr wrap="square">
-            <a:spAutoFit/>
-          </a:bodyPr>
-          <a:lstStyle/>
-          <a:p>
-            <a:pPr algn="ctr"/>
-            <a:r>
-              <a:rPr lang="ru-RU" b="1" dirty="0">
-                <a:solidFill>
-                  <a:srgbClr val="005BAA"/>
-                </a:solidFill>
-                <a:latin typeface="Arial"/>
-              </a:rPr>
-              <a:t>Основные результаты работы</a:t>
-            </a:r>
-            <a:endParaRPr lang="ru-RU" sz="1800" b="1" i="0" dirty="0">
-              <a:solidFill>
-                <a:srgbClr val="005BAA"/>
-              </a:solidFill>
-              <a:latin typeface="Arial"/>
-            </a:endParaRPr>
-          </a:p>
-        </p:txBody>
-      </p:sp>
-      <p:sp>
-        <p:nvSpPr>
-          <p:cNvPr id="19" name="Rounded Rectangle 18">
-            <a:extLst>
-              <a:ext uri="{FF2B5EF4-FFF2-40B4-BE49-F238E27FC236}">
-                <a16:creationId xmlns:a16="http://schemas.microsoft.com/office/drawing/2014/main" id="{72178640-5984-45B0-AD30-1AE4F285DC54}"/>
-              </a:ext>
-            </a:extLst>
-          </p:cNvPr>
-          <p:cNvSpPr/>
-          <p:nvPr/>
-        </p:nvSpPr>
-        <p:spPr>
-          <a:xfrm>
-            <a:off x="4437828" y="3439035"/>
-            <a:ext cx="3889785" cy="416183"/>
-          </a:xfrm>
-          <a:prstGeom prst="roundRect">
-            <a:avLst/>
-          </a:prstGeom>
-          <a:solidFill>
-            <a:srgbClr val="E7F3FD"/>
-          </a:solidFill>
-          <a:ln w="12700">
-            <a:solidFill>
-              <a:srgbClr val="00A3E0"/>
-            </a:solidFill>
-          </a:ln>
-        </p:spPr>
-        <p:style>
-          <a:lnRef idx="1">
-            <a:schemeClr val="accent1"/>
-          </a:lnRef>
-          <a:fillRef idx="3">
-            <a:schemeClr val="accent1"/>
-          </a:fillRef>
-          <a:effectRef idx="2">
-            <a:schemeClr val="accent1"/>
-          </a:effectRef>
-          <a:fontRef idx="minor">
-            <a:schemeClr val="lt1"/>
-          </a:fontRef>
-        </p:style>
-        <p:txBody>
-          <a:bodyPr wrap="square" lIns="128016" tIns="91440" rIns="109728" bIns="73152" rtlCol="0" anchor="ctr">
-            <a:normAutofit fontScale="92500" lnSpcReduction="10000"/>
-          </a:bodyPr>
-          <a:lstStyle/>
-          <a:p>
-            <a:pPr algn="ctr"/>
-            <a:r>
-              <a:rPr lang="ru-RU" sz="1600" dirty="0">
-                <a:solidFill>
-                  <a:srgbClr val="272D3A"/>
-                </a:solidFill>
-                <a:latin typeface="Arial"/>
-              </a:rPr>
-              <a:t>Система позиционного отслеживания</a:t>
-            </a:r>
-            <a:endParaRPr sz="1600" dirty="0">
-              <a:solidFill>
-                <a:srgbClr val="272D3A"/>
-              </a:solidFill>
-              <a:latin typeface="Arial"/>
-            </a:endParaRPr>
-          </a:p>
-        </p:txBody>
-      </p:sp>
-      <p:sp>
-        <p:nvSpPr>
-          <p:cNvPr id="20" name="Rounded Rectangle 18">
-            <a:extLst>
-              <a:ext uri="{FF2B5EF4-FFF2-40B4-BE49-F238E27FC236}">
-                <a16:creationId xmlns:a16="http://schemas.microsoft.com/office/drawing/2014/main" id="{58082363-FF3C-4580-874B-57706D22C3B6}"/>
-              </a:ext>
-            </a:extLst>
-          </p:cNvPr>
-          <p:cNvSpPr/>
-          <p:nvPr/>
-        </p:nvSpPr>
-        <p:spPr>
-          <a:xfrm>
-            <a:off x="905435" y="4090689"/>
-            <a:ext cx="1963271" cy="859439"/>
-          </a:xfrm>
-          <a:prstGeom prst="roundRect">
-            <a:avLst/>
-          </a:prstGeom>
-          <a:solidFill>
-            <a:srgbClr val="E7F3FD"/>
-          </a:solidFill>
-          <a:ln w="12700">
-            <a:solidFill>
-              <a:srgbClr val="00A3E0"/>
-            </a:solidFill>
-          </a:ln>
-        </p:spPr>
-        <p:style>
-          <a:lnRef idx="1">
-            <a:schemeClr val="accent1"/>
-          </a:lnRef>
-          <a:fillRef idx="3">
-            <a:schemeClr val="accent1"/>
-          </a:fillRef>
-          <a:effectRef idx="2">
-            <a:schemeClr val="accent1"/>
-          </a:effectRef>
-          <a:fontRef idx="minor">
-            <a:schemeClr val="lt1"/>
-          </a:fontRef>
-        </p:style>
-        <p:txBody>
-          <a:bodyPr wrap="square" lIns="128016" tIns="91440" rIns="109728" bIns="73152" rtlCol="0" anchor="ctr">
-            <a:normAutofit fontScale="92500"/>
-          </a:bodyPr>
-          <a:lstStyle/>
-          <a:p>
-            <a:pPr algn="ctr"/>
-            <a:r>
-              <a:rPr lang="ru-RU" sz="1400" dirty="0">
-                <a:solidFill>
-                  <a:srgbClr val="272D3A"/>
-                </a:solidFill>
-              </a:rPr>
-              <a:t>Прием и сохранение телеметрических данных</a:t>
-            </a:r>
-            <a:endParaRPr sz="1400" dirty="0">
-              <a:solidFill>
-                <a:srgbClr val="272D3A"/>
-              </a:solidFill>
-              <a:latin typeface="Arial"/>
-            </a:endParaRPr>
-          </a:p>
-        </p:txBody>
-      </p:sp>
-      <p:sp>
-        <p:nvSpPr>
-          <p:cNvPr id="21" name="Rounded Rectangle 18">
-            <a:extLst>
-              <a:ext uri="{FF2B5EF4-FFF2-40B4-BE49-F238E27FC236}">
-                <a16:creationId xmlns:a16="http://schemas.microsoft.com/office/drawing/2014/main" id="{3DFF027B-0766-4041-99C7-C9367BD1A80B}"/>
-              </a:ext>
-            </a:extLst>
-          </p:cNvPr>
-          <p:cNvSpPr/>
-          <p:nvPr/>
-        </p:nvSpPr>
-        <p:spPr>
-          <a:xfrm>
-            <a:off x="3299913" y="4090690"/>
-            <a:ext cx="1765446" cy="859439"/>
-          </a:xfrm>
-          <a:prstGeom prst="roundRect">
-            <a:avLst/>
-          </a:prstGeom>
-          <a:solidFill>
-            <a:srgbClr val="E7F3FD"/>
-          </a:solidFill>
-          <a:ln w="12700">
-            <a:solidFill>
-              <a:srgbClr val="00A3E0"/>
-            </a:solidFill>
-          </a:ln>
-        </p:spPr>
-        <p:style>
-          <a:lnRef idx="1">
-            <a:schemeClr val="accent1"/>
-          </a:lnRef>
-          <a:fillRef idx="3">
-            <a:schemeClr val="accent1"/>
-          </a:fillRef>
-          <a:effectRef idx="2">
-            <a:schemeClr val="accent1"/>
-          </a:effectRef>
-          <a:fontRef idx="minor">
-            <a:schemeClr val="lt1"/>
-          </a:fontRef>
-        </p:style>
-        <p:txBody>
-          <a:bodyPr wrap="square" lIns="128016" tIns="91440" rIns="109728" bIns="73152" rtlCol="0" anchor="ctr">
-            <a:normAutofit lnSpcReduction="10000"/>
-          </a:bodyPr>
-          <a:lstStyle/>
-          <a:p>
-            <a:pPr algn="ctr"/>
-            <a:r>
-              <a:rPr lang="ru-RU" sz="1400" dirty="0">
-                <a:solidFill>
-                  <a:srgbClr val="272D3A"/>
-                </a:solidFill>
-              </a:rPr>
-              <a:t>Просмотр актуальной телеметрии</a:t>
-            </a:r>
-            <a:endParaRPr sz="1400" dirty="0">
-              <a:solidFill>
-                <a:srgbClr val="272D3A"/>
-              </a:solidFill>
-              <a:latin typeface="Arial"/>
-            </a:endParaRPr>
-          </a:p>
-        </p:txBody>
-      </p:sp>
-      <p:sp>
-        <p:nvSpPr>
-          <p:cNvPr id="22" name="Rounded Rectangle 18">
-            <a:extLst>
-              <a:ext uri="{FF2B5EF4-FFF2-40B4-BE49-F238E27FC236}">
-                <a16:creationId xmlns:a16="http://schemas.microsoft.com/office/drawing/2014/main" id="{2250962A-2A48-49DD-8C6A-5891747E6369}"/>
-              </a:ext>
-            </a:extLst>
-          </p:cNvPr>
-          <p:cNvSpPr/>
-          <p:nvPr/>
-        </p:nvSpPr>
-        <p:spPr>
-          <a:xfrm>
-            <a:off x="5496566" y="4128039"/>
-            <a:ext cx="1765446" cy="859439"/>
-          </a:xfrm>
-          <a:prstGeom prst="roundRect">
-            <a:avLst/>
-          </a:prstGeom>
-          <a:solidFill>
-            <a:srgbClr val="E7F3FD"/>
-          </a:solidFill>
-          <a:ln w="12700">
-            <a:solidFill>
-              <a:srgbClr val="00A3E0"/>
-            </a:solidFill>
-          </a:ln>
-        </p:spPr>
-        <p:style>
-          <a:lnRef idx="1">
-            <a:schemeClr val="accent1"/>
-          </a:lnRef>
-          <a:fillRef idx="3">
-            <a:schemeClr val="accent1"/>
-          </a:fillRef>
-          <a:effectRef idx="2">
-            <a:schemeClr val="accent1"/>
-          </a:effectRef>
-          <a:fontRef idx="minor">
-            <a:schemeClr val="lt1"/>
-          </a:fontRef>
-        </p:style>
-        <p:txBody>
-          <a:bodyPr wrap="square" lIns="128016" tIns="91440" rIns="109728" bIns="73152" rtlCol="0" anchor="ctr">
-            <a:normAutofit lnSpcReduction="10000"/>
-          </a:bodyPr>
-          <a:lstStyle/>
-          <a:p>
-            <a:pPr algn="ctr"/>
-            <a:r>
-              <a:rPr lang="ru-RU" sz="1400" dirty="0">
-                <a:solidFill>
-                  <a:srgbClr val="272D3A"/>
-                </a:solidFill>
-              </a:rPr>
-              <a:t>Просмотр исторической телеметрии ТС</a:t>
-            </a:r>
-            <a:endParaRPr sz="1400" dirty="0">
-              <a:solidFill>
-                <a:srgbClr val="272D3A"/>
-              </a:solidFill>
-              <a:latin typeface="Arial"/>
-            </a:endParaRPr>
-          </a:p>
-        </p:txBody>
-      </p:sp>
-      <p:sp>
-        <p:nvSpPr>
-          <p:cNvPr id="23" name="Rounded Rectangle 18">
-            <a:extLst>
-              <a:ext uri="{FF2B5EF4-FFF2-40B4-BE49-F238E27FC236}">
-                <a16:creationId xmlns:a16="http://schemas.microsoft.com/office/drawing/2014/main" id="{B11C4722-AFBC-4499-8A16-FACAAA8F8792}"/>
-              </a:ext>
-            </a:extLst>
-          </p:cNvPr>
-          <p:cNvSpPr/>
-          <p:nvPr/>
-        </p:nvSpPr>
-        <p:spPr>
-          <a:xfrm>
-            <a:off x="7693219" y="4098043"/>
-            <a:ext cx="1765446" cy="859439"/>
-          </a:xfrm>
-          <a:prstGeom prst="roundRect">
-            <a:avLst/>
-          </a:prstGeom>
-          <a:solidFill>
-            <a:srgbClr val="E7F3FD"/>
-          </a:solidFill>
-          <a:ln w="12700">
-            <a:solidFill>
-              <a:srgbClr val="00A3E0"/>
-            </a:solidFill>
-          </a:ln>
-        </p:spPr>
-        <p:style>
-          <a:lnRef idx="1">
-            <a:schemeClr val="accent1"/>
-          </a:lnRef>
-          <a:fillRef idx="3">
-            <a:schemeClr val="accent1"/>
-          </a:fillRef>
-          <a:effectRef idx="2">
-            <a:schemeClr val="accent1"/>
-          </a:effectRef>
-          <a:fontRef idx="minor">
-            <a:schemeClr val="lt1"/>
-          </a:fontRef>
-        </p:style>
-        <p:txBody>
-          <a:bodyPr wrap="square" lIns="128016" tIns="91440" rIns="109728" bIns="73152" rtlCol="0" anchor="ctr">
-            <a:normAutofit lnSpcReduction="10000"/>
-          </a:bodyPr>
-          <a:lstStyle/>
-          <a:p>
-            <a:pPr algn="ctr"/>
-            <a:r>
-              <a:rPr lang="ru-RU" sz="1400" dirty="0">
-                <a:solidFill>
-                  <a:srgbClr val="272D3A"/>
-                </a:solidFill>
-                <a:latin typeface="Arial"/>
-              </a:rPr>
-              <a:t>События зонального отслеживания</a:t>
-            </a:r>
-            <a:endParaRPr sz="1400" dirty="0">
-              <a:solidFill>
-                <a:srgbClr val="272D3A"/>
-              </a:solidFill>
-              <a:latin typeface="Arial"/>
-            </a:endParaRPr>
-          </a:p>
-        </p:txBody>
-      </p:sp>
-      <p:sp>
-        <p:nvSpPr>
-          <p:cNvPr id="24" name="Rounded Rectangle 18">
-            <a:extLst>
-              <a:ext uri="{FF2B5EF4-FFF2-40B4-BE49-F238E27FC236}">
-                <a16:creationId xmlns:a16="http://schemas.microsoft.com/office/drawing/2014/main" id="{86E20C46-C2BA-44F5-8AFA-587AC07E1316}"/>
-              </a:ext>
-            </a:extLst>
-          </p:cNvPr>
-          <p:cNvSpPr/>
-          <p:nvPr/>
-        </p:nvSpPr>
-        <p:spPr>
-          <a:xfrm>
-            <a:off x="9889871" y="4105837"/>
-            <a:ext cx="1853893" cy="859439"/>
-          </a:xfrm>
-          <a:prstGeom prst="roundRect">
-            <a:avLst/>
-          </a:prstGeom>
-          <a:solidFill>
-            <a:srgbClr val="E7F3FD"/>
-          </a:solidFill>
-          <a:ln w="12700">
-            <a:solidFill>
-              <a:srgbClr val="00A3E0"/>
-            </a:solidFill>
-          </a:ln>
-        </p:spPr>
-        <p:style>
-          <a:lnRef idx="1">
-            <a:schemeClr val="accent1"/>
-          </a:lnRef>
-          <a:fillRef idx="3">
-            <a:schemeClr val="accent1"/>
-          </a:fillRef>
-          <a:effectRef idx="2">
-            <a:schemeClr val="accent1"/>
-          </a:effectRef>
-          <a:fontRef idx="minor">
-            <a:schemeClr val="lt1"/>
-          </a:fontRef>
-        </p:style>
-        <p:txBody>
-          <a:bodyPr wrap="square" lIns="128016" tIns="91440" rIns="109728" bIns="73152" rtlCol="0" anchor="ctr">
-            <a:normAutofit lnSpcReduction="10000"/>
-          </a:bodyPr>
-          <a:lstStyle/>
-          <a:p>
-            <a:pPr algn="ctr"/>
-            <a:r>
-              <a:rPr lang="ru-RU" sz="1400" dirty="0">
-                <a:solidFill>
-                  <a:srgbClr val="272D3A"/>
-                </a:solidFill>
-                <a:latin typeface="Arial"/>
-              </a:rPr>
-              <a:t>Пространственно-временной поиск телеметрии</a:t>
-            </a:r>
-            <a:endParaRPr sz="1400" dirty="0">
-              <a:solidFill>
-                <a:srgbClr val="272D3A"/>
-              </a:solidFill>
-              <a:latin typeface="Arial"/>
-            </a:endParaRPr>
-          </a:p>
-        </p:txBody>
-      </p:sp>
-      <p:cxnSp>
-        <p:nvCxnSpPr>
-          <p:cNvPr id="26" name="Прямая со стрелкой 25">
-            <a:extLst>
-              <a:ext uri="{FF2B5EF4-FFF2-40B4-BE49-F238E27FC236}">
-                <a16:creationId xmlns:a16="http://schemas.microsoft.com/office/drawing/2014/main" id="{37CB025D-A2CB-4FF8-9F77-6CE7B3B83F2B}"/>
-              </a:ext>
-            </a:extLst>
-          </p:cNvPr>
-          <p:cNvCxnSpPr>
-            <a:stCxn id="19" idx="1"/>
-            <a:endCxn id="20" idx="0"/>
-          </p:cNvCxnSpPr>
-          <p:nvPr/>
-        </p:nvCxnSpPr>
-        <p:spPr>
-          <a:xfrm flipH="1">
-            <a:off x="1887071" y="3647127"/>
-            <a:ext cx="2550757" cy="443562"/>
-          </a:xfrm>
-          <a:prstGeom prst="straightConnector1">
-            <a:avLst/>
-          </a:prstGeom>
-          <a:ln>
-            <a:tailEnd type="triangle"/>
-          </a:ln>
-        </p:spPr>
-        <p:style>
-          <a:lnRef idx="1">
-            <a:schemeClr val="accent1"/>
-          </a:lnRef>
-          <a:fillRef idx="0">
-            <a:schemeClr val="accent1"/>
-          </a:fillRef>
-          <a:effectRef idx="0">
-            <a:schemeClr val="accent1"/>
-          </a:effectRef>
-          <a:fontRef idx="minor">
-            <a:schemeClr val="tx1"/>
-          </a:fontRef>
-        </p:style>
-      </p:cxnSp>
-      <p:cxnSp>
-        <p:nvCxnSpPr>
-          <p:cNvPr id="30" name="Прямая со стрелкой 29">
-            <a:extLst>
-              <a:ext uri="{FF2B5EF4-FFF2-40B4-BE49-F238E27FC236}">
-                <a16:creationId xmlns:a16="http://schemas.microsoft.com/office/drawing/2014/main" id="{8CE3DB52-3685-463A-A290-C29835206757}"/>
-              </a:ext>
-            </a:extLst>
-          </p:cNvPr>
-          <p:cNvCxnSpPr>
-            <a:stCxn id="19" idx="2"/>
-            <a:endCxn id="21" idx="0"/>
-          </p:cNvCxnSpPr>
-          <p:nvPr/>
-        </p:nvCxnSpPr>
-        <p:spPr>
-          <a:xfrm flipH="1">
-            <a:off x="4182636" y="3855218"/>
-            <a:ext cx="2200085" cy="235472"/>
-          </a:xfrm>
-          <a:prstGeom prst="straightConnector1">
-            <a:avLst/>
-          </a:prstGeom>
-          <a:ln>
-            <a:tailEnd type="triangle"/>
-          </a:ln>
-        </p:spPr>
-        <p:style>
-          <a:lnRef idx="1">
-            <a:schemeClr val="accent1"/>
-          </a:lnRef>
-          <a:fillRef idx="0">
-            <a:schemeClr val="accent1"/>
-          </a:fillRef>
-          <a:effectRef idx="0">
-            <a:schemeClr val="accent1"/>
-          </a:effectRef>
-          <a:fontRef idx="minor">
-            <a:schemeClr val="tx1"/>
-          </a:fontRef>
-        </p:style>
-      </p:cxnSp>
-      <p:cxnSp>
-        <p:nvCxnSpPr>
-          <p:cNvPr id="32" name="Прямая со стрелкой 31">
-            <a:extLst>
-              <a:ext uri="{FF2B5EF4-FFF2-40B4-BE49-F238E27FC236}">
-                <a16:creationId xmlns:a16="http://schemas.microsoft.com/office/drawing/2014/main" id="{DF39FD4E-B52D-402E-AC55-383A0EF936AE}"/>
-              </a:ext>
-            </a:extLst>
-          </p:cNvPr>
-          <p:cNvCxnSpPr>
-            <a:stCxn id="19" idx="2"/>
-            <a:endCxn id="22" idx="0"/>
-          </p:cNvCxnSpPr>
-          <p:nvPr/>
-        </p:nvCxnSpPr>
-        <p:spPr>
-          <a:xfrm flipH="1">
-            <a:off x="6379289" y="3855218"/>
-            <a:ext cx="3432" cy="272821"/>
-          </a:xfrm>
-          <a:prstGeom prst="straightConnector1">
-            <a:avLst/>
-          </a:prstGeom>
-          <a:ln>
-            <a:tailEnd type="triangle"/>
-          </a:ln>
-        </p:spPr>
-        <p:style>
-          <a:lnRef idx="1">
-            <a:schemeClr val="accent1"/>
-          </a:lnRef>
-          <a:fillRef idx="0">
-            <a:schemeClr val="accent1"/>
-          </a:fillRef>
-          <a:effectRef idx="0">
-            <a:schemeClr val="accent1"/>
-          </a:effectRef>
-          <a:fontRef idx="minor">
-            <a:schemeClr val="tx1"/>
-          </a:fontRef>
-        </p:style>
-      </p:cxnSp>
-      <p:cxnSp>
-        <p:nvCxnSpPr>
-          <p:cNvPr id="34" name="Прямая со стрелкой 33">
-            <a:extLst>
-              <a:ext uri="{FF2B5EF4-FFF2-40B4-BE49-F238E27FC236}">
-                <a16:creationId xmlns:a16="http://schemas.microsoft.com/office/drawing/2014/main" id="{942DA4BD-794B-4898-A1AF-878C3A9F1A9B}"/>
-              </a:ext>
-            </a:extLst>
-          </p:cNvPr>
-          <p:cNvCxnSpPr>
-            <a:stCxn id="19" idx="2"/>
-            <a:endCxn id="23" idx="0"/>
-          </p:cNvCxnSpPr>
-          <p:nvPr/>
-        </p:nvCxnSpPr>
-        <p:spPr>
-          <a:xfrm>
-            <a:off x="6382721" y="3855218"/>
-            <a:ext cx="2193221" cy="242825"/>
-          </a:xfrm>
-          <a:prstGeom prst="straightConnector1">
-            <a:avLst/>
-          </a:prstGeom>
-          <a:ln>
-            <a:tailEnd type="triangle"/>
-          </a:ln>
-        </p:spPr>
-        <p:style>
-          <a:lnRef idx="1">
-            <a:schemeClr val="accent1"/>
-          </a:lnRef>
-          <a:fillRef idx="0">
-            <a:schemeClr val="accent1"/>
-          </a:fillRef>
-          <a:effectRef idx="0">
-            <a:schemeClr val="accent1"/>
-          </a:effectRef>
-          <a:fontRef idx="minor">
-            <a:schemeClr val="tx1"/>
-          </a:fontRef>
-        </p:style>
-      </p:cxnSp>
-      <p:cxnSp>
-        <p:nvCxnSpPr>
-          <p:cNvPr id="38" name="Прямая со стрелкой 37">
-            <a:extLst>
-              <a:ext uri="{FF2B5EF4-FFF2-40B4-BE49-F238E27FC236}">
-                <a16:creationId xmlns:a16="http://schemas.microsoft.com/office/drawing/2014/main" id="{9354E285-F8F5-4606-85E2-7F529CFEF4B5}"/>
-              </a:ext>
-            </a:extLst>
-          </p:cNvPr>
-          <p:cNvCxnSpPr>
-            <a:stCxn id="19" idx="3"/>
-            <a:endCxn id="24" idx="0"/>
-          </p:cNvCxnSpPr>
-          <p:nvPr/>
-        </p:nvCxnSpPr>
-        <p:spPr>
-          <a:xfrm>
-            <a:off x="8327613" y="3647127"/>
-            <a:ext cx="2489205" cy="458710"/>
-          </a:xfrm>
-          <a:prstGeom prst="straightConnector1">
-            <a:avLst/>
-          </a:prstGeom>
-          <a:ln>
-            <a:tailEnd type="triangle"/>
-          </a:ln>
-        </p:spPr>
-        <p:style>
-          <a:lnRef idx="1">
-            <a:schemeClr val="accent1"/>
-          </a:lnRef>
-          <a:fillRef idx="0">
-            <a:schemeClr val="accent1"/>
-          </a:fillRef>
-          <a:effectRef idx="0">
-            <a:schemeClr val="accent1"/>
-          </a:effectRef>
-          <a:fontRef idx="minor">
-            <a:schemeClr val="tx1"/>
-          </a:fontRef>
-        </p:style>
-      </p:cxnSp>
-      <p:sp>
-        <p:nvSpPr>
-          <p:cNvPr id="39" name="TextBox 38">
-            <a:extLst>
-              <a:ext uri="{FF2B5EF4-FFF2-40B4-BE49-F238E27FC236}">
-                <a16:creationId xmlns:a16="http://schemas.microsoft.com/office/drawing/2014/main" id="{8E1F860C-1A26-4FBD-BED1-01C68F449F62}"/>
-              </a:ext>
-            </a:extLst>
-          </p:cNvPr>
-          <p:cNvSpPr txBox="1"/>
-          <p:nvPr/>
-        </p:nvSpPr>
-        <p:spPr>
-          <a:xfrm>
-            <a:off x="430608" y="5192724"/>
-            <a:ext cx="4392110" cy="408623"/>
-          </a:xfrm>
-          <a:prstGeom prst="roundRect">
-            <a:avLst/>
-          </a:prstGeom>
-          <a:ln w="19050"/>
-        </p:spPr>
-        <p:style>
-          <a:lnRef idx="2">
-            <a:schemeClr val="accent1"/>
-          </a:lnRef>
-          <a:fillRef idx="1">
-            <a:schemeClr val="lt1"/>
-          </a:fillRef>
-          <a:effectRef idx="0">
-            <a:schemeClr val="accent1"/>
-          </a:effectRef>
-          <a:fontRef idx="minor">
-            <a:schemeClr val="dk1"/>
-          </a:fontRef>
-        </p:style>
-        <p:txBody>
-          <a:bodyPr wrap="square">
-            <a:spAutoFit/>
-          </a:bodyPr>
-          <a:lstStyle/>
-          <a:p>
-            <a:pPr algn="ctr"/>
-            <a:r>
-              <a:rPr lang="ru-RU" b="1" dirty="0">
-                <a:solidFill>
-                  <a:srgbClr val="005BAA"/>
-                </a:solidFill>
-                <a:latin typeface="Arial"/>
-              </a:rPr>
-              <a:t>Перспективы развития</a:t>
-            </a:r>
-            <a:endParaRPr lang="ru-RU" sz="1800" b="1" i="0" dirty="0">
-              <a:solidFill>
-                <a:srgbClr val="005BAA"/>
-              </a:solidFill>
-              <a:latin typeface="Arial"/>
-            </a:endParaRPr>
-          </a:p>
-        </p:txBody>
-      </p:sp>
-      <p:sp>
-        <p:nvSpPr>
-          <p:cNvPr id="40" name="Rounded Rectangle 18">
-            <a:extLst>
-              <a:ext uri="{FF2B5EF4-FFF2-40B4-BE49-F238E27FC236}">
-                <a16:creationId xmlns:a16="http://schemas.microsoft.com/office/drawing/2014/main" id="{C9883E86-544A-4B81-98F2-7767F635DC0C}"/>
-              </a:ext>
-            </a:extLst>
-          </p:cNvPr>
-          <p:cNvSpPr/>
-          <p:nvPr/>
-        </p:nvSpPr>
-        <p:spPr>
-          <a:xfrm>
-            <a:off x="906453" y="5794551"/>
-            <a:ext cx="1371003" cy="859439"/>
-          </a:xfrm>
-          <a:prstGeom prst="roundRect">
-            <a:avLst/>
-          </a:prstGeom>
-          <a:solidFill>
-            <a:srgbClr val="E7F3FD"/>
-          </a:solidFill>
-          <a:ln w="12700">
-            <a:solidFill>
-              <a:srgbClr val="00A3E0"/>
-            </a:solidFill>
-          </a:ln>
-        </p:spPr>
-        <p:style>
-          <a:lnRef idx="1">
-            <a:schemeClr val="accent1"/>
-          </a:lnRef>
-          <a:fillRef idx="3">
-            <a:schemeClr val="accent1"/>
-          </a:fillRef>
-          <a:effectRef idx="2">
-            <a:schemeClr val="accent1"/>
-          </a:effectRef>
-          <a:fontRef idx="minor">
-            <a:schemeClr val="lt1"/>
-          </a:fontRef>
-        </p:style>
-        <p:txBody>
-          <a:bodyPr wrap="square" lIns="128016" tIns="91440" rIns="109728" bIns="73152" rtlCol="0" anchor="ctr">
-            <a:normAutofit/>
-          </a:bodyPr>
-          <a:lstStyle/>
-          <a:p>
-            <a:pPr algn="ctr"/>
-            <a:r>
-              <a:rPr lang="ru-RU" sz="1400" dirty="0">
-                <a:solidFill>
-                  <a:srgbClr val="272D3A"/>
-                </a:solidFill>
-                <a:latin typeface="Arial"/>
-              </a:rPr>
-              <a:t>Построение маршрутов</a:t>
-            </a:r>
-            <a:endParaRPr sz="1400" dirty="0">
-              <a:solidFill>
-                <a:srgbClr val="272D3A"/>
-              </a:solidFill>
-              <a:latin typeface="Arial"/>
-            </a:endParaRPr>
-          </a:p>
-        </p:txBody>
-      </p:sp>
-      <p:sp>
-        <p:nvSpPr>
-          <p:cNvPr id="41" name="Rounded Rectangle 18">
-            <a:extLst>
-              <a:ext uri="{FF2B5EF4-FFF2-40B4-BE49-F238E27FC236}">
-                <a16:creationId xmlns:a16="http://schemas.microsoft.com/office/drawing/2014/main" id="{E51E3887-5871-4B9D-A4A6-4B45D8D337A0}"/>
-              </a:ext>
-            </a:extLst>
-          </p:cNvPr>
-          <p:cNvSpPr/>
-          <p:nvPr/>
-        </p:nvSpPr>
-        <p:spPr>
-          <a:xfrm>
-            <a:off x="2476947" y="5794554"/>
-            <a:ext cx="1371003" cy="859439"/>
-          </a:xfrm>
-          <a:prstGeom prst="roundRect">
-            <a:avLst/>
-          </a:prstGeom>
-          <a:solidFill>
-            <a:srgbClr val="E7F3FD"/>
-          </a:solidFill>
-          <a:ln w="12700">
-            <a:solidFill>
-              <a:srgbClr val="00A3E0"/>
-            </a:solidFill>
-          </a:ln>
-        </p:spPr>
-        <p:style>
-          <a:lnRef idx="1">
-            <a:schemeClr val="accent1"/>
-          </a:lnRef>
-          <a:fillRef idx="3">
-            <a:schemeClr val="accent1"/>
-          </a:fillRef>
-          <a:effectRef idx="2">
-            <a:schemeClr val="accent1"/>
-          </a:effectRef>
-          <a:fontRef idx="minor">
-            <a:schemeClr val="lt1"/>
-          </a:fontRef>
-        </p:style>
-        <p:txBody>
-          <a:bodyPr wrap="square" lIns="128016" tIns="91440" rIns="109728" bIns="73152" rtlCol="0" anchor="ctr">
-            <a:normAutofit lnSpcReduction="10000"/>
-          </a:bodyPr>
-          <a:lstStyle/>
-          <a:p>
-            <a:pPr algn="ctr"/>
-            <a:r>
-              <a:rPr lang="ru-RU" sz="1400" dirty="0">
-                <a:solidFill>
-                  <a:srgbClr val="272D3A"/>
-                </a:solidFill>
-                <a:latin typeface="Arial"/>
-              </a:rPr>
-              <a:t>Трассовое отслеживание</a:t>
-            </a:r>
-            <a:endParaRPr sz="1400" dirty="0">
-              <a:solidFill>
-                <a:srgbClr val="272D3A"/>
-              </a:solidFill>
-              <a:latin typeface="Arial"/>
-            </a:endParaRPr>
-          </a:p>
-        </p:txBody>
-      </p:sp>
-      <p:sp>
-        <p:nvSpPr>
-          <p:cNvPr id="42" name="Rounded Rectangle 18">
-            <a:extLst>
-              <a:ext uri="{FF2B5EF4-FFF2-40B4-BE49-F238E27FC236}">
-                <a16:creationId xmlns:a16="http://schemas.microsoft.com/office/drawing/2014/main" id="{3FF17AED-9C83-4686-A150-A785886B426E}"/>
-              </a:ext>
-            </a:extLst>
-          </p:cNvPr>
-          <p:cNvSpPr/>
-          <p:nvPr/>
-        </p:nvSpPr>
-        <p:spPr>
-          <a:xfrm>
-            <a:off x="4080741" y="5794553"/>
-            <a:ext cx="2075028" cy="859439"/>
-          </a:xfrm>
-          <a:prstGeom prst="roundRect">
-            <a:avLst/>
-          </a:prstGeom>
-          <a:solidFill>
-            <a:srgbClr val="E7F3FD"/>
-          </a:solidFill>
-          <a:ln w="12700">
-            <a:solidFill>
-              <a:srgbClr val="00A3E0"/>
-            </a:solidFill>
-          </a:ln>
-        </p:spPr>
-        <p:style>
-          <a:lnRef idx="1">
-            <a:schemeClr val="accent1"/>
-          </a:lnRef>
-          <a:fillRef idx="3">
-            <a:schemeClr val="accent1"/>
-          </a:fillRef>
-          <a:effectRef idx="2">
-            <a:schemeClr val="accent1"/>
-          </a:effectRef>
-          <a:fontRef idx="minor">
-            <a:schemeClr val="lt1"/>
-          </a:fontRef>
-        </p:style>
-        <p:txBody>
-          <a:bodyPr wrap="square" lIns="128016" tIns="91440" rIns="109728" bIns="73152" rtlCol="0" anchor="ctr">
-            <a:normAutofit lnSpcReduction="10000"/>
-          </a:bodyPr>
-          <a:lstStyle/>
-          <a:p>
-            <a:pPr algn="ctr"/>
-            <a:r>
-              <a:rPr lang="ru-RU" sz="1400" dirty="0">
-                <a:solidFill>
-                  <a:srgbClr val="272D3A"/>
-                </a:solidFill>
-                <a:latin typeface="Arial"/>
-              </a:rPr>
-              <a:t>Передача данных на оборудование (звонки, тахографы)</a:t>
-            </a:r>
-            <a:endParaRPr sz="1400" dirty="0">
-              <a:solidFill>
-                <a:srgbClr val="272D3A"/>
-              </a:solidFill>
-              <a:latin typeface="Arial"/>
-            </a:endParaRPr>
-          </a:p>
-        </p:txBody>
-      </p:sp>
-      <p:sp>
-        <p:nvSpPr>
-          <p:cNvPr id="43" name="Rounded Rectangle 18">
-            <a:extLst>
-              <a:ext uri="{FF2B5EF4-FFF2-40B4-BE49-F238E27FC236}">
-                <a16:creationId xmlns:a16="http://schemas.microsoft.com/office/drawing/2014/main" id="{4851C47E-44E6-4DE6-B9C5-480874A9579B}"/>
-              </a:ext>
-            </a:extLst>
-          </p:cNvPr>
-          <p:cNvSpPr/>
-          <p:nvPr/>
-        </p:nvSpPr>
-        <p:spPr>
-          <a:xfrm>
-            <a:off x="6365837" y="5794552"/>
-            <a:ext cx="1514139" cy="859439"/>
-          </a:xfrm>
-          <a:prstGeom prst="roundRect">
-            <a:avLst/>
-          </a:prstGeom>
-          <a:solidFill>
-            <a:srgbClr val="E7F3FD"/>
-          </a:solidFill>
-          <a:ln w="12700">
-            <a:solidFill>
-              <a:srgbClr val="00A3E0"/>
-            </a:solidFill>
-          </a:ln>
-        </p:spPr>
-        <p:style>
-          <a:lnRef idx="1">
-            <a:schemeClr val="accent1"/>
-          </a:lnRef>
-          <a:fillRef idx="3">
-            <a:schemeClr val="accent1"/>
-          </a:fillRef>
-          <a:effectRef idx="2">
-            <a:schemeClr val="accent1"/>
-          </a:effectRef>
-          <a:fontRef idx="minor">
-            <a:schemeClr val="lt1"/>
-          </a:fontRef>
-        </p:style>
-        <p:txBody>
-          <a:bodyPr wrap="square" lIns="128016" tIns="91440" rIns="109728" bIns="73152" rtlCol="0" anchor="ctr">
-            <a:normAutofit lnSpcReduction="10000"/>
-          </a:bodyPr>
-          <a:lstStyle/>
-          <a:p>
-            <a:pPr algn="ctr"/>
-            <a:r>
-              <a:rPr lang="ru-RU" sz="1400" dirty="0">
-                <a:solidFill>
-                  <a:srgbClr val="272D3A"/>
-                </a:solidFill>
-                <a:latin typeface="Arial"/>
-              </a:rPr>
-              <a:t>Учет транспортной работы</a:t>
-            </a:r>
-            <a:endParaRPr sz="1400" dirty="0">
               <a:solidFill>
                 <a:srgbClr val="272D3A"/>
               </a:solidFill>
@@ -8551,6 +6871,1926 @@
       </p:grpSpPr>
       <p:sp>
         <p:nvSpPr>
+          <p:cNvPr id="7" name="Заголовок 6">
+            <a:extLst>
+              <a:ext uri="{FF2B5EF4-FFF2-40B4-BE49-F238E27FC236}">
+                <a16:creationId xmlns:a16="http://schemas.microsoft.com/office/drawing/2014/main" id="{C950A427-2396-4452-A267-FC25A12F1CCE}"/>
+              </a:ext>
+            </a:extLst>
+          </p:cNvPr>
+          <p:cNvSpPr>
+            <a:spLocks noGrp="1"/>
+          </p:cNvSpPr>
+          <p:nvPr>
+            <p:ph type="title"/>
+          </p:nvPr>
+        </p:nvSpPr>
+        <p:spPr/>
+        <p:txBody>
+          <a:bodyPr/>
+          <a:lstStyle/>
+          <a:p>
+            <a:r>
+              <a:rPr lang="ru-RU" dirty="0"/>
+              <a:t>Заключение</a:t>
+            </a:r>
+          </a:p>
+        </p:txBody>
+      </p:sp>
+      <p:sp>
+        <p:nvSpPr>
+          <p:cNvPr id="4" name="TextBox 3">
+            <a:extLst>
+              <a:ext uri="{FF2B5EF4-FFF2-40B4-BE49-F238E27FC236}">
+                <a16:creationId xmlns:a16="http://schemas.microsoft.com/office/drawing/2014/main" id="{C704F466-5A37-4C58-87B0-E9FCEA41EBC0}"/>
+              </a:ext>
+            </a:extLst>
+          </p:cNvPr>
+          <p:cNvSpPr txBox="1"/>
+          <p:nvPr/>
+        </p:nvSpPr>
+        <p:spPr>
+          <a:xfrm>
+            <a:off x="520550" y="1214180"/>
+            <a:ext cx="4392110" cy="408623"/>
+          </a:xfrm>
+          <a:prstGeom prst="roundRect">
+            <a:avLst/>
+          </a:prstGeom>
+          <a:ln w="19050"/>
+        </p:spPr>
+        <p:style>
+          <a:lnRef idx="2">
+            <a:schemeClr val="accent1"/>
+          </a:lnRef>
+          <a:fillRef idx="1">
+            <a:schemeClr val="lt1"/>
+          </a:fillRef>
+          <a:effectRef idx="0">
+            <a:schemeClr val="accent1"/>
+          </a:effectRef>
+          <a:fontRef idx="minor">
+            <a:schemeClr val="dk1"/>
+          </a:fontRef>
+        </p:style>
+        <p:txBody>
+          <a:bodyPr wrap="square">
+            <a:spAutoFit/>
+          </a:bodyPr>
+          <a:lstStyle/>
+          <a:p>
+            <a:pPr algn="ctr"/>
+            <a:r>
+              <a:rPr lang="ru-RU" sz="1800" b="1" i="0" dirty="0">
+                <a:solidFill>
+                  <a:srgbClr val="005BAA"/>
+                </a:solidFill>
+                <a:latin typeface="Arial"/>
+              </a:rPr>
+              <a:t>В ходе работы выполнены этапы</a:t>
+            </a:r>
+          </a:p>
+        </p:txBody>
+      </p:sp>
+      <p:sp>
+        <p:nvSpPr>
+          <p:cNvPr id="5" name="Rounded Rectangle 18">
+            <a:extLst>
+              <a:ext uri="{FF2B5EF4-FFF2-40B4-BE49-F238E27FC236}">
+                <a16:creationId xmlns:a16="http://schemas.microsoft.com/office/drawing/2014/main" id="{8F9F4DA8-333C-4DDC-8B1A-44131E8F2525}"/>
+              </a:ext>
+            </a:extLst>
+          </p:cNvPr>
+          <p:cNvSpPr/>
+          <p:nvPr/>
+        </p:nvSpPr>
+        <p:spPr>
+          <a:xfrm>
+            <a:off x="1255660" y="1838937"/>
+            <a:ext cx="1371003" cy="859439"/>
+          </a:xfrm>
+          <a:prstGeom prst="roundRect">
+            <a:avLst/>
+          </a:prstGeom>
+          <a:solidFill>
+            <a:srgbClr val="E7F3FD"/>
+          </a:solidFill>
+          <a:ln w="12700">
+            <a:solidFill>
+              <a:srgbClr val="00A3E0"/>
+            </a:solidFill>
+          </a:ln>
+        </p:spPr>
+        <p:style>
+          <a:lnRef idx="1">
+            <a:schemeClr val="accent1"/>
+          </a:lnRef>
+          <a:fillRef idx="3">
+            <a:schemeClr val="accent1"/>
+          </a:fillRef>
+          <a:effectRef idx="2">
+            <a:schemeClr val="accent1"/>
+          </a:effectRef>
+          <a:fontRef idx="minor">
+            <a:schemeClr val="lt1"/>
+          </a:fontRef>
+        </p:style>
+        <p:txBody>
+          <a:bodyPr wrap="square" lIns="128016" tIns="91440" rIns="109728" bIns="73152" rtlCol="0" anchor="ctr">
+            <a:normAutofit lnSpcReduction="10000"/>
+          </a:bodyPr>
+          <a:lstStyle/>
+          <a:p>
+            <a:pPr algn="ctr"/>
+            <a:r>
+              <a:rPr lang="ru-RU" sz="1400" dirty="0">
+                <a:solidFill>
+                  <a:srgbClr val="272D3A"/>
+                </a:solidFill>
+                <a:latin typeface="Arial"/>
+              </a:rPr>
+              <a:t>Анализ предметной области</a:t>
+            </a:r>
+            <a:endParaRPr sz="1400" dirty="0">
+              <a:solidFill>
+                <a:srgbClr val="272D3A"/>
+              </a:solidFill>
+              <a:latin typeface="Arial"/>
+            </a:endParaRPr>
+          </a:p>
+        </p:txBody>
+      </p:sp>
+      <p:sp>
+        <p:nvSpPr>
+          <p:cNvPr id="6" name="Rounded Rectangle 18">
+            <a:extLst>
+              <a:ext uri="{FF2B5EF4-FFF2-40B4-BE49-F238E27FC236}">
+                <a16:creationId xmlns:a16="http://schemas.microsoft.com/office/drawing/2014/main" id="{94A85E6C-31B0-482F-BEDF-8A5C432796AE}"/>
+              </a:ext>
+            </a:extLst>
+          </p:cNvPr>
+          <p:cNvSpPr/>
+          <p:nvPr/>
+        </p:nvSpPr>
+        <p:spPr>
+          <a:xfrm>
+            <a:off x="2887236" y="1829967"/>
+            <a:ext cx="1371003" cy="859439"/>
+          </a:xfrm>
+          <a:prstGeom prst="roundRect">
+            <a:avLst/>
+          </a:prstGeom>
+          <a:solidFill>
+            <a:srgbClr val="E7F3FD"/>
+          </a:solidFill>
+          <a:ln w="12700">
+            <a:solidFill>
+              <a:srgbClr val="00A3E0"/>
+            </a:solidFill>
+          </a:ln>
+        </p:spPr>
+        <p:style>
+          <a:lnRef idx="1">
+            <a:schemeClr val="accent1"/>
+          </a:lnRef>
+          <a:fillRef idx="3">
+            <a:schemeClr val="accent1"/>
+          </a:fillRef>
+          <a:effectRef idx="2">
+            <a:schemeClr val="accent1"/>
+          </a:effectRef>
+          <a:fontRef idx="minor">
+            <a:schemeClr val="lt1"/>
+          </a:fontRef>
+        </p:style>
+        <p:txBody>
+          <a:bodyPr wrap="square" lIns="128016" tIns="91440" rIns="109728" bIns="73152" rtlCol="0" anchor="ctr">
+            <a:normAutofit lnSpcReduction="10000"/>
+          </a:bodyPr>
+          <a:lstStyle/>
+          <a:p>
+            <a:pPr algn="ctr"/>
+            <a:r>
+              <a:rPr lang="ru-RU" sz="1400" dirty="0">
+                <a:solidFill>
+                  <a:srgbClr val="272D3A"/>
+                </a:solidFill>
+                <a:latin typeface="Arial"/>
+              </a:rPr>
+              <a:t>Анализ требований к ПП</a:t>
+            </a:r>
+            <a:endParaRPr sz="1400" dirty="0">
+              <a:solidFill>
+                <a:srgbClr val="272D3A"/>
+              </a:solidFill>
+              <a:latin typeface="Arial"/>
+            </a:endParaRPr>
+          </a:p>
+        </p:txBody>
+      </p:sp>
+      <p:sp>
+        <p:nvSpPr>
+          <p:cNvPr id="8" name="Rounded Rectangle 18">
+            <a:extLst>
+              <a:ext uri="{FF2B5EF4-FFF2-40B4-BE49-F238E27FC236}">
+                <a16:creationId xmlns:a16="http://schemas.microsoft.com/office/drawing/2014/main" id="{1E907D65-AB0D-4A89-9801-32C897A9BD98}"/>
+              </a:ext>
+            </a:extLst>
+          </p:cNvPr>
+          <p:cNvSpPr/>
+          <p:nvPr/>
+        </p:nvSpPr>
+        <p:spPr>
+          <a:xfrm>
+            <a:off x="4518812" y="1838937"/>
+            <a:ext cx="1371003" cy="859439"/>
+          </a:xfrm>
+          <a:prstGeom prst="roundRect">
+            <a:avLst/>
+          </a:prstGeom>
+          <a:solidFill>
+            <a:srgbClr val="E7F3FD"/>
+          </a:solidFill>
+          <a:ln w="12700">
+            <a:solidFill>
+              <a:srgbClr val="00A3E0"/>
+            </a:solidFill>
+          </a:ln>
+        </p:spPr>
+        <p:style>
+          <a:lnRef idx="1">
+            <a:schemeClr val="accent1"/>
+          </a:lnRef>
+          <a:fillRef idx="3">
+            <a:schemeClr val="accent1"/>
+          </a:fillRef>
+          <a:effectRef idx="2">
+            <a:schemeClr val="accent1"/>
+          </a:effectRef>
+          <a:fontRef idx="minor">
+            <a:schemeClr val="lt1"/>
+          </a:fontRef>
+        </p:style>
+        <p:txBody>
+          <a:bodyPr wrap="square" lIns="128016" tIns="91440" rIns="109728" bIns="73152" rtlCol="0" anchor="ctr">
+            <a:normAutofit lnSpcReduction="10000"/>
+          </a:bodyPr>
+          <a:lstStyle/>
+          <a:p>
+            <a:pPr algn="ctr"/>
+            <a:r>
+              <a:rPr lang="ru-RU" sz="1400" dirty="0">
+                <a:solidFill>
+                  <a:srgbClr val="272D3A"/>
+                </a:solidFill>
+                <a:latin typeface="Arial"/>
+              </a:rPr>
+              <a:t>Поиск методов решения</a:t>
+            </a:r>
+            <a:endParaRPr sz="1400" dirty="0">
+              <a:solidFill>
+                <a:srgbClr val="272D3A"/>
+              </a:solidFill>
+              <a:latin typeface="Arial"/>
+            </a:endParaRPr>
+          </a:p>
+        </p:txBody>
+      </p:sp>
+      <p:sp>
+        <p:nvSpPr>
+          <p:cNvPr id="9" name="Rounded Rectangle 18">
+            <a:extLst>
+              <a:ext uri="{FF2B5EF4-FFF2-40B4-BE49-F238E27FC236}">
+                <a16:creationId xmlns:a16="http://schemas.microsoft.com/office/drawing/2014/main" id="{80B00CB9-4C13-45CA-962A-3B9E24108960}"/>
+              </a:ext>
+            </a:extLst>
+          </p:cNvPr>
+          <p:cNvSpPr/>
+          <p:nvPr/>
+        </p:nvSpPr>
+        <p:spPr>
+          <a:xfrm>
+            <a:off x="6150388" y="1829966"/>
+            <a:ext cx="1371003" cy="859439"/>
+          </a:xfrm>
+          <a:prstGeom prst="roundRect">
+            <a:avLst/>
+          </a:prstGeom>
+          <a:solidFill>
+            <a:srgbClr val="E7F3FD"/>
+          </a:solidFill>
+          <a:ln w="12700">
+            <a:solidFill>
+              <a:srgbClr val="00A3E0"/>
+            </a:solidFill>
+          </a:ln>
+        </p:spPr>
+        <p:style>
+          <a:lnRef idx="1">
+            <a:schemeClr val="accent1"/>
+          </a:lnRef>
+          <a:fillRef idx="3">
+            <a:schemeClr val="accent1"/>
+          </a:fillRef>
+          <a:effectRef idx="2">
+            <a:schemeClr val="accent1"/>
+          </a:effectRef>
+          <a:fontRef idx="minor">
+            <a:schemeClr val="lt1"/>
+          </a:fontRef>
+        </p:style>
+        <p:txBody>
+          <a:bodyPr wrap="square" lIns="128016" tIns="91440" rIns="109728" bIns="73152" rtlCol="0" anchor="ctr">
+            <a:normAutofit/>
+          </a:bodyPr>
+          <a:lstStyle/>
+          <a:p>
+            <a:pPr algn="ctr"/>
+            <a:r>
+              <a:rPr lang="ru-RU" sz="1400" dirty="0">
+                <a:solidFill>
+                  <a:srgbClr val="272D3A"/>
+                </a:solidFill>
+                <a:latin typeface="Arial"/>
+              </a:rPr>
+              <a:t>Реализация</a:t>
+            </a:r>
+            <a:endParaRPr sz="1400" dirty="0">
+              <a:solidFill>
+                <a:srgbClr val="272D3A"/>
+              </a:solidFill>
+              <a:latin typeface="Arial"/>
+            </a:endParaRPr>
+          </a:p>
+        </p:txBody>
+      </p:sp>
+      <p:sp>
+        <p:nvSpPr>
+          <p:cNvPr id="10" name="Rounded Rectangle 18">
+            <a:extLst>
+              <a:ext uri="{FF2B5EF4-FFF2-40B4-BE49-F238E27FC236}">
+                <a16:creationId xmlns:a16="http://schemas.microsoft.com/office/drawing/2014/main" id="{831F63E4-B32D-42F2-BC37-31FA9782B58A}"/>
+              </a:ext>
+            </a:extLst>
+          </p:cNvPr>
+          <p:cNvSpPr/>
+          <p:nvPr/>
+        </p:nvSpPr>
+        <p:spPr>
+          <a:xfrm>
+            <a:off x="7781964" y="1838937"/>
+            <a:ext cx="1371003" cy="859439"/>
+          </a:xfrm>
+          <a:prstGeom prst="roundRect">
+            <a:avLst/>
+          </a:prstGeom>
+          <a:solidFill>
+            <a:srgbClr val="E7F3FD"/>
+          </a:solidFill>
+          <a:ln w="12700">
+            <a:solidFill>
+              <a:srgbClr val="00A3E0"/>
+            </a:solidFill>
+          </a:ln>
+        </p:spPr>
+        <p:style>
+          <a:lnRef idx="1">
+            <a:schemeClr val="accent1"/>
+          </a:lnRef>
+          <a:fillRef idx="3">
+            <a:schemeClr val="accent1"/>
+          </a:fillRef>
+          <a:effectRef idx="2">
+            <a:schemeClr val="accent1"/>
+          </a:effectRef>
+          <a:fontRef idx="minor">
+            <a:schemeClr val="lt1"/>
+          </a:fontRef>
+        </p:style>
+        <p:txBody>
+          <a:bodyPr wrap="square" lIns="128016" tIns="91440" rIns="109728" bIns="73152" rtlCol="0" anchor="ctr">
+            <a:normAutofit/>
+          </a:bodyPr>
+          <a:lstStyle/>
+          <a:p>
+            <a:pPr algn="ctr"/>
+            <a:r>
+              <a:rPr lang="ru-RU" sz="1200" dirty="0">
+                <a:solidFill>
+                  <a:srgbClr val="272D3A"/>
+                </a:solidFill>
+                <a:latin typeface="Arial"/>
+              </a:rPr>
+              <a:t>Тестирование</a:t>
+            </a:r>
+            <a:endParaRPr sz="1200" dirty="0">
+              <a:solidFill>
+                <a:srgbClr val="272D3A"/>
+              </a:solidFill>
+              <a:latin typeface="Arial"/>
+            </a:endParaRPr>
+          </a:p>
+        </p:txBody>
+      </p:sp>
+      <p:sp>
+        <p:nvSpPr>
+          <p:cNvPr id="11" name="Rounded Rectangle 18">
+            <a:extLst>
+              <a:ext uri="{FF2B5EF4-FFF2-40B4-BE49-F238E27FC236}">
+                <a16:creationId xmlns:a16="http://schemas.microsoft.com/office/drawing/2014/main" id="{D0665EE1-401A-4346-9897-19704F3697F9}"/>
+              </a:ext>
+            </a:extLst>
+          </p:cNvPr>
+          <p:cNvSpPr/>
+          <p:nvPr/>
+        </p:nvSpPr>
+        <p:spPr>
+          <a:xfrm>
+            <a:off x="9413540" y="1847901"/>
+            <a:ext cx="1371003" cy="859439"/>
+          </a:xfrm>
+          <a:prstGeom prst="roundRect">
+            <a:avLst/>
+          </a:prstGeom>
+          <a:solidFill>
+            <a:srgbClr val="E7F3FD"/>
+          </a:solidFill>
+          <a:ln w="12700">
+            <a:solidFill>
+              <a:srgbClr val="00A3E0"/>
+            </a:solidFill>
+          </a:ln>
+        </p:spPr>
+        <p:style>
+          <a:lnRef idx="1">
+            <a:schemeClr val="accent1"/>
+          </a:lnRef>
+          <a:fillRef idx="3">
+            <a:schemeClr val="accent1"/>
+          </a:fillRef>
+          <a:effectRef idx="2">
+            <a:schemeClr val="accent1"/>
+          </a:effectRef>
+          <a:fontRef idx="minor">
+            <a:schemeClr val="lt1"/>
+          </a:fontRef>
+        </p:style>
+        <p:txBody>
+          <a:bodyPr wrap="square" lIns="128016" tIns="91440" rIns="109728" bIns="73152" rtlCol="0" anchor="ctr">
+            <a:normAutofit/>
+          </a:bodyPr>
+          <a:lstStyle/>
+          <a:p>
+            <a:pPr algn="ctr"/>
+            <a:r>
+              <a:rPr lang="ru-RU" sz="1200" dirty="0">
+                <a:solidFill>
+                  <a:srgbClr val="272D3A"/>
+                </a:solidFill>
+                <a:latin typeface="Arial"/>
+              </a:rPr>
+              <a:t>Ввод в эксплуатацию</a:t>
+            </a:r>
+            <a:endParaRPr sz="1200" dirty="0">
+              <a:solidFill>
+                <a:srgbClr val="272D3A"/>
+              </a:solidFill>
+              <a:latin typeface="Arial"/>
+            </a:endParaRPr>
+          </a:p>
+        </p:txBody>
+      </p:sp>
+      <p:sp>
+        <p:nvSpPr>
+          <p:cNvPr id="2" name="Стрелка: вправо 1">
+            <a:extLst>
+              <a:ext uri="{FF2B5EF4-FFF2-40B4-BE49-F238E27FC236}">
+                <a16:creationId xmlns:a16="http://schemas.microsoft.com/office/drawing/2014/main" id="{7DB38DD1-E8A3-4569-80A8-435CF00AE444}"/>
+              </a:ext>
+            </a:extLst>
+          </p:cNvPr>
+          <p:cNvSpPr/>
+          <p:nvPr/>
+        </p:nvSpPr>
+        <p:spPr>
+          <a:xfrm>
+            <a:off x="2671787" y="2187973"/>
+            <a:ext cx="170325" cy="179294"/>
+          </a:xfrm>
+          <a:prstGeom prst="rightArrow">
+            <a:avLst/>
+          </a:prstGeom>
+          <a:gradFill flip="none" rotWithShape="1">
+            <a:gsLst>
+              <a:gs pos="0">
+                <a:schemeClr val="accent1">
+                  <a:tint val="66000"/>
+                  <a:satMod val="160000"/>
+                </a:schemeClr>
+              </a:gs>
+              <a:gs pos="50000">
+                <a:schemeClr val="accent1">
+                  <a:tint val="44500"/>
+                  <a:satMod val="160000"/>
+                </a:schemeClr>
+              </a:gs>
+              <a:gs pos="100000">
+                <a:schemeClr val="accent1">
+                  <a:tint val="23500"/>
+                  <a:satMod val="160000"/>
+                </a:schemeClr>
+              </a:gs>
+            </a:gsLst>
+            <a:lin ang="16200000" scaled="1"/>
+            <a:tileRect/>
+          </a:gradFill>
+          <a:ln/>
+        </p:spPr>
+        <p:style>
+          <a:lnRef idx="1">
+            <a:schemeClr val="accent1"/>
+          </a:lnRef>
+          <a:fillRef idx="2">
+            <a:schemeClr val="accent1"/>
+          </a:fillRef>
+          <a:effectRef idx="1">
+            <a:schemeClr val="accent1"/>
+          </a:effectRef>
+          <a:fontRef idx="minor">
+            <a:schemeClr val="dk1"/>
+          </a:fontRef>
+        </p:style>
+        <p:txBody>
+          <a:bodyPr rot="0" spcFirstLastPara="0" vertOverflow="overflow" horzOverflow="overflow" vert="horz" wrap="square" lIns="91440" tIns="45720" rIns="91440" bIns="45720" numCol="1" spcCol="0" rtlCol="0" fromWordArt="0" anchor="ctr" anchorCtr="0" forceAA="0" compatLnSpc="1">
+            <a:prstTxWarp prst="textNoShape">
+              <a:avLst/>
+            </a:prstTxWarp>
+            <a:noAutofit/>
+          </a:bodyPr>
+          <a:lstStyle/>
+          <a:p>
+            <a:pPr algn="ctr"/>
+            <a:endParaRPr lang="ru-RU" sz="1000" dirty="0">
+              <a:solidFill>
+                <a:schemeClr val="tx2"/>
+              </a:solidFill>
+            </a:endParaRPr>
+          </a:p>
+        </p:txBody>
+      </p:sp>
+      <p:sp>
+        <p:nvSpPr>
+          <p:cNvPr id="14" name="Стрелка: вправо 13">
+            <a:extLst>
+              <a:ext uri="{FF2B5EF4-FFF2-40B4-BE49-F238E27FC236}">
+                <a16:creationId xmlns:a16="http://schemas.microsoft.com/office/drawing/2014/main" id="{7EBF72DB-AFE9-4BBF-82F3-6C6AD1D5D94A}"/>
+              </a:ext>
+            </a:extLst>
+          </p:cNvPr>
+          <p:cNvSpPr/>
+          <p:nvPr/>
+        </p:nvSpPr>
+        <p:spPr>
+          <a:xfrm>
+            <a:off x="4303363" y="2161079"/>
+            <a:ext cx="170325" cy="179294"/>
+          </a:xfrm>
+          <a:prstGeom prst="rightArrow">
+            <a:avLst/>
+          </a:prstGeom>
+          <a:gradFill flip="none" rotWithShape="1">
+            <a:gsLst>
+              <a:gs pos="0">
+                <a:schemeClr val="accent1">
+                  <a:tint val="66000"/>
+                  <a:satMod val="160000"/>
+                </a:schemeClr>
+              </a:gs>
+              <a:gs pos="50000">
+                <a:schemeClr val="accent1">
+                  <a:tint val="44500"/>
+                  <a:satMod val="160000"/>
+                </a:schemeClr>
+              </a:gs>
+              <a:gs pos="100000">
+                <a:schemeClr val="accent1">
+                  <a:tint val="23500"/>
+                  <a:satMod val="160000"/>
+                </a:schemeClr>
+              </a:gs>
+            </a:gsLst>
+            <a:lin ang="16200000" scaled="1"/>
+            <a:tileRect/>
+          </a:gradFill>
+          <a:ln/>
+        </p:spPr>
+        <p:style>
+          <a:lnRef idx="1">
+            <a:schemeClr val="accent1"/>
+          </a:lnRef>
+          <a:fillRef idx="2">
+            <a:schemeClr val="accent1"/>
+          </a:fillRef>
+          <a:effectRef idx="1">
+            <a:schemeClr val="accent1"/>
+          </a:effectRef>
+          <a:fontRef idx="minor">
+            <a:schemeClr val="dk1"/>
+          </a:fontRef>
+        </p:style>
+        <p:txBody>
+          <a:bodyPr rot="0" spcFirstLastPara="0" vertOverflow="overflow" horzOverflow="overflow" vert="horz" wrap="square" lIns="91440" tIns="45720" rIns="91440" bIns="45720" numCol="1" spcCol="0" rtlCol="0" fromWordArt="0" anchor="ctr" anchorCtr="0" forceAA="0" compatLnSpc="1">
+            <a:prstTxWarp prst="textNoShape">
+              <a:avLst/>
+            </a:prstTxWarp>
+            <a:noAutofit/>
+          </a:bodyPr>
+          <a:lstStyle/>
+          <a:p>
+            <a:pPr algn="ctr"/>
+            <a:endParaRPr lang="ru-RU" sz="1000" dirty="0">
+              <a:solidFill>
+                <a:schemeClr val="tx2"/>
+              </a:solidFill>
+            </a:endParaRPr>
+          </a:p>
+        </p:txBody>
+      </p:sp>
+      <p:sp>
+        <p:nvSpPr>
+          <p:cNvPr id="15" name="Стрелка: вправо 14">
+            <a:extLst>
+              <a:ext uri="{FF2B5EF4-FFF2-40B4-BE49-F238E27FC236}">
+                <a16:creationId xmlns:a16="http://schemas.microsoft.com/office/drawing/2014/main" id="{BD325606-5ECB-4E41-A4C0-96F1BAE54F28}"/>
+              </a:ext>
+            </a:extLst>
+          </p:cNvPr>
+          <p:cNvSpPr/>
+          <p:nvPr/>
+        </p:nvSpPr>
+        <p:spPr>
+          <a:xfrm>
+            <a:off x="5934939" y="2170038"/>
+            <a:ext cx="170325" cy="179294"/>
+          </a:xfrm>
+          <a:prstGeom prst="rightArrow">
+            <a:avLst/>
+          </a:prstGeom>
+          <a:gradFill flip="none" rotWithShape="1">
+            <a:gsLst>
+              <a:gs pos="0">
+                <a:schemeClr val="accent1">
+                  <a:tint val="66000"/>
+                  <a:satMod val="160000"/>
+                </a:schemeClr>
+              </a:gs>
+              <a:gs pos="50000">
+                <a:schemeClr val="accent1">
+                  <a:tint val="44500"/>
+                  <a:satMod val="160000"/>
+                </a:schemeClr>
+              </a:gs>
+              <a:gs pos="100000">
+                <a:schemeClr val="accent1">
+                  <a:tint val="23500"/>
+                  <a:satMod val="160000"/>
+                </a:schemeClr>
+              </a:gs>
+            </a:gsLst>
+            <a:lin ang="16200000" scaled="1"/>
+            <a:tileRect/>
+          </a:gradFill>
+          <a:ln/>
+        </p:spPr>
+        <p:style>
+          <a:lnRef idx="1">
+            <a:schemeClr val="accent1"/>
+          </a:lnRef>
+          <a:fillRef idx="2">
+            <a:schemeClr val="accent1"/>
+          </a:fillRef>
+          <a:effectRef idx="1">
+            <a:schemeClr val="accent1"/>
+          </a:effectRef>
+          <a:fontRef idx="minor">
+            <a:schemeClr val="dk1"/>
+          </a:fontRef>
+        </p:style>
+        <p:txBody>
+          <a:bodyPr rot="0" spcFirstLastPara="0" vertOverflow="overflow" horzOverflow="overflow" vert="horz" wrap="square" lIns="91440" tIns="45720" rIns="91440" bIns="45720" numCol="1" spcCol="0" rtlCol="0" fromWordArt="0" anchor="ctr" anchorCtr="0" forceAA="0" compatLnSpc="1">
+            <a:prstTxWarp prst="textNoShape">
+              <a:avLst/>
+            </a:prstTxWarp>
+            <a:noAutofit/>
+          </a:bodyPr>
+          <a:lstStyle/>
+          <a:p>
+            <a:pPr algn="ctr"/>
+            <a:endParaRPr lang="ru-RU" sz="1000" dirty="0">
+              <a:solidFill>
+                <a:schemeClr val="tx2"/>
+              </a:solidFill>
+            </a:endParaRPr>
+          </a:p>
+        </p:txBody>
+      </p:sp>
+      <p:sp>
+        <p:nvSpPr>
+          <p:cNvPr id="16" name="Стрелка: вправо 15">
+            <a:extLst>
+              <a:ext uri="{FF2B5EF4-FFF2-40B4-BE49-F238E27FC236}">
+                <a16:creationId xmlns:a16="http://schemas.microsoft.com/office/drawing/2014/main" id="{0B131705-ABA6-432B-A29D-739D564E686E}"/>
+              </a:ext>
+            </a:extLst>
+          </p:cNvPr>
+          <p:cNvSpPr/>
+          <p:nvPr/>
+        </p:nvSpPr>
+        <p:spPr>
+          <a:xfrm>
+            <a:off x="7566515" y="2187973"/>
+            <a:ext cx="170325" cy="179294"/>
+          </a:xfrm>
+          <a:prstGeom prst="rightArrow">
+            <a:avLst/>
+          </a:prstGeom>
+          <a:gradFill flip="none" rotWithShape="1">
+            <a:gsLst>
+              <a:gs pos="0">
+                <a:schemeClr val="accent1">
+                  <a:tint val="66000"/>
+                  <a:satMod val="160000"/>
+                </a:schemeClr>
+              </a:gs>
+              <a:gs pos="50000">
+                <a:schemeClr val="accent1">
+                  <a:tint val="44500"/>
+                  <a:satMod val="160000"/>
+                </a:schemeClr>
+              </a:gs>
+              <a:gs pos="100000">
+                <a:schemeClr val="accent1">
+                  <a:tint val="23500"/>
+                  <a:satMod val="160000"/>
+                </a:schemeClr>
+              </a:gs>
+            </a:gsLst>
+            <a:lin ang="16200000" scaled="1"/>
+            <a:tileRect/>
+          </a:gradFill>
+          <a:ln/>
+        </p:spPr>
+        <p:style>
+          <a:lnRef idx="1">
+            <a:schemeClr val="accent1"/>
+          </a:lnRef>
+          <a:fillRef idx="2">
+            <a:schemeClr val="accent1"/>
+          </a:fillRef>
+          <a:effectRef idx="1">
+            <a:schemeClr val="accent1"/>
+          </a:effectRef>
+          <a:fontRef idx="minor">
+            <a:schemeClr val="dk1"/>
+          </a:fontRef>
+        </p:style>
+        <p:txBody>
+          <a:bodyPr rot="0" spcFirstLastPara="0" vertOverflow="overflow" horzOverflow="overflow" vert="horz" wrap="square" lIns="91440" tIns="45720" rIns="91440" bIns="45720" numCol="1" spcCol="0" rtlCol="0" fromWordArt="0" anchor="ctr" anchorCtr="0" forceAA="0" compatLnSpc="1">
+            <a:prstTxWarp prst="textNoShape">
+              <a:avLst/>
+            </a:prstTxWarp>
+            <a:noAutofit/>
+          </a:bodyPr>
+          <a:lstStyle/>
+          <a:p>
+            <a:pPr algn="ctr"/>
+            <a:endParaRPr lang="ru-RU" sz="1000" dirty="0">
+              <a:solidFill>
+                <a:schemeClr val="tx2"/>
+              </a:solidFill>
+            </a:endParaRPr>
+          </a:p>
+        </p:txBody>
+      </p:sp>
+      <p:sp>
+        <p:nvSpPr>
+          <p:cNvPr id="17" name="Стрелка: вправо 16">
+            <a:extLst>
+              <a:ext uri="{FF2B5EF4-FFF2-40B4-BE49-F238E27FC236}">
+                <a16:creationId xmlns:a16="http://schemas.microsoft.com/office/drawing/2014/main" id="{0DD76A16-421C-4F9D-A911-FBD1B7AF0C8B}"/>
+              </a:ext>
+            </a:extLst>
+          </p:cNvPr>
+          <p:cNvSpPr/>
+          <p:nvPr/>
+        </p:nvSpPr>
+        <p:spPr>
+          <a:xfrm>
+            <a:off x="9198091" y="2179009"/>
+            <a:ext cx="170325" cy="179294"/>
+          </a:xfrm>
+          <a:prstGeom prst="rightArrow">
+            <a:avLst/>
+          </a:prstGeom>
+          <a:gradFill flip="none" rotWithShape="1">
+            <a:gsLst>
+              <a:gs pos="0">
+                <a:schemeClr val="accent1">
+                  <a:tint val="66000"/>
+                  <a:satMod val="160000"/>
+                </a:schemeClr>
+              </a:gs>
+              <a:gs pos="50000">
+                <a:schemeClr val="accent1">
+                  <a:tint val="44500"/>
+                  <a:satMod val="160000"/>
+                </a:schemeClr>
+              </a:gs>
+              <a:gs pos="100000">
+                <a:schemeClr val="accent1">
+                  <a:tint val="23500"/>
+                  <a:satMod val="160000"/>
+                </a:schemeClr>
+              </a:gs>
+            </a:gsLst>
+            <a:lin ang="16200000" scaled="1"/>
+            <a:tileRect/>
+          </a:gradFill>
+          <a:ln/>
+        </p:spPr>
+        <p:style>
+          <a:lnRef idx="1">
+            <a:schemeClr val="accent1"/>
+          </a:lnRef>
+          <a:fillRef idx="2">
+            <a:schemeClr val="accent1"/>
+          </a:fillRef>
+          <a:effectRef idx="1">
+            <a:schemeClr val="accent1"/>
+          </a:effectRef>
+          <a:fontRef idx="minor">
+            <a:schemeClr val="dk1"/>
+          </a:fontRef>
+        </p:style>
+        <p:txBody>
+          <a:bodyPr rot="0" spcFirstLastPara="0" vertOverflow="overflow" horzOverflow="overflow" vert="horz" wrap="square" lIns="91440" tIns="45720" rIns="91440" bIns="45720" numCol="1" spcCol="0" rtlCol="0" fromWordArt="0" anchor="ctr" anchorCtr="0" forceAA="0" compatLnSpc="1">
+            <a:prstTxWarp prst="textNoShape">
+              <a:avLst/>
+            </a:prstTxWarp>
+            <a:noAutofit/>
+          </a:bodyPr>
+          <a:lstStyle/>
+          <a:p>
+            <a:pPr algn="ctr"/>
+            <a:endParaRPr lang="ru-RU" sz="1000" dirty="0">
+              <a:solidFill>
+                <a:schemeClr val="tx2"/>
+              </a:solidFill>
+            </a:endParaRPr>
+          </a:p>
+        </p:txBody>
+      </p:sp>
+      <p:sp>
+        <p:nvSpPr>
+          <p:cNvPr id="18" name="TextBox 17">
+            <a:extLst>
+              <a:ext uri="{FF2B5EF4-FFF2-40B4-BE49-F238E27FC236}">
+                <a16:creationId xmlns:a16="http://schemas.microsoft.com/office/drawing/2014/main" id="{0C60F20D-7D3A-4ECB-923E-B5C1694FCE5D}"/>
+              </a:ext>
+            </a:extLst>
+          </p:cNvPr>
+          <p:cNvSpPr txBox="1"/>
+          <p:nvPr/>
+        </p:nvSpPr>
+        <p:spPr>
+          <a:xfrm>
+            <a:off x="475732" y="2932437"/>
+            <a:ext cx="4392110" cy="408623"/>
+          </a:xfrm>
+          <a:prstGeom prst="roundRect">
+            <a:avLst/>
+          </a:prstGeom>
+          <a:ln w="19050"/>
+        </p:spPr>
+        <p:style>
+          <a:lnRef idx="2">
+            <a:schemeClr val="accent1"/>
+          </a:lnRef>
+          <a:fillRef idx="1">
+            <a:schemeClr val="lt1"/>
+          </a:fillRef>
+          <a:effectRef idx="0">
+            <a:schemeClr val="accent1"/>
+          </a:effectRef>
+          <a:fontRef idx="minor">
+            <a:schemeClr val="dk1"/>
+          </a:fontRef>
+        </p:style>
+        <p:txBody>
+          <a:bodyPr wrap="square">
+            <a:spAutoFit/>
+          </a:bodyPr>
+          <a:lstStyle/>
+          <a:p>
+            <a:pPr algn="ctr"/>
+            <a:r>
+              <a:rPr lang="ru-RU" b="1" dirty="0">
+                <a:solidFill>
+                  <a:srgbClr val="005BAA"/>
+                </a:solidFill>
+                <a:latin typeface="Arial"/>
+              </a:rPr>
+              <a:t>Основные результаты работы</a:t>
+            </a:r>
+            <a:endParaRPr lang="ru-RU" sz="1800" b="1" i="0" dirty="0">
+              <a:solidFill>
+                <a:srgbClr val="005BAA"/>
+              </a:solidFill>
+              <a:latin typeface="Arial"/>
+            </a:endParaRPr>
+          </a:p>
+        </p:txBody>
+      </p:sp>
+      <p:sp>
+        <p:nvSpPr>
+          <p:cNvPr id="19" name="Rounded Rectangle 18">
+            <a:extLst>
+              <a:ext uri="{FF2B5EF4-FFF2-40B4-BE49-F238E27FC236}">
+                <a16:creationId xmlns:a16="http://schemas.microsoft.com/office/drawing/2014/main" id="{72178640-5984-45B0-AD30-1AE4F285DC54}"/>
+              </a:ext>
+            </a:extLst>
+          </p:cNvPr>
+          <p:cNvSpPr/>
+          <p:nvPr/>
+        </p:nvSpPr>
+        <p:spPr>
+          <a:xfrm>
+            <a:off x="4437828" y="3439035"/>
+            <a:ext cx="3889785" cy="416183"/>
+          </a:xfrm>
+          <a:prstGeom prst="roundRect">
+            <a:avLst/>
+          </a:prstGeom>
+          <a:solidFill>
+            <a:srgbClr val="E7F3FD"/>
+          </a:solidFill>
+          <a:ln w="12700">
+            <a:solidFill>
+              <a:srgbClr val="00A3E0"/>
+            </a:solidFill>
+          </a:ln>
+        </p:spPr>
+        <p:style>
+          <a:lnRef idx="1">
+            <a:schemeClr val="accent1"/>
+          </a:lnRef>
+          <a:fillRef idx="3">
+            <a:schemeClr val="accent1"/>
+          </a:fillRef>
+          <a:effectRef idx="2">
+            <a:schemeClr val="accent1"/>
+          </a:effectRef>
+          <a:fontRef idx="minor">
+            <a:schemeClr val="lt1"/>
+          </a:fontRef>
+        </p:style>
+        <p:txBody>
+          <a:bodyPr wrap="square" lIns="128016" tIns="91440" rIns="109728" bIns="73152" rtlCol="0" anchor="ctr">
+            <a:normAutofit fontScale="92500" lnSpcReduction="10000"/>
+          </a:bodyPr>
+          <a:lstStyle/>
+          <a:p>
+            <a:pPr algn="ctr"/>
+            <a:r>
+              <a:rPr lang="ru-RU" sz="1600" dirty="0">
+                <a:solidFill>
+                  <a:srgbClr val="272D3A"/>
+                </a:solidFill>
+                <a:latin typeface="Arial"/>
+              </a:rPr>
+              <a:t>Система позиционного отслеживания</a:t>
+            </a:r>
+            <a:endParaRPr sz="1600" dirty="0">
+              <a:solidFill>
+                <a:srgbClr val="272D3A"/>
+              </a:solidFill>
+              <a:latin typeface="Arial"/>
+            </a:endParaRPr>
+          </a:p>
+        </p:txBody>
+      </p:sp>
+      <p:sp>
+        <p:nvSpPr>
+          <p:cNvPr id="20" name="Rounded Rectangle 18">
+            <a:extLst>
+              <a:ext uri="{FF2B5EF4-FFF2-40B4-BE49-F238E27FC236}">
+                <a16:creationId xmlns:a16="http://schemas.microsoft.com/office/drawing/2014/main" id="{58082363-FF3C-4580-874B-57706D22C3B6}"/>
+              </a:ext>
+            </a:extLst>
+          </p:cNvPr>
+          <p:cNvSpPr/>
+          <p:nvPr/>
+        </p:nvSpPr>
+        <p:spPr>
+          <a:xfrm>
+            <a:off x="905435" y="4090689"/>
+            <a:ext cx="1963271" cy="859439"/>
+          </a:xfrm>
+          <a:prstGeom prst="roundRect">
+            <a:avLst/>
+          </a:prstGeom>
+          <a:solidFill>
+            <a:srgbClr val="E7F3FD"/>
+          </a:solidFill>
+          <a:ln w="12700">
+            <a:solidFill>
+              <a:srgbClr val="00A3E0"/>
+            </a:solidFill>
+          </a:ln>
+        </p:spPr>
+        <p:style>
+          <a:lnRef idx="1">
+            <a:schemeClr val="accent1"/>
+          </a:lnRef>
+          <a:fillRef idx="3">
+            <a:schemeClr val="accent1"/>
+          </a:fillRef>
+          <a:effectRef idx="2">
+            <a:schemeClr val="accent1"/>
+          </a:effectRef>
+          <a:fontRef idx="minor">
+            <a:schemeClr val="lt1"/>
+          </a:fontRef>
+        </p:style>
+        <p:txBody>
+          <a:bodyPr wrap="square" lIns="128016" tIns="91440" rIns="109728" bIns="73152" rtlCol="0" anchor="ctr">
+            <a:normAutofit fontScale="92500"/>
+          </a:bodyPr>
+          <a:lstStyle/>
+          <a:p>
+            <a:pPr algn="ctr"/>
+            <a:r>
+              <a:rPr lang="ru-RU" sz="1400" dirty="0">
+                <a:solidFill>
+                  <a:srgbClr val="272D3A"/>
+                </a:solidFill>
+              </a:rPr>
+              <a:t>Прием и сохранение телеметрических данных</a:t>
+            </a:r>
+            <a:endParaRPr sz="1400" dirty="0">
+              <a:solidFill>
+                <a:srgbClr val="272D3A"/>
+              </a:solidFill>
+              <a:latin typeface="Arial"/>
+            </a:endParaRPr>
+          </a:p>
+        </p:txBody>
+      </p:sp>
+      <p:sp>
+        <p:nvSpPr>
+          <p:cNvPr id="21" name="Rounded Rectangle 18">
+            <a:extLst>
+              <a:ext uri="{FF2B5EF4-FFF2-40B4-BE49-F238E27FC236}">
+                <a16:creationId xmlns:a16="http://schemas.microsoft.com/office/drawing/2014/main" id="{3DFF027B-0766-4041-99C7-C9367BD1A80B}"/>
+              </a:ext>
+            </a:extLst>
+          </p:cNvPr>
+          <p:cNvSpPr/>
+          <p:nvPr/>
+        </p:nvSpPr>
+        <p:spPr>
+          <a:xfrm>
+            <a:off x="3299913" y="4090690"/>
+            <a:ext cx="1765446" cy="859439"/>
+          </a:xfrm>
+          <a:prstGeom prst="roundRect">
+            <a:avLst/>
+          </a:prstGeom>
+          <a:solidFill>
+            <a:srgbClr val="E7F3FD"/>
+          </a:solidFill>
+          <a:ln w="12700">
+            <a:solidFill>
+              <a:srgbClr val="00A3E0"/>
+            </a:solidFill>
+          </a:ln>
+        </p:spPr>
+        <p:style>
+          <a:lnRef idx="1">
+            <a:schemeClr val="accent1"/>
+          </a:lnRef>
+          <a:fillRef idx="3">
+            <a:schemeClr val="accent1"/>
+          </a:fillRef>
+          <a:effectRef idx="2">
+            <a:schemeClr val="accent1"/>
+          </a:effectRef>
+          <a:fontRef idx="minor">
+            <a:schemeClr val="lt1"/>
+          </a:fontRef>
+        </p:style>
+        <p:txBody>
+          <a:bodyPr wrap="square" lIns="128016" tIns="91440" rIns="109728" bIns="73152" rtlCol="0" anchor="ctr">
+            <a:normAutofit lnSpcReduction="10000"/>
+          </a:bodyPr>
+          <a:lstStyle/>
+          <a:p>
+            <a:pPr algn="ctr"/>
+            <a:r>
+              <a:rPr lang="ru-RU" sz="1400" dirty="0">
+                <a:solidFill>
+                  <a:srgbClr val="272D3A"/>
+                </a:solidFill>
+              </a:rPr>
+              <a:t>Просмотр актуальной телеметрии</a:t>
+            </a:r>
+            <a:endParaRPr sz="1400" dirty="0">
+              <a:solidFill>
+                <a:srgbClr val="272D3A"/>
+              </a:solidFill>
+              <a:latin typeface="Arial"/>
+            </a:endParaRPr>
+          </a:p>
+        </p:txBody>
+      </p:sp>
+      <p:sp>
+        <p:nvSpPr>
+          <p:cNvPr id="22" name="Rounded Rectangle 18">
+            <a:extLst>
+              <a:ext uri="{FF2B5EF4-FFF2-40B4-BE49-F238E27FC236}">
+                <a16:creationId xmlns:a16="http://schemas.microsoft.com/office/drawing/2014/main" id="{2250962A-2A48-49DD-8C6A-5891747E6369}"/>
+              </a:ext>
+            </a:extLst>
+          </p:cNvPr>
+          <p:cNvSpPr/>
+          <p:nvPr/>
+        </p:nvSpPr>
+        <p:spPr>
+          <a:xfrm>
+            <a:off x="5496566" y="4128039"/>
+            <a:ext cx="1765446" cy="859439"/>
+          </a:xfrm>
+          <a:prstGeom prst="roundRect">
+            <a:avLst/>
+          </a:prstGeom>
+          <a:solidFill>
+            <a:srgbClr val="E7F3FD"/>
+          </a:solidFill>
+          <a:ln w="12700">
+            <a:solidFill>
+              <a:srgbClr val="00A3E0"/>
+            </a:solidFill>
+          </a:ln>
+        </p:spPr>
+        <p:style>
+          <a:lnRef idx="1">
+            <a:schemeClr val="accent1"/>
+          </a:lnRef>
+          <a:fillRef idx="3">
+            <a:schemeClr val="accent1"/>
+          </a:fillRef>
+          <a:effectRef idx="2">
+            <a:schemeClr val="accent1"/>
+          </a:effectRef>
+          <a:fontRef idx="minor">
+            <a:schemeClr val="lt1"/>
+          </a:fontRef>
+        </p:style>
+        <p:txBody>
+          <a:bodyPr wrap="square" lIns="128016" tIns="91440" rIns="109728" bIns="73152" rtlCol="0" anchor="ctr">
+            <a:normAutofit lnSpcReduction="10000"/>
+          </a:bodyPr>
+          <a:lstStyle/>
+          <a:p>
+            <a:pPr algn="ctr"/>
+            <a:r>
+              <a:rPr lang="ru-RU" sz="1400" dirty="0">
+                <a:solidFill>
+                  <a:srgbClr val="272D3A"/>
+                </a:solidFill>
+              </a:rPr>
+              <a:t>Просмотр исторической телеметрии ТС</a:t>
+            </a:r>
+            <a:endParaRPr sz="1400" dirty="0">
+              <a:solidFill>
+                <a:srgbClr val="272D3A"/>
+              </a:solidFill>
+              <a:latin typeface="Arial"/>
+            </a:endParaRPr>
+          </a:p>
+        </p:txBody>
+      </p:sp>
+      <p:sp>
+        <p:nvSpPr>
+          <p:cNvPr id="23" name="Rounded Rectangle 18">
+            <a:extLst>
+              <a:ext uri="{FF2B5EF4-FFF2-40B4-BE49-F238E27FC236}">
+                <a16:creationId xmlns:a16="http://schemas.microsoft.com/office/drawing/2014/main" id="{B11C4722-AFBC-4499-8A16-FACAAA8F8792}"/>
+              </a:ext>
+            </a:extLst>
+          </p:cNvPr>
+          <p:cNvSpPr/>
+          <p:nvPr/>
+        </p:nvSpPr>
+        <p:spPr>
+          <a:xfrm>
+            <a:off x="7693219" y="4098043"/>
+            <a:ext cx="1765446" cy="859439"/>
+          </a:xfrm>
+          <a:prstGeom prst="roundRect">
+            <a:avLst/>
+          </a:prstGeom>
+          <a:solidFill>
+            <a:srgbClr val="E7F3FD"/>
+          </a:solidFill>
+          <a:ln w="12700">
+            <a:solidFill>
+              <a:srgbClr val="00A3E0"/>
+            </a:solidFill>
+          </a:ln>
+        </p:spPr>
+        <p:style>
+          <a:lnRef idx="1">
+            <a:schemeClr val="accent1"/>
+          </a:lnRef>
+          <a:fillRef idx="3">
+            <a:schemeClr val="accent1"/>
+          </a:fillRef>
+          <a:effectRef idx="2">
+            <a:schemeClr val="accent1"/>
+          </a:effectRef>
+          <a:fontRef idx="minor">
+            <a:schemeClr val="lt1"/>
+          </a:fontRef>
+        </p:style>
+        <p:txBody>
+          <a:bodyPr wrap="square" lIns="128016" tIns="91440" rIns="109728" bIns="73152" rtlCol="0" anchor="ctr">
+            <a:normAutofit lnSpcReduction="10000"/>
+          </a:bodyPr>
+          <a:lstStyle/>
+          <a:p>
+            <a:pPr algn="ctr"/>
+            <a:r>
+              <a:rPr lang="ru-RU" sz="1400" dirty="0">
+                <a:solidFill>
+                  <a:srgbClr val="272D3A"/>
+                </a:solidFill>
+                <a:latin typeface="Arial"/>
+              </a:rPr>
+              <a:t>События зонального отслеживания</a:t>
+            </a:r>
+            <a:endParaRPr sz="1400" dirty="0">
+              <a:solidFill>
+                <a:srgbClr val="272D3A"/>
+              </a:solidFill>
+              <a:latin typeface="Arial"/>
+            </a:endParaRPr>
+          </a:p>
+        </p:txBody>
+      </p:sp>
+      <p:sp>
+        <p:nvSpPr>
+          <p:cNvPr id="24" name="Rounded Rectangle 18">
+            <a:extLst>
+              <a:ext uri="{FF2B5EF4-FFF2-40B4-BE49-F238E27FC236}">
+                <a16:creationId xmlns:a16="http://schemas.microsoft.com/office/drawing/2014/main" id="{86E20C46-C2BA-44F5-8AFA-587AC07E1316}"/>
+              </a:ext>
+            </a:extLst>
+          </p:cNvPr>
+          <p:cNvSpPr/>
+          <p:nvPr/>
+        </p:nvSpPr>
+        <p:spPr>
+          <a:xfrm>
+            <a:off x="9889871" y="4105837"/>
+            <a:ext cx="1853893" cy="859439"/>
+          </a:xfrm>
+          <a:prstGeom prst="roundRect">
+            <a:avLst/>
+          </a:prstGeom>
+          <a:solidFill>
+            <a:srgbClr val="E7F3FD"/>
+          </a:solidFill>
+          <a:ln w="12700">
+            <a:solidFill>
+              <a:srgbClr val="00A3E0"/>
+            </a:solidFill>
+          </a:ln>
+        </p:spPr>
+        <p:style>
+          <a:lnRef idx="1">
+            <a:schemeClr val="accent1"/>
+          </a:lnRef>
+          <a:fillRef idx="3">
+            <a:schemeClr val="accent1"/>
+          </a:fillRef>
+          <a:effectRef idx="2">
+            <a:schemeClr val="accent1"/>
+          </a:effectRef>
+          <a:fontRef idx="minor">
+            <a:schemeClr val="lt1"/>
+          </a:fontRef>
+        </p:style>
+        <p:txBody>
+          <a:bodyPr wrap="square" lIns="128016" tIns="91440" rIns="109728" bIns="73152" rtlCol="0" anchor="ctr">
+            <a:normAutofit lnSpcReduction="10000"/>
+          </a:bodyPr>
+          <a:lstStyle/>
+          <a:p>
+            <a:pPr algn="ctr"/>
+            <a:r>
+              <a:rPr lang="ru-RU" sz="1400" dirty="0">
+                <a:solidFill>
+                  <a:srgbClr val="272D3A"/>
+                </a:solidFill>
+                <a:latin typeface="Arial"/>
+              </a:rPr>
+              <a:t>Пространственно-временной поиск телеметрии</a:t>
+            </a:r>
+            <a:endParaRPr sz="1400" dirty="0">
+              <a:solidFill>
+                <a:srgbClr val="272D3A"/>
+              </a:solidFill>
+              <a:latin typeface="Arial"/>
+            </a:endParaRPr>
+          </a:p>
+        </p:txBody>
+      </p:sp>
+      <p:cxnSp>
+        <p:nvCxnSpPr>
+          <p:cNvPr id="26" name="Прямая со стрелкой 25">
+            <a:extLst>
+              <a:ext uri="{FF2B5EF4-FFF2-40B4-BE49-F238E27FC236}">
+                <a16:creationId xmlns:a16="http://schemas.microsoft.com/office/drawing/2014/main" id="{37CB025D-A2CB-4FF8-9F77-6CE7B3B83F2B}"/>
+              </a:ext>
+            </a:extLst>
+          </p:cNvPr>
+          <p:cNvCxnSpPr>
+            <a:stCxn id="19" idx="1"/>
+            <a:endCxn id="20" idx="0"/>
+          </p:cNvCxnSpPr>
+          <p:nvPr/>
+        </p:nvCxnSpPr>
+        <p:spPr>
+          <a:xfrm flipH="1">
+            <a:off x="1887071" y="3647127"/>
+            <a:ext cx="2550757" cy="443562"/>
+          </a:xfrm>
+          <a:prstGeom prst="straightConnector1">
+            <a:avLst/>
+          </a:prstGeom>
+          <a:ln>
+            <a:tailEnd type="triangle"/>
+          </a:ln>
+        </p:spPr>
+        <p:style>
+          <a:lnRef idx="1">
+            <a:schemeClr val="accent1"/>
+          </a:lnRef>
+          <a:fillRef idx="0">
+            <a:schemeClr val="accent1"/>
+          </a:fillRef>
+          <a:effectRef idx="0">
+            <a:schemeClr val="accent1"/>
+          </a:effectRef>
+          <a:fontRef idx="minor">
+            <a:schemeClr val="tx1"/>
+          </a:fontRef>
+        </p:style>
+      </p:cxnSp>
+      <p:cxnSp>
+        <p:nvCxnSpPr>
+          <p:cNvPr id="30" name="Прямая со стрелкой 29">
+            <a:extLst>
+              <a:ext uri="{FF2B5EF4-FFF2-40B4-BE49-F238E27FC236}">
+                <a16:creationId xmlns:a16="http://schemas.microsoft.com/office/drawing/2014/main" id="{8CE3DB52-3685-463A-A290-C29835206757}"/>
+              </a:ext>
+            </a:extLst>
+          </p:cNvPr>
+          <p:cNvCxnSpPr>
+            <a:stCxn id="19" idx="2"/>
+            <a:endCxn id="21" idx="0"/>
+          </p:cNvCxnSpPr>
+          <p:nvPr/>
+        </p:nvCxnSpPr>
+        <p:spPr>
+          <a:xfrm flipH="1">
+            <a:off x="4182636" y="3855218"/>
+            <a:ext cx="2200085" cy="235472"/>
+          </a:xfrm>
+          <a:prstGeom prst="straightConnector1">
+            <a:avLst/>
+          </a:prstGeom>
+          <a:ln>
+            <a:tailEnd type="triangle"/>
+          </a:ln>
+        </p:spPr>
+        <p:style>
+          <a:lnRef idx="1">
+            <a:schemeClr val="accent1"/>
+          </a:lnRef>
+          <a:fillRef idx="0">
+            <a:schemeClr val="accent1"/>
+          </a:fillRef>
+          <a:effectRef idx="0">
+            <a:schemeClr val="accent1"/>
+          </a:effectRef>
+          <a:fontRef idx="minor">
+            <a:schemeClr val="tx1"/>
+          </a:fontRef>
+        </p:style>
+      </p:cxnSp>
+      <p:cxnSp>
+        <p:nvCxnSpPr>
+          <p:cNvPr id="32" name="Прямая со стрелкой 31">
+            <a:extLst>
+              <a:ext uri="{FF2B5EF4-FFF2-40B4-BE49-F238E27FC236}">
+                <a16:creationId xmlns:a16="http://schemas.microsoft.com/office/drawing/2014/main" id="{DF39FD4E-B52D-402E-AC55-383A0EF936AE}"/>
+              </a:ext>
+            </a:extLst>
+          </p:cNvPr>
+          <p:cNvCxnSpPr>
+            <a:stCxn id="19" idx="2"/>
+            <a:endCxn id="22" idx="0"/>
+          </p:cNvCxnSpPr>
+          <p:nvPr/>
+        </p:nvCxnSpPr>
+        <p:spPr>
+          <a:xfrm flipH="1">
+            <a:off x="6379289" y="3855218"/>
+            <a:ext cx="3432" cy="272821"/>
+          </a:xfrm>
+          <a:prstGeom prst="straightConnector1">
+            <a:avLst/>
+          </a:prstGeom>
+          <a:ln>
+            <a:tailEnd type="triangle"/>
+          </a:ln>
+        </p:spPr>
+        <p:style>
+          <a:lnRef idx="1">
+            <a:schemeClr val="accent1"/>
+          </a:lnRef>
+          <a:fillRef idx="0">
+            <a:schemeClr val="accent1"/>
+          </a:fillRef>
+          <a:effectRef idx="0">
+            <a:schemeClr val="accent1"/>
+          </a:effectRef>
+          <a:fontRef idx="minor">
+            <a:schemeClr val="tx1"/>
+          </a:fontRef>
+        </p:style>
+      </p:cxnSp>
+      <p:cxnSp>
+        <p:nvCxnSpPr>
+          <p:cNvPr id="34" name="Прямая со стрелкой 33">
+            <a:extLst>
+              <a:ext uri="{FF2B5EF4-FFF2-40B4-BE49-F238E27FC236}">
+                <a16:creationId xmlns:a16="http://schemas.microsoft.com/office/drawing/2014/main" id="{942DA4BD-794B-4898-A1AF-878C3A9F1A9B}"/>
+              </a:ext>
+            </a:extLst>
+          </p:cNvPr>
+          <p:cNvCxnSpPr>
+            <a:stCxn id="19" idx="2"/>
+            <a:endCxn id="23" idx="0"/>
+          </p:cNvCxnSpPr>
+          <p:nvPr/>
+        </p:nvCxnSpPr>
+        <p:spPr>
+          <a:xfrm>
+            <a:off x="6382721" y="3855218"/>
+            <a:ext cx="2193221" cy="242825"/>
+          </a:xfrm>
+          <a:prstGeom prst="straightConnector1">
+            <a:avLst/>
+          </a:prstGeom>
+          <a:ln>
+            <a:tailEnd type="triangle"/>
+          </a:ln>
+        </p:spPr>
+        <p:style>
+          <a:lnRef idx="1">
+            <a:schemeClr val="accent1"/>
+          </a:lnRef>
+          <a:fillRef idx="0">
+            <a:schemeClr val="accent1"/>
+          </a:fillRef>
+          <a:effectRef idx="0">
+            <a:schemeClr val="accent1"/>
+          </a:effectRef>
+          <a:fontRef idx="minor">
+            <a:schemeClr val="tx1"/>
+          </a:fontRef>
+        </p:style>
+      </p:cxnSp>
+      <p:cxnSp>
+        <p:nvCxnSpPr>
+          <p:cNvPr id="38" name="Прямая со стрелкой 37">
+            <a:extLst>
+              <a:ext uri="{FF2B5EF4-FFF2-40B4-BE49-F238E27FC236}">
+                <a16:creationId xmlns:a16="http://schemas.microsoft.com/office/drawing/2014/main" id="{9354E285-F8F5-4606-85E2-7F529CFEF4B5}"/>
+              </a:ext>
+            </a:extLst>
+          </p:cNvPr>
+          <p:cNvCxnSpPr>
+            <a:stCxn id="19" idx="3"/>
+            <a:endCxn id="24" idx="0"/>
+          </p:cNvCxnSpPr>
+          <p:nvPr/>
+        </p:nvCxnSpPr>
+        <p:spPr>
+          <a:xfrm>
+            <a:off x="8327613" y="3647127"/>
+            <a:ext cx="2489205" cy="458710"/>
+          </a:xfrm>
+          <a:prstGeom prst="straightConnector1">
+            <a:avLst/>
+          </a:prstGeom>
+          <a:ln>
+            <a:tailEnd type="triangle"/>
+          </a:ln>
+        </p:spPr>
+        <p:style>
+          <a:lnRef idx="1">
+            <a:schemeClr val="accent1"/>
+          </a:lnRef>
+          <a:fillRef idx="0">
+            <a:schemeClr val="accent1"/>
+          </a:fillRef>
+          <a:effectRef idx="0">
+            <a:schemeClr val="accent1"/>
+          </a:effectRef>
+          <a:fontRef idx="minor">
+            <a:schemeClr val="tx1"/>
+          </a:fontRef>
+        </p:style>
+      </p:cxnSp>
+      <p:sp>
+        <p:nvSpPr>
+          <p:cNvPr id="39" name="TextBox 38">
+            <a:extLst>
+              <a:ext uri="{FF2B5EF4-FFF2-40B4-BE49-F238E27FC236}">
+                <a16:creationId xmlns:a16="http://schemas.microsoft.com/office/drawing/2014/main" id="{8E1F860C-1A26-4FBD-BED1-01C68F449F62}"/>
+              </a:ext>
+            </a:extLst>
+          </p:cNvPr>
+          <p:cNvSpPr txBox="1"/>
+          <p:nvPr/>
+        </p:nvSpPr>
+        <p:spPr>
+          <a:xfrm>
+            <a:off x="430608" y="5192724"/>
+            <a:ext cx="4392110" cy="408623"/>
+          </a:xfrm>
+          <a:prstGeom prst="roundRect">
+            <a:avLst/>
+          </a:prstGeom>
+          <a:ln w="19050"/>
+        </p:spPr>
+        <p:style>
+          <a:lnRef idx="2">
+            <a:schemeClr val="accent1"/>
+          </a:lnRef>
+          <a:fillRef idx="1">
+            <a:schemeClr val="lt1"/>
+          </a:fillRef>
+          <a:effectRef idx="0">
+            <a:schemeClr val="accent1"/>
+          </a:effectRef>
+          <a:fontRef idx="minor">
+            <a:schemeClr val="dk1"/>
+          </a:fontRef>
+        </p:style>
+        <p:txBody>
+          <a:bodyPr wrap="square">
+            <a:spAutoFit/>
+          </a:bodyPr>
+          <a:lstStyle/>
+          <a:p>
+            <a:pPr algn="ctr"/>
+            <a:r>
+              <a:rPr lang="ru-RU" b="1" dirty="0">
+                <a:solidFill>
+                  <a:srgbClr val="005BAA"/>
+                </a:solidFill>
+                <a:latin typeface="Arial"/>
+              </a:rPr>
+              <a:t>Перспективы развития</a:t>
+            </a:r>
+            <a:endParaRPr lang="ru-RU" sz="1800" b="1" i="0" dirty="0">
+              <a:solidFill>
+                <a:srgbClr val="005BAA"/>
+              </a:solidFill>
+              <a:latin typeface="Arial"/>
+            </a:endParaRPr>
+          </a:p>
+        </p:txBody>
+      </p:sp>
+      <p:sp>
+        <p:nvSpPr>
+          <p:cNvPr id="40" name="Rounded Rectangle 18">
+            <a:extLst>
+              <a:ext uri="{FF2B5EF4-FFF2-40B4-BE49-F238E27FC236}">
+                <a16:creationId xmlns:a16="http://schemas.microsoft.com/office/drawing/2014/main" id="{C9883E86-544A-4B81-98F2-7767F635DC0C}"/>
+              </a:ext>
+            </a:extLst>
+          </p:cNvPr>
+          <p:cNvSpPr/>
+          <p:nvPr/>
+        </p:nvSpPr>
+        <p:spPr>
+          <a:xfrm>
+            <a:off x="906453" y="5794551"/>
+            <a:ext cx="1371003" cy="859439"/>
+          </a:xfrm>
+          <a:prstGeom prst="roundRect">
+            <a:avLst/>
+          </a:prstGeom>
+          <a:solidFill>
+            <a:srgbClr val="E7F3FD"/>
+          </a:solidFill>
+          <a:ln w="12700">
+            <a:solidFill>
+              <a:srgbClr val="00A3E0"/>
+            </a:solidFill>
+          </a:ln>
+        </p:spPr>
+        <p:style>
+          <a:lnRef idx="1">
+            <a:schemeClr val="accent1"/>
+          </a:lnRef>
+          <a:fillRef idx="3">
+            <a:schemeClr val="accent1"/>
+          </a:fillRef>
+          <a:effectRef idx="2">
+            <a:schemeClr val="accent1"/>
+          </a:effectRef>
+          <a:fontRef idx="minor">
+            <a:schemeClr val="lt1"/>
+          </a:fontRef>
+        </p:style>
+        <p:txBody>
+          <a:bodyPr wrap="square" lIns="128016" tIns="91440" rIns="109728" bIns="73152" rtlCol="0" anchor="ctr">
+            <a:normAutofit/>
+          </a:bodyPr>
+          <a:lstStyle/>
+          <a:p>
+            <a:pPr algn="ctr"/>
+            <a:r>
+              <a:rPr lang="ru-RU" sz="1400" dirty="0">
+                <a:solidFill>
+                  <a:srgbClr val="272D3A"/>
+                </a:solidFill>
+                <a:latin typeface="Arial"/>
+              </a:rPr>
+              <a:t>Построение маршрутов</a:t>
+            </a:r>
+            <a:endParaRPr sz="1400" dirty="0">
+              <a:solidFill>
+                <a:srgbClr val="272D3A"/>
+              </a:solidFill>
+              <a:latin typeface="Arial"/>
+            </a:endParaRPr>
+          </a:p>
+        </p:txBody>
+      </p:sp>
+      <p:sp>
+        <p:nvSpPr>
+          <p:cNvPr id="41" name="Rounded Rectangle 18">
+            <a:extLst>
+              <a:ext uri="{FF2B5EF4-FFF2-40B4-BE49-F238E27FC236}">
+                <a16:creationId xmlns:a16="http://schemas.microsoft.com/office/drawing/2014/main" id="{E51E3887-5871-4B9D-A4A6-4B45D8D337A0}"/>
+              </a:ext>
+            </a:extLst>
+          </p:cNvPr>
+          <p:cNvSpPr/>
+          <p:nvPr/>
+        </p:nvSpPr>
+        <p:spPr>
+          <a:xfrm>
+            <a:off x="2476947" y="5794554"/>
+            <a:ext cx="1371003" cy="859439"/>
+          </a:xfrm>
+          <a:prstGeom prst="roundRect">
+            <a:avLst/>
+          </a:prstGeom>
+          <a:solidFill>
+            <a:srgbClr val="E7F3FD"/>
+          </a:solidFill>
+          <a:ln w="12700">
+            <a:solidFill>
+              <a:srgbClr val="00A3E0"/>
+            </a:solidFill>
+          </a:ln>
+        </p:spPr>
+        <p:style>
+          <a:lnRef idx="1">
+            <a:schemeClr val="accent1"/>
+          </a:lnRef>
+          <a:fillRef idx="3">
+            <a:schemeClr val="accent1"/>
+          </a:fillRef>
+          <a:effectRef idx="2">
+            <a:schemeClr val="accent1"/>
+          </a:effectRef>
+          <a:fontRef idx="minor">
+            <a:schemeClr val="lt1"/>
+          </a:fontRef>
+        </p:style>
+        <p:txBody>
+          <a:bodyPr wrap="square" lIns="128016" tIns="91440" rIns="109728" bIns="73152" rtlCol="0" anchor="ctr">
+            <a:normAutofit/>
+          </a:bodyPr>
+          <a:lstStyle/>
+          <a:p>
+            <a:pPr algn="ctr"/>
+            <a:r>
+              <a:rPr lang="ru-RU" sz="1200" dirty="0">
+                <a:solidFill>
+                  <a:srgbClr val="272D3A"/>
+                </a:solidFill>
+                <a:latin typeface="Arial"/>
+              </a:rPr>
+              <a:t>Трассовое отслеживание</a:t>
+            </a:r>
+            <a:endParaRPr sz="1200" dirty="0">
+              <a:solidFill>
+                <a:srgbClr val="272D3A"/>
+              </a:solidFill>
+              <a:latin typeface="Arial"/>
+            </a:endParaRPr>
+          </a:p>
+        </p:txBody>
+      </p:sp>
+      <p:sp>
+        <p:nvSpPr>
+          <p:cNvPr id="42" name="Rounded Rectangle 18">
+            <a:extLst>
+              <a:ext uri="{FF2B5EF4-FFF2-40B4-BE49-F238E27FC236}">
+                <a16:creationId xmlns:a16="http://schemas.microsoft.com/office/drawing/2014/main" id="{3FF17AED-9C83-4686-A150-A785886B426E}"/>
+              </a:ext>
+            </a:extLst>
+          </p:cNvPr>
+          <p:cNvSpPr/>
+          <p:nvPr/>
+        </p:nvSpPr>
+        <p:spPr>
+          <a:xfrm>
+            <a:off x="4080741" y="5794553"/>
+            <a:ext cx="2075028" cy="859439"/>
+          </a:xfrm>
+          <a:prstGeom prst="roundRect">
+            <a:avLst/>
+          </a:prstGeom>
+          <a:solidFill>
+            <a:srgbClr val="E7F3FD"/>
+          </a:solidFill>
+          <a:ln w="12700">
+            <a:solidFill>
+              <a:srgbClr val="00A3E0"/>
+            </a:solidFill>
+          </a:ln>
+        </p:spPr>
+        <p:style>
+          <a:lnRef idx="1">
+            <a:schemeClr val="accent1"/>
+          </a:lnRef>
+          <a:fillRef idx="3">
+            <a:schemeClr val="accent1"/>
+          </a:fillRef>
+          <a:effectRef idx="2">
+            <a:schemeClr val="accent1"/>
+          </a:effectRef>
+          <a:fontRef idx="minor">
+            <a:schemeClr val="lt1"/>
+          </a:fontRef>
+        </p:style>
+        <p:txBody>
+          <a:bodyPr wrap="square" lIns="128016" tIns="91440" rIns="109728" bIns="73152" rtlCol="0" anchor="ctr">
+            <a:normAutofit lnSpcReduction="10000"/>
+          </a:bodyPr>
+          <a:lstStyle/>
+          <a:p>
+            <a:pPr algn="ctr"/>
+            <a:r>
+              <a:rPr lang="ru-RU" sz="1400" dirty="0">
+                <a:solidFill>
+                  <a:srgbClr val="272D3A"/>
+                </a:solidFill>
+                <a:latin typeface="Arial"/>
+              </a:rPr>
+              <a:t>Передача данных на оборудование (звонки, тахографы)</a:t>
+            </a:r>
+            <a:endParaRPr sz="1400" dirty="0">
+              <a:solidFill>
+                <a:srgbClr val="272D3A"/>
+              </a:solidFill>
+              <a:latin typeface="Arial"/>
+            </a:endParaRPr>
+          </a:p>
+        </p:txBody>
+      </p:sp>
+      <p:sp>
+        <p:nvSpPr>
+          <p:cNvPr id="43" name="Rounded Rectangle 18">
+            <a:extLst>
+              <a:ext uri="{FF2B5EF4-FFF2-40B4-BE49-F238E27FC236}">
+                <a16:creationId xmlns:a16="http://schemas.microsoft.com/office/drawing/2014/main" id="{4851C47E-44E6-4DE6-B9C5-480874A9579B}"/>
+              </a:ext>
+            </a:extLst>
+          </p:cNvPr>
+          <p:cNvSpPr/>
+          <p:nvPr/>
+        </p:nvSpPr>
+        <p:spPr>
+          <a:xfrm>
+            <a:off x="6365837" y="5794552"/>
+            <a:ext cx="1514139" cy="859439"/>
+          </a:xfrm>
+          <a:prstGeom prst="roundRect">
+            <a:avLst/>
+          </a:prstGeom>
+          <a:solidFill>
+            <a:srgbClr val="E7F3FD"/>
+          </a:solidFill>
+          <a:ln w="12700">
+            <a:solidFill>
+              <a:srgbClr val="00A3E0"/>
+            </a:solidFill>
+          </a:ln>
+        </p:spPr>
+        <p:style>
+          <a:lnRef idx="1">
+            <a:schemeClr val="accent1"/>
+          </a:lnRef>
+          <a:fillRef idx="3">
+            <a:schemeClr val="accent1"/>
+          </a:fillRef>
+          <a:effectRef idx="2">
+            <a:schemeClr val="accent1"/>
+          </a:effectRef>
+          <a:fontRef idx="minor">
+            <a:schemeClr val="lt1"/>
+          </a:fontRef>
+        </p:style>
+        <p:txBody>
+          <a:bodyPr wrap="square" lIns="128016" tIns="91440" rIns="109728" bIns="73152" rtlCol="0" anchor="ctr">
+            <a:normAutofit lnSpcReduction="10000"/>
+          </a:bodyPr>
+          <a:lstStyle/>
+          <a:p>
+            <a:pPr algn="ctr"/>
+            <a:r>
+              <a:rPr lang="ru-RU" sz="1400" dirty="0">
+                <a:solidFill>
+                  <a:srgbClr val="272D3A"/>
+                </a:solidFill>
+                <a:latin typeface="Arial"/>
+              </a:rPr>
+              <a:t>Учет транспортной работы</a:t>
+            </a:r>
+            <a:endParaRPr sz="1400" dirty="0">
+              <a:solidFill>
+                <a:srgbClr val="272D3A"/>
+              </a:solidFill>
+              <a:latin typeface="Arial"/>
+            </a:endParaRPr>
+          </a:p>
+        </p:txBody>
+      </p:sp>
+    </p:spTree>
+    <p:extLst>
+      <p:ext uri="{BB962C8B-B14F-4D97-AF65-F5344CB8AC3E}">
+        <p14:creationId xmlns:p14="http://schemas.microsoft.com/office/powerpoint/2010/main" val="3757779701"/>
+      </p:ext>
+    </p:extLst>
+  </p:cSld>
+  <p:clrMapOvr>
+    <a:masterClrMapping/>
+  </p:clrMapOvr>
+</p:sld>
+</file>
+
+<file path=ppt/slides/slide14.xml><?xml version="1.0" encoding="utf-8"?>
+<p:sld xmlns:a="http://schemas.openxmlformats.org/drawingml/2006/main" xmlns:r="http://schemas.openxmlformats.org/officeDocument/2006/relationships" xmlns:p="http://schemas.openxmlformats.org/presentationml/2006/main">
+  <p:cSld>
+    <p:spTree>
+      <p:nvGrpSpPr>
+        <p:cNvPr id="1" name=""/>
+        <p:cNvGrpSpPr/>
+        <p:nvPr/>
+      </p:nvGrpSpPr>
+      <p:grpSpPr>
+        <a:xfrm>
+          <a:off x="0" y="0"/>
+          <a:ext cx="0" cy="0"/>
+          <a:chOff x="0" y="0"/>
+          <a:chExt cx="0" cy="0"/>
+        </a:xfrm>
+      </p:grpSpPr>
+      <p:sp>
+        <p:nvSpPr>
           <p:cNvPr id="2" name="Текст 1">
             <a:extLst>
               <a:ext uri="{FF2B5EF4-FFF2-40B4-BE49-F238E27FC236}">
@@ -8582,6 +8822,318 @@
               <a:rPr lang="ru-RU" sz="4800" dirty="0"/>
               <a:t>Спасибо за внимание!</a:t>
             </a:r>
+          </a:p>
+        </p:txBody>
+      </p:sp>
+      <p:sp>
+        <p:nvSpPr>
+          <p:cNvPr id="4" name="Текст 2">
+            <a:extLst>
+              <a:ext uri="{FF2B5EF4-FFF2-40B4-BE49-F238E27FC236}">
+                <a16:creationId xmlns:a16="http://schemas.microsoft.com/office/drawing/2014/main" id="{DB9E92ED-35AE-4EDF-9915-68D689B9F573}"/>
+              </a:ext>
+            </a:extLst>
+          </p:cNvPr>
+          <p:cNvSpPr txBox="1">
+            <a:spLocks/>
+          </p:cNvSpPr>
+          <p:nvPr/>
+        </p:nvSpPr>
+        <p:spPr>
+          <a:xfrm>
+            <a:off x="4967416" y="4273095"/>
+            <a:ext cx="6330950" cy="841155"/>
+          </a:xfrm>
+          <a:prstGeom prst="rect">
+            <a:avLst/>
+          </a:prstGeom>
+        </p:spPr>
+        <p:txBody>
+          <a:bodyPr vert="horz" lIns="0" tIns="0" rIns="0" bIns="0" rtlCol="0">
+            <a:normAutofit/>
+          </a:bodyPr>
+          <a:lstStyle>
+            <a:lvl1pPr marL="0" indent="0" algn="l" defTabSz="914400" rtl="0" eaLnBrk="1" latinLnBrk="0" hangingPunct="1">
+              <a:lnSpc>
+                <a:spcPct val="100000"/>
+              </a:lnSpc>
+              <a:spcBef>
+                <a:spcPts val="0"/>
+              </a:spcBef>
+              <a:buFont typeface="Arial" panose="020B0604020202020204" pitchFamily="34" charset="0"/>
+              <a:buNone/>
+              <a:defRPr sz="1800" kern="1200">
+                <a:solidFill>
+                  <a:schemeClr val="tx1"/>
+                </a:solidFill>
+                <a:latin typeface="+mn-lt"/>
+                <a:ea typeface="+mn-ea"/>
+                <a:cs typeface="+mn-cs"/>
+              </a:defRPr>
+            </a:lvl1pPr>
+            <a:lvl2pPr marL="0" indent="0" algn="r" defTabSz="914400" rtl="0" eaLnBrk="1" latinLnBrk="0" hangingPunct="1">
+              <a:lnSpc>
+                <a:spcPct val="100000"/>
+              </a:lnSpc>
+              <a:spcBef>
+                <a:spcPts val="500"/>
+              </a:spcBef>
+              <a:buFont typeface="Arial" panose="020B0604020202020204" pitchFamily="34" charset="0"/>
+              <a:buNone/>
+              <a:defRPr sz="3200" kern="1200">
+                <a:solidFill>
+                  <a:schemeClr val="accent2"/>
+                </a:solidFill>
+                <a:latin typeface="+mn-lt"/>
+                <a:ea typeface="+mn-ea"/>
+                <a:cs typeface="+mn-cs"/>
+              </a:defRPr>
+            </a:lvl2pPr>
+            <a:lvl3pPr marL="914400" indent="0" algn="l" defTabSz="914400" rtl="0" eaLnBrk="1" latinLnBrk="0" hangingPunct="1">
+              <a:lnSpc>
+                <a:spcPct val="90000"/>
+              </a:lnSpc>
+              <a:spcBef>
+                <a:spcPts val="500"/>
+              </a:spcBef>
+              <a:buFont typeface="Arial" panose="020B0604020202020204" pitchFamily="34" charset="0"/>
+              <a:buNone/>
+              <a:defRPr sz="2000" kern="1200">
+                <a:solidFill>
+                  <a:schemeClr val="tx1"/>
+                </a:solidFill>
+                <a:latin typeface="+mn-lt"/>
+                <a:ea typeface="+mn-ea"/>
+                <a:cs typeface="+mn-cs"/>
+              </a:defRPr>
+            </a:lvl3pPr>
+            <a:lvl4pPr marL="1600200" indent="-228600" algn="l" defTabSz="914400" rtl="0" eaLnBrk="1" latinLnBrk="0" hangingPunct="1">
+              <a:lnSpc>
+                <a:spcPct val="90000"/>
+              </a:lnSpc>
+              <a:spcBef>
+                <a:spcPts val="500"/>
+              </a:spcBef>
+              <a:buFont typeface="Arial" panose="020B0604020202020204" pitchFamily="34" charset="0"/>
+              <a:buChar char="•"/>
+              <a:defRPr sz="1800" kern="1200">
+                <a:solidFill>
+                  <a:schemeClr val="tx1"/>
+                </a:solidFill>
+                <a:latin typeface="+mn-lt"/>
+                <a:ea typeface="+mn-ea"/>
+                <a:cs typeface="+mn-cs"/>
+              </a:defRPr>
+            </a:lvl4pPr>
+            <a:lvl5pPr marL="2057400" indent="-228600" algn="l" defTabSz="914400" rtl="0" eaLnBrk="1" latinLnBrk="0" hangingPunct="1">
+              <a:lnSpc>
+                <a:spcPct val="90000"/>
+              </a:lnSpc>
+              <a:spcBef>
+                <a:spcPts val="500"/>
+              </a:spcBef>
+              <a:buFont typeface="Arial" panose="020B0604020202020204" pitchFamily="34" charset="0"/>
+              <a:buChar char="•"/>
+              <a:defRPr sz="1800" kern="1200">
+                <a:solidFill>
+                  <a:schemeClr val="tx1"/>
+                </a:solidFill>
+                <a:latin typeface="+mn-lt"/>
+                <a:ea typeface="+mn-ea"/>
+                <a:cs typeface="+mn-cs"/>
+              </a:defRPr>
+            </a:lvl5pPr>
+            <a:lvl6pPr marL="2514600" indent="-228600" algn="l" defTabSz="914400" rtl="0" eaLnBrk="1" latinLnBrk="0" hangingPunct="1">
+              <a:lnSpc>
+                <a:spcPct val="90000"/>
+              </a:lnSpc>
+              <a:spcBef>
+                <a:spcPts val="500"/>
+              </a:spcBef>
+              <a:buFont typeface="Arial" panose="020B0604020202020204" pitchFamily="34" charset="0"/>
+              <a:buChar char="•"/>
+              <a:defRPr sz="1800" kern="1200">
+                <a:solidFill>
+                  <a:schemeClr val="tx1"/>
+                </a:solidFill>
+                <a:latin typeface="+mn-lt"/>
+                <a:ea typeface="+mn-ea"/>
+                <a:cs typeface="+mn-cs"/>
+              </a:defRPr>
+            </a:lvl6pPr>
+            <a:lvl7pPr marL="2971800" indent="-228600" algn="l" defTabSz="914400" rtl="0" eaLnBrk="1" latinLnBrk="0" hangingPunct="1">
+              <a:lnSpc>
+                <a:spcPct val="90000"/>
+              </a:lnSpc>
+              <a:spcBef>
+                <a:spcPts val="500"/>
+              </a:spcBef>
+              <a:buFont typeface="Arial" panose="020B0604020202020204" pitchFamily="34" charset="0"/>
+              <a:buChar char="•"/>
+              <a:defRPr sz="1800" kern="1200">
+                <a:solidFill>
+                  <a:schemeClr val="tx1"/>
+                </a:solidFill>
+                <a:latin typeface="+mn-lt"/>
+                <a:ea typeface="+mn-ea"/>
+                <a:cs typeface="+mn-cs"/>
+              </a:defRPr>
+            </a:lvl7pPr>
+            <a:lvl8pPr marL="3429000" indent="-228600" algn="l" defTabSz="914400" rtl="0" eaLnBrk="1" latinLnBrk="0" hangingPunct="1">
+              <a:lnSpc>
+                <a:spcPct val="90000"/>
+              </a:lnSpc>
+              <a:spcBef>
+                <a:spcPts val="500"/>
+              </a:spcBef>
+              <a:buFont typeface="Arial" panose="020B0604020202020204" pitchFamily="34" charset="0"/>
+              <a:buChar char="•"/>
+              <a:defRPr sz="1800" kern="1200">
+                <a:solidFill>
+                  <a:schemeClr val="tx1"/>
+                </a:solidFill>
+                <a:latin typeface="+mn-lt"/>
+                <a:ea typeface="+mn-ea"/>
+                <a:cs typeface="+mn-cs"/>
+              </a:defRPr>
+            </a:lvl8pPr>
+            <a:lvl9pPr marL="3886200" indent="-228600" algn="l" defTabSz="914400" rtl="0" eaLnBrk="1" latinLnBrk="0" hangingPunct="1">
+              <a:lnSpc>
+                <a:spcPct val="90000"/>
+              </a:lnSpc>
+              <a:spcBef>
+                <a:spcPts val="500"/>
+              </a:spcBef>
+              <a:buFont typeface="Arial" panose="020B0604020202020204" pitchFamily="34" charset="0"/>
+              <a:buChar char="•"/>
+              <a:defRPr sz="1800" kern="1200">
+                <a:solidFill>
+                  <a:schemeClr val="tx1"/>
+                </a:solidFill>
+                <a:latin typeface="+mn-lt"/>
+                <a:ea typeface="+mn-ea"/>
+                <a:cs typeface="+mn-cs"/>
+              </a:defRPr>
+            </a:lvl9pPr>
+          </a:lstStyle>
+          <a:p>
+            <a:pPr marL="0" marR="0" lvl="0" indent="0" algn="r" defTabSz="914400" rtl="0" eaLnBrk="1" fontAlgn="auto" latinLnBrk="0" hangingPunct="1">
+              <a:lnSpc>
+                <a:spcPct val="100000"/>
+              </a:lnSpc>
+              <a:spcBef>
+                <a:spcPts val="0"/>
+              </a:spcBef>
+              <a:spcAft>
+                <a:spcPts val="0"/>
+              </a:spcAft>
+              <a:buClrTx/>
+              <a:buSzTx/>
+              <a:buFont typeface="Arial" panose="020B0604020202020204" pitchFamily="34" charset="0"/>
+              <a:buNone/>
+              <a:tabLst/>
+              <a:defRPr/>
+            </a:pPr>
+            <a:r>
+              <a:rPr kumimoji="0" lang="ru-RU" sz="1800" b="0" i="0" u="none" strike="noStrike" kern="1200" cap="none" spc="0" normalizeH="0" baseline="0" noProof="0">
+                <a:ln>
+                  <a:noFill/>
+                </a:ln>
+                <a:solidFill>
+                  <a:srgbClr val="242834"/>
+                </a:solidFill>
+                <a:effectLst/>
+                <a:uLnTx/>
+                <a:uFillTx/>
+                <a:latin typeface="Arial"/>
+                <a:ea typeface="+mn-ea"/>
+                <a:cs typeface="+mn-cs"/>
+              </a:rPr>
+              <a:t>Быстров М.Д., 4131з</a:t>
+            </a:r>
+          </a:p>
+          <a:p>
+            <a:pPr marL="0" marR="0" lvl="0" indent="0" algn="r" defTabSz="914400" rtl="0" eaLnBrk="1" fontAlgn="auto" latinLnBrk="0" hangingPunct="1">
+              <a:lnSpc>
+                <a:spcPct val="100000"/>
+              </a:lnSpc>
+              <a:spcBef>
+                <a:spcPts val="0"/>
+              </a:spcBef>
+              <a:spcAft>
+                <a:spcPts val="0"/>
+              </a:spcAft>
+              <a:buClrTx/>
+              <a:buSzTx/>
+              <a:buFont typeface="Arial" panose="020B0604020202020204" pitchFamily="34" charset="0"/>
+              <a:buNone/>
+              <a:tabLst/>
+              <a:defRPr/>
+            </a:pPr>
+            <a:endParaRPr kumimoji="0" lang="ru-RU" sz="1800" b="0" i="0" u="none" strike="noStrike" kern="1200" cap="none" spc="0" normalizeH="0" baseline="0" noProof="0">
+              <a:ln>
+                <a:noFill/>
+              </a:ln>
+              <a:solidFill>
+                <a:srgbClr val="242834"/>
+              </a:solidFill>
+              <a:effectLst/>
+              <a:uLnTx/>
+              <a:uFillTx/>
+              <a:latin typeface="Arial"/>
+              <a:ea typeface="+mn-ea"/>
+              <a:cs typeface="+mn-cs"/>
+            </a:endParaRPr>
+          </a:p>
+          <a:p>
+            <a:pPr marL="0" marR="0" lvl="0" indent="0" algn="r" defTabSz="914400" rtl="0" eaLnBrk="1" fontAlgn="auto" latinLnBrk="0" hangingPunct="1">
+              <a:lnSpc>
+                <a:spcPct val="100000"/>
+              </a:lnSpc>
+              <a:spcBef>
+                <a:spcPts val="0"/>
+              </a:spcBef>
+              <a:spcAft>
+                <a:spcPts val="0"/>
+              </a:spcAft>
+              <a:buClrTx/>
+              <a:buSzTx/>
+              <a:buFont typeface="Arial" panose="020B0604020202020204" pitchFamily="34" charset="0"/>
+              <a:buNone/>
+              <a:tabLst/>
+              <a:defRPr/>
+            </a:pPr>
+            <a:r>
+              <a:rPr kumimoji="0" lang="ru-RU" sz="1800" b="0" i="0" u="none" strike="noStrike" kern="1200" cap="none" spc="0" normalizeH="0" baseline="0" noProof="0">
+                <a:ln>
+                  <a:noFill/>
+                </a:ln>
+                <a:solidFill>
+                  <a:srgbClr val="272D3A"/>
+                </a:solidFill>
+                <a:effectLst/>
+                <a:uLnTx/>
+                <a:uFillTx/>
+                <a:latin typeface="Arial"/>
+                <a:ea typeface="+mn-ea"/>
+                <a:cs typeface="+mn-cs"/>
+              </a:rPr>
+              <a:t>Фомин А.В., к.т.н., доц.</a:t>
+            </a:r>
+            <a:endParaRPr kumimoji="0" lang="ru-RU" sz="1800" b="0" i="0" u="none" strike="noStrike" kern="1200" cap="none" spc="0" normalizeH="0" baseline="0" noProof="0" dirty="0">
+              <a:ln>
+                <a:noFill/>
+              </a:ln>
+              <a:solidFill>
+                <a:srgbClr val="242834"/>
+              </a:solidFill>
+              <a:effectLst/>
+              <a:uLnTx/>
+              <a:uFillTx/>
+              <a:latin typeface="Arial"/>
+              <a:ea typeface="+mn-ea"/>
+              <a:cs typeface="+mn-cs"/>
+            </a:endParaRPr>
           </a:p>
         </p:txBody>
       </p:sp>
@@ -12522,36 +13074,6 @@
           <a:chExt cx="0" cy="0"/>
         </a:xfrm>
       </p:grpSpPr>
-      <p:pic>
-        <p:nvPicPr>
-          <p:cNvPr id="2" name="Рисунок 1">
-            <a:extLst>
-              <a:ext uri="{FF2B5EF4-FFF2-40B4-BE49-F238E27FC236}">
-                <a16:creationId xmlns:a16="http://schemas.microsoft.com/office/drawing/2014/main" id="{3BB61CC1-5242-4B73-98B7-EFA4D20771BF}"/>
-              </a:ext>
-            </a:extLst>
-          </p:cNvPr>
-          <p:cNvPicPr>
-            <a:picLocks noChangeAspect="1"/>
-          </p:cNvPicPr>
-          <p:nvPr/>
-        </p:nvPicPr>
-        <p:blipFill>
-          <a:blip r:embed="rId3"/>
-          <a:stretch>
-            <a:fillRect/>
-          </a:stretch>
-        </p:blipFill>
-        <p:spPr>
-          <a:xfrm>
-            <a:off x="3343836" y="1126404"/>
-            <a:ext cx="8211670" cy="5731595"/>
-          </a:xfrm>
-          <a:prstGeom prst="rect">
-            <a:avLst/>
-          </a:prstGeom>
-        </p:spPr>
-      </p:pic>
       <p:sp>
         <p:nvSpPr>
           <p:cNvPr id="9" name="Заголовок 8">
@@ -12608,22 +13130,40 @@
           </a:bodyPr>
           <a:lstStyle/>
           <a:p>
-            <a:pPr algn="l"/>
-            <a:r>
-              <a:rPr lang="ru-RU" b="1" dirty="0">
+            <a:pPr marL="0" marR="0" lvl="0" indent="0" algn="l" defTabSz="914400" rtl="0" eaLnBrk="1" fontAlgn="auto" latinLnBrk="0" hangingPunct="1">
+              <a:lnSpc>
+                <a:spcPct val="100000"/>
+              </a:lnSpc>
+              <a:spcBef>
+                <a:spcPts val="0"/>
+              </a:spcBef>
+              <a:spcAft>
+                <a:spcPts val="0"/>
+              </a:spcAft>
+              <a:buClrTx/>
+              <a:buSzTx/>
+              <a:buFontTx/>
+              <a:buNone/>
+              <a:tabLst/>
+              <a:defRPr/>
+            </a:pPr>
+            <a:r>
+              <a:rPr kumimoji="0" lang="ru-RU" sz="1800" b="1" i="0" u="none" strike="noStrike" kern="1200" cap="none" spc="0" normalizeH="0" baseline="0" noProof="0" dirty="0">
+                <a:ln>
+                  <a:noFill/>
+                </a:ln>
                 <a:solidFill>
                   <a:srgbClr val="005BAA"/>
                 </a:solidFill>
-                <a:latin typeface="Arial"/>
+                <a:effectLst/>
+                <a:uLnTx/>
+                <a:uFillTx/>
+                <a:latin typeface="Arial"/>
+                <a:ea typeface="+mn-ea"/>
+                <a:cs typeface="+mn-cs"/>
               </a:rPr>
               <a:t>Взаимодействие компонентов</a:t>
             </a:r>
-            <a:endParaRPr lang="ru-RU" sz="1800" b="1" i="0" dirty="0">
-              <a:solidFill>
-                <a:srgbClr val="005BAA"/>
-              </a:solidFill>
-              <a:latin typeface="Arial"/>
-            </a:endParaRPr>
           </a:p>
         </p:txBody>
       </p:sp>
@@ -12676,158 +13216,2305 @@
           </a:bodyPr>
           <a:lstStyle/>
           <a:p>
-            <a:pPr algn="l"/>
-            <a:r>
-              <a:rPr lang="ru-RU" sz="2000" dirty="0">
+            <a:pPr marL="0" marR="0" lvl="0" indent="0" algn="l" defTabSz="914400" rtl="0" eaLnBrk="1" fontAlgn="auto" latinLnBrk="0" hangingPunct="1">
+              <a:lnSpc>
+                <a:spcPct val="100000"/>
+              </a:lnSpc>
+              <a:spcBef>
+                <a:spcPts val="0"/>
+              </a:spcBef>
+              <a:spcAft>
+                <a:spcPts val="0"/>
+              </a:spcAft>
+              <a:buClrTx/>
+              <a:buSzTx/>
+              <a:buFontTx/>
+              <a:buNone/>
+              <a:tabLst/>
+              <a:defRPr/>
+            </a:pPr>
+            <a:r>
+              <a:rPr kumimoji="0" lang="ru-RU" sz="2000" b="0" i="0" u="none" strike="noStrike" kern="1200" cap="none" spc="0" normalizeH="0" baseline="0" noProof="0" dirty="0">
+                <a:ln>
+                  <a:noFill/>
+                </a:ln>
                 <a:solidFill>
                   <a:srgbClr val="272D3A"/>
                 </a:solidFill>
-                <a:latin typeface="Arial"/>
+                <a:effectLst/>
+                <a:uLnTx/>
+                <a:uFillTx/>
+                <a:latin typeface="Arial"/>
+                <a:ea typeface="+mn-ea"/>
+                <a:cs typeface="+mn-cs"/>
               </a:rPr>
               <a:t>Решение – </a:t>
             </a:r>
             <a:r>
-              <a:rPr lang="ru-RU" sz="2000" dirty="0" err="1">
+              <a:rPr kumimoji="0" lang="ru-RU" sz="2000" b="0" i="0" u="none" strike="noStrike" kern="1200" cap="none" spc="0" normalizeH="0" baseline="0" noProof="0" dirty="0" err="1">
+                <a:ln>
+                  <a:noFill/>
+                </a:ln>
                 <a:solidFill>
                   <a:srgbClr val="272D3A"/>
                 </a:solidFill>
-                <a:latin typeface="Arial"/>
+                <a:effectLst/>
+                <a:uLnTx/>
+                <a:uFillTx/>
+                <a:latin typeface="Arial"/>
+                <a:ea typeface="+mn-ea"/>
+                <a:cs typeface="+mn-cs"/>
               </a:rPr>
               <a:t>микросервисная</a:t>
             </a:r>
             <a:r>
-              <a:rPr lang="ru-RU" sz="2000" dirty="0">
+              <a:rPr kumimoji="0" lang="ru-RU" sz="2000" b="0" i="0" u="none" strike="noStrike" kern="1200" cap="none" spc="0" normalizeH="0" baseline="0" noProof="0" dirty="0">
+                <a:ln>
+                  <a:noFill/>
+                </a:ln>
                 <a:solidFill>
                   <a:srgbClr val="272D3A"/>
                 </a:solidFill>
-                <a:latin typeface="Arial"/>
+                <a:effectLst/>
+                <a:uLnTx/>
+                <a:uFillTx/>
+                <a:latin typeface="Arial"/>
+                <a:ea typeface="+mn-ea"/>
+                <a:cs typeface="+mn-cs"/>
               </a:rPr>
               <a:t> система</a:t>
             </a:r>
           </a:p>
           <a:p>
-            <a:pPr algn="l"/>
-            <a:endParaRPr lang="en-US" sz="2000" dirty="0">
+            <a:pPr marL="0" marR="0" lvl="0" indent="0" algn="l" defTabSz="914400" rtl="0" eaLnBrk="1" fontAlgn="auto" latinLnBrk="0" hangingPunct="1">
+              <a:lnSpc>
+                <a:spcPct val="100000"/>
+              </a:lnSpc>
+              <a:spcBef>
+                <a:spcPts val="0"/>
+              </a:spcBef>
+              <a:spcAft>
+                <a:spcPts val="0"/>
+              </a:spcAft>
+              <a:buClrTx/>
+              <a:buSzTx/>
+              <a:buFontTx/>
+              <a:buNone/>
+              <a:tabLst/>
+              <a:defRPr/>
+            </a:pPr>
+            <a:endParaRPr kumimoji="0" lang="en-US" sz="2000" b="0" i="0" u="none" strike="noStrike" kern="1200" cap="none" spc="0" normalizeH="0" baseline="0" noProof="0" dirty="0">
+              <a:ln>
+                <a:noFill/>
+              </a:ln>
               <a:solidFill>
                 <a:srgbClr val="272D3A"/>
               </a:solidFill>
+              <a:effectLst/>
+              <a:uLnTx/>
+              <a:uFillTx/>
               <a:latin typeface="Arial"/>
+              <a:ea typeface="+mn-ea"/>
+              <a:cs typeface="+mn-cs"/>
             </a:endParaRPr>
           </a:p>
           <a:p>
-            <a:pPr algn="l"/>
-            <a:r>
-              <a:rPr lang="ru-RU" sz="2000" dirty="0">
+            <a:pPr marL="0" marR="0" lvl="0" indent="0" algn="l" defTabSz="914400" rtl="0" eaLnBrk="1" fontAlgn="auto" latinLnBrk="0" hangingPunct="1">
+              <a:lnSpc>
+                <a:spcPct val="100000"/>
+              </a:lnSpc>
+              <a:spcBef>
+                <a:spcPts val="0"/>
+              </a:spcBef>
+              <a:spcAft>
+                <a:spcPts val="0"/>
+              </a:spcAft>
+              <a:buClrTx/>
+              <a:buSzTx/>
+              <a:buFontTx/>
+              <a:buNone/>
+              <a:tabLst/>
+              <a:defRPr/>
+            </a:pPr>
+            <a:r>
+              <a:rPr kumimoji="0" lang="ru-RU" sz="2000" b="0" i="0" u="none" strike="noStrike" kern="1200" cap="none" spc="0" normalizeH="0" baseline="0" noProof="0" dirty="0">
+                <a:ln>
+                  <a:noFill/>
+                </a:ln>
                 <a:solidFill>
                   <a:srgbClr val="272D3A"/>
                 </a:solidFill>
-                <a:latin typeface="Arial"/>
+                <a:effectLst/>
+                <a:uLnTx/>
+                <a:uFillTx/>
+                <a:latin typeface="Arial"/>
+                <a:ea typeface="+mn-ea"/>
+                <a:cs typeface="+mn-cs"/>
               </a:rPr>
               <a:t>Поток телеметрии:</a:t>
             </a:r>
           </a:p>
           <a:p>
-            <a:pPr algn="l"/>
-            <a:r>
-              <a:rPr lang="ru-RU" sz="2000" dirty="0">
+            <a:pPr marL="0" marR="0" lvl="0" indent="0" algn="l" defTabSz="914400" rtl="0" eaLnBrk="1" fontAlgn="auto" latinLnBrk="0" hangingPunct="1">
+              <a:lnSpc>
+                <a:spcPct val="100000"/>
+              </a:lnSpc>
+              <a:spcBef>
+                <a:spcPts val="0"/>
+              </a:spcBef>
+              <a:spcAft>
+                <a:spcPts val="0"/>
+              </a:spcAft>
+              <a:buClrTx/>
+              <a:buSzTx/>
+              <a:buFontTx/>
+              <a:buNone/>
+              <a:tabLst/>
+              <a:defRPr/>
+            </a:pPr>
+            <a:r>
+              <a:rPr kumimoji="0" lang="ru-RU" sz="2000" b="0" i="0" u="none" strike="noStrike" kern="1200" cap="none" spc="0" normalizeH="0" baseline="0" noProof="0" dirty="0">
+                <a:ln>
+                  <a:noFill/>
+                </a:ln>
                 <a:solidFill>
                   <a:srgbClr val="272D3A"/>
                 </a:solidFill>
-                <a:latin typeface="Arial"/>
+                <a:effectLst/>
+                <a:uLnTx/>
+                <a:uFillTx/>
+                <a:latin typeface="Arial"/>
+                <a:ea typeface="+mn-ea"/>
+                <a:cs typeface="+mn-cs"/>
               </a:rPr>
               <a:t>1 .Приемник данных</a:t>
             </a:r>
           </a:p>
           <a:p>
-            <a:pPr algn="l"/>
-            <a:r>
-              <a:rPr lang="ru-RU" sz="2000" dirty="0">
+            <a:pPr marL="0" marR="0" lvl="0" indent="0" algn="l" defTabSz="914400" rtl="0" eaLnBrk="1" fontAlgn="auto" latinLnBrk="0" hangingPunct="1">
+              <a:lnSpc>
+                <a:spcPct val="100000"/>
+              </a:lnSpc>
+              <a:spcBef>
+                <a:spcPts val="0"/>
+              </a:spcBef>
+              <a:spcAft>
+                <a:spcPts val="0"/>
+              </a:spcAft>
+              <a:buClrTx/>
+              <a:buSzTx/>
+              <a:buFontTx/>
+              <a:buNone/>
+              <a:tabLst/>
+              <a:defRPr/>
+            </a:pPr>
+            <a:r>
+              <a:rPr kumimoji="0" lang="ru-RU" sz="2000" b="0" i="0" u="none" strike="noStrike" kern="1200" cap="none" spc="0" normalizeH="0" baseline="0" noProof="0" dirty="0">
+                <a:ln>
+                  <a:noFill/>
+                </a:ln>
                 <a:solidFill>
                   <a:srgbClr val="272D3A"/>
                 </a:solidFill>
-                <a:latin typeface="Arial"/>
+                <a:effectLst/>
+                <a:uLnTx/>
+                <a:uFillTx/>
+                <a:latin typeface="Arial"/>
+                <a:ea typeface="+mn-ea"/>
+                <a:cs typeface="+mn-cs"/>
               </a:rPr>
               <a:t>2. Брокер сообщений</a:t>
             </a:r>
             <a:r>
-              <a:rPr lang="en-US" sz="2000" dirty="0">
+              <a:rPr kumimoji="0" lang="en-US" sz="2000" b="0" i="0" u="none" strike="noStrike" kern="1200" cap="none" spc="0" normalizeH="0" baseline="0" noProof="0" dirty="0">
+                <a:ln>
+                  <a:noFill/>
+                </a:ln>
                 <a:solidFill>
                   <a:srgbClr val="272D3A"/>
                 </a:solidFill>
-                <a:latin typeface="Arial"/>
+                <a:effectLst/>
+                <a:uLnTx/>
+                <a:uFillTx/>
+                <a:latin typeface="Arial"/>
+                <a:ea typeface="+mn-ea"/>
+                <a:cs typeface="+mn-cs"/>
               </a:rPr>
               <a:t> </a:t>
             </a:r>
-            <a:endParaRPr lang="ru-RU" sz="2000" dirty="0">
+            <a:endParaRPr kumimoji="0" lang="ru-RU" sz="2000" b="0" i="0" u="none" strike="noStrike" kern="1200" cap="none" spc="0" normalizeH="0" baseline="0" noProof="0" dirty="0">
+              <a:ln>
+                <a:noFill/>
+              </a:ln>
               <a:solidFill>
                 <a:srgbClr val="272D3A"/>
               </a:solidFill>
+              <a:effectLst/>
+              <a:uLnTx/>
+              <a:uFillTx/>
               <a:latin typeface="Arial"/>
+              <a:ea typeface="+mn-ea"/>
+              <a:cs typeface="+mn-cs"/>
             </a:endParaRPr>
           </a:p>
           <a:p>
-            <a:pPr algn="l"/>
-            <a:r>
-              <a:rPr lang="ru-RU" sz="2000" dirty="0">
+            <a:pPr marL="0" marR="0" lvl="0" indent="0" algn="l" defTabSz="914400" rtl="0" eaLnBrk="1" fontAlgn="auto" latinLnBrk="0" hangingPunct="1">
+              <a:lnSpc>
+                <a:spcPct val="100000"/>
+              </a:lnSpc>
+              <a:spcBef>
+                <a:spcPts val="0"/>
+              </a:spcBef>
+              <a:spcAft>
+                <a:spcPts val="0"/>
+              </a:spcAft>
+              <a:buClrTx/>
+              <a:buSzTx/>
+              <a:buFontTx/>
+              <a:buNone/>
+              <a:tabLst/>
+              <a:defRPr/>
+            </a:pPr>
+            <a:r>
+              <a:rPr kumimoji="0" lang="ru-RU" sz="2000" b="0" i="0" u="none" strike="noStrike" kern="1200" cap="none" spc="0" normalizeH="0" baseline="0" noProof="0" dirty="0">
+                <a:ln>
+                  <a:noFill/>
+                </a:ln>
                 <a:solidFill>
                   <a:srgbClr val="272D3A"/>
                 </a:solidFill>
-                <a:latin typeface="Arial"/>
+                <a:effectLst/>
+                <a:uLnTx/>
+                <a:uFillTx/>
+                <a:latin typeface="Arial"/>
+                <a:ea typeface="+mn-ea"/>
+                <a:cs typeface="+mn-cs"/>
               </a:rPr>
               <a:t>3. Потребители</a:t>
             </a:r>
           </a:p>
           <a:p>
-            <a:pPr algn="l"/>
-            <a:endParaRPr lang="ru-RU" sz="2000" dirty="0">
+            <a:pPr marL="0" marR="0" lvl="0" indent="0" algn="l" defTabSz="914400" rtl="0" eaLnBrk="1" fontAlgn="auto" latinLnBrk="0" hangingPunct="1">
+              <a:lnSpc>
+                <a:spcPct val="100000"/>
+              </a:lnSpc>
+              <a:spcBef>
+                <a:spcPts val="0"/>
+              </a:spcBef>
+              <a:spcAft>
+                <a:spcPts val="0"/>
+              </a:spcAft>
+              <a:buClrTx/>
+              <a:buSzTx/>
+              <a:buFontTx/>
+              <a:buNone/>
+              <a:tabLst/>
+              <a:defRPr/>
+            </a:pPr>
+            <a:endParaRPr kumimoji="0" lang="ru-RU" sz="2000" b="0" i="0" u="none" strike="noStrike" kern="1200" cap="none" spc="0" normalizeH="0" baseline="0" noProof="0" dirty="0">
+              <a:ln>
+                <a:noFill/>
+              </a:ln>
               <a:solidFill>
                 <a:srgbClr val="272D3A"/>
               </a:solidFill>
+              <a:effectLst/>
+              <a:uLnTx/>
+              <a:uFillTx/>
               <a:latin typeface="Arial"/>
+              <a:ea typeface="+mn-ea"/>
+              <a:cs typeface="+mn-cs"/>
             </a:endParaRPr>
           </a:p>
           <a:p>
-            <a:pPr algn="l"/>
-            <a:r>
-              <a:rPr lang="ru-RU" sz="2000" dirty="0">
+            <a:pPr marL="0" marR="0" lvl="0" indent="0" algn="l" defTabSz="914400" rtl="0" eaLnBrk="1" fontAlgn="auto" latinLnBrk="0" hangingPunct="1">
+              <a:lnSpc>
+                <a:spcPct val="100000"/>
+              </a:lnSpc>
+              <a:spcBef>
+                <a:spcPts val="0"/>
+              </a:spcBef>
+              <a:spcAft>
+                <a:spcPts val="0"/>
+              </a:spcAft>
+              <a:buClrTx/>
+              <a:buSzTx/>
+              <a:buFontTx/>
+              <a:buNone/>
+              <a:tabLst/>
+              <a:defRPr/>
+            </a:pPr>
+            <a:r>
+              <a:rPr kumimoji="0" lang="ru-RU" sz="2000" b="0" i="0" u="none" strike="noStrike" kern="1200" cap="none" spc="0" normalizeH="0" baseline="0" noProof="0" dirty="0">
+                <a:ln>
+                  <a:noFill/>
+                </a:ln>
                 <a:solidFill>
                   <a:srgbClr val="272D3A"/>
                 </a:solidFill>
-                <a:latin typeface="Arial"/>
+                <a:effectLst/>
+                <a:uLnTx/>
+                <a:uFillTx/>
+                <a:latin typeface="Arial"/>
+                <a:ea typeface="+mn-ea"/>
+                <a:cs typeface="+mn-cs"/>
               </a:rPr>
               <a:t>Пользовательские и интеграционные запросы приходят на </a:t>
             </a:r>
             <a:r>
-              <a:rPr lang="en-US" sz="2000" dirty="0">
+              <a:rPr kumimoji="0" lang="en-US" sz="2000" b="0" i="0" u="none" strike="noStrike" kern="1200" cap="none" spc="0" normalizeH="0" baseline="0" noProof="0" dirty="0">
+                <a:ln>
+                  <a:noFill/>
+                </a:ln>
                 <a:solidFill>
                   <a:srgbClr val="272D3A"/>
                 </a:solidFill>
-                <a:latin typeface="Arial"/>
+                <a:effectLst/>
+                <a:uLnTx/>
+                <a:uFillTx/>
+                <a:latin typeface="Arial"/>
+                <a:ea typeface="+mn-ea"/>
+                <a:cs typeface="+mn-cs"/>
               </a:rPr>
               <a:t>API Gateway</a:t>
             </a:r>
             <a:r>
-              <a:rPr lang="ru-RU" sz="2000" dirty="0">
+              <a:rPr kumimoji="0" lang="ru-RU" sz="2000" b="0" i="0" u="none" strike="noStrike" kern="1200" cap="none" spc="0" normalizeH="0" baseline="0" noProof="0" dirty="0">
+                <a:ln>
+                  <a:noFill/>
+                </a:ln>
                 <a:solidFill>
                   <a:srgbClr val="272D3A"/>
                 </a:solidFill>
-                <a:latin typeface="Arial"/>
+                <a:effectLst/>
+                <a:uLnTx/>
+                <a:uFillTx/>
+                <a:latin typeface="Arial"/>
+                <a:ea typeface="+mn-ea"/>
+                <a:cs typeface="+mn-cs"/>
               </a:rPr>
               <a:t>.</a:t>
             </a:r>
-            <a:endParaRPr sz="2000" dirty="0">
+            <a:endParaRPr kumimoji="0" sz="2000" b="0" i="0" u="none" strike="noStrike" kern="1200" cap="none" spc="0" normalizeH="0" baseline="0" noProof="0" dirty="0">
+              <a:ln>
+                <a:noFill/>
+              </a:ln>
               <a:solidFill>
                 <a:srgbClr val="272D3A"/>
               </a:solidFill>
+              <a:effectLst/>
+              <a:uLnTx/>
+              <a:uFillTx/>
               <a:latin typeface="Arial"/>
+              <a:ea typeface="+mn-ea"/>
+              <a:cs typeface="+mn-cs"/>
             </a:endParaRPr>
           </a:p>
         </p:txBody>
       </p:sp>
+      <p:sp>
+        <p:nvSpPr>
+          <p:cNvPr id="3" name="Прямоугольник 2">
+            <a:extLst>
+              <a:ext uri="{FF2B5EF4-FFF2-40B4-BE49-F238E27FC236}">
+                <a16:creationId xmlns:a16="http://schemas.microsoft.com/office/drawing/2014/main" id="{E36CAD79-2BBB-4AAD-AD04-490236A608B6}"/>
+              </a:ext>
+            </a:extLst>
+          </p:cNvPr>
+          <p:cNvSpPr/>
+          <p:nvPr/>
+        </p:nvSpPr>
+        <p:spPr>
+          <a:xfrm>
+            <a:off x="4187571" y="1411083"/>
+            <a:ext cx="1734671" cy="817360"/>
+          </a:xfrm>
+          <a:prstGeom prst="rect">
+            <a:avLst/>
+          </a:prstGeom>
+          <a:solidFill>
+            <a:schemeClr val="tx2">
+              <a:lumMod val="90000"/>
+              <a:lumOff val="10000"/>
+            </a:schemeClr>
+          </a:solidFill>
+          <a:ln>
+            <a:solidFill>
+              <a:schemeClr val="tx2">
+                <a:lumMod val="90000"/>
+                <a:lumOff val="10000"/>
+              </a:schemeClr>
+            </a:solidFill>
+          </a:ln>
+        </p:spPr>
+        <p:style>
+          <a:lnRef idx="1">
+            <a:schemeClr val="accent1"/>
+          </a:lnRef>
+          <a:fillRef idx="2">
+            <a:schemeClr val="accent1"/>
+          </a:fillRef>
+          <a:effectRef idx="1">
+            <a:schemeClr val="accent1"/>
+          </a:effectRef>
+          <a:fontRef idx="minor">
+            <a:schemeClr val="dk1"/>
+          </a:fontRef>
+        </p:style>
+        <p:txBody>
+          <a:bodyPr rot="0" spcFirstLastPara="0" vertOverflow="overflow" horzOverflow="overflow" vert="horz" wrap="square" lIns="91440" tIns="45720" rIns="91440" bIns="45720" numCol="1" spcCol="0" rtlCol="0" fromWordArt="0" anchor="ctr" anchorCtr="0" forceAA="0" compatLnSpc="1">
+            <a:prstTxWarp prst="textNoShape">
+              <a:avLst/>
+            </a:prstTxWarp>
+            <a:noAutofit/>
+          </a:bodyPr>
+          <a:lstStyle/>
+          <a:p>
+            <a:pPr marL="0" marR="0" lvl="0" indent="0" algn="ctr" defTabSz="914400" rtl="0" eaLnBrk="1" fontAlgn="auto" latinLnBrk="0" hangingPunct="1">
+              <a:lnSpc>
+                <a:spcPct val="100000"/>
+              </a:lnSpc>
+              <a:spcBef>
+                <a:spcPts val="0"/>
+              </a:spcBef>
+              <a:spcAft>
+                <a:spcPts val="0"/>
+              </a:spcAft>
+              <a:buClrTx/>
+              <a:buSzTx/>
+              <a:buFontTx/>
+              <a:buNone/>
+              <a:tabLst/>
+              <a:defRPr/>
+            </a:pPr>
+            <a:r>
+              <a:rPr kumimoji="0" lang="ru-RU" sz="1600" b="1" i="0" u="none" strike="noStrike" kern="1200" cap="none" spc="0" normalizeH="0" baseline="0" noProof="0" dirty="0">
+                <a:ln>
+                  <a:noFill/>
+                </a:ln>
+                <a:solidFill>
+                  <a:srgbClr val="FFFFFF"/>
+                </a:solidFill>
+                <a:effectLst/>
+                <a:uLnTx/>
+                <a:uFillTx/>
+                <a:latin typeface="Arial"/>
+                <a:ea typeface="+mn-ea"/>
+                <a:cs typeface="+mn-cs"/>
+              </a:rPr>
+              <a:t>Пользователь</a:t>
+            </a:r>
+          </a:p>
+        </p:txBody>
+      </p:sp>
+      <p:sp>
+        <p:nvSpPr>
+          <p:cNvPr id="22" name="Прямоугольник 21">
+            <a:extLst>
+              <a:ext uri="{FF2B5EF4-FFF2-40B4-BE49-F238E27FC236}">
+                <a16:creationId xmlns:a16="http://schemas.microsoft.com/office/drawing/2014/main" id="{CB653E18-B8C9-4001-B2D9-67F78B29FC2E}"/>
+              </a:ext>
+            </a:extLst>
+          </p:cNvPr>
+          <p:cNvSpPr/>
+          <p:nvPr/>
+        </p:nvSpPr>
+        <p:spPr>
+          <a:xfrm>
+            <a:off x="4187571" y="2441242"/>
+            <a:ext cx="1734670" cy="817360"/>
+          </a:xfrm>
+          <a:prstGeom prst="rect">
+            <a:avLst/>
+          </a:prstGeom>
+          <a:solidFill>
+            <a:schemeClr val="tx2">
+              <a:lumMod val="75000"/>
+              <a:lumOff val="25000"/>
+            </a:schemeClr>
+          </a:solidFill>
+          <a:ln>
+            <a:solidFill>
+              <a:schemeClr val="tx2">
+                <a:lumMod val="75000"/>
+                <a:lumOff val="25000"/>
+              </a:schemeClr>
+            </a:solidFill>
+          </a:ln>
+        </p:spPr>
+        <p:style>
+          <a:lnRef idx="1">
+            <a:schemeClr val="accent1"/>
+          </a:lnRef>
+          <a:fillRef idx="2">
+            <a:schemeClr val="accent1"/>
+          </a:fillRef>
+          <a:effectRef idx="1">
+            <a:schemeClr val="accent1"/>
+          </a:effectRef>
+          <a:fontRef idx="minor">
+            <a:schemeClr val="dk1"/>
+          </a:fontRef>
+        </p:style>
+        <p:txBody>
+          <a:bodyPr rot="0" spcFirstLastPara="0" vertOverflow="overflow" horzOverflow="overflow" vert="horz" wrap="square" lIns="91440" tIns="45720" rIns="91440" bIns="45720" numCol="1" spcCol="0" rtlCol="0" fromWordArt="0" anchor="ctr" anchorCtr="0" forceAA="0" compatLnSpc="1">
+            <a:prstTxWarp prst="textNoShape">
+              <a:avLst/>
+            </a:prstTxWarp>
+            <a:noAutofit/>
+          </a:bodyPr>
+          <a:lstStyle/>
+          <a:p>
+            <a:pPr marL="0" marR="0" lvl="0" indent="0" algn="ctr" defTabSz="914400" rtl="0" eaLnBrk="1" fontAlgn="auto" latinLnBrk="0" hangingPunct="1">
+              <a:lnSpc>
+                <a:spcPct val="100000"/>
+              </a:lnSpc>
+              <a:spcBef>
+                <a:spcPts val="0"/>
+              </a:spcBef>
+              <a:spcAft>
+                <a:spcPts val="0"/>
+              </a:spcAft>
+              <a:buClrTx/>
+              <a:buSzTx/>
+              <a:buFontTx/>
+              <a:buNone/>
+              <a:tabLst/>
+              <a:defRPr/>
+            </a:pPr>
+            <a:r>
+              <a:rPr kumimoji="0" lang="ru-RU" sz="1600" b="1" i="0" u="none" strike="noStrike" kern="1200" cap="none" spc="0" normalizeH="0" baseline="0" noProof="0" dirty="0">
+                <a:ln>
+                  <a:noFill/>
+                </a:ln>
+                <a:solidFill>
+                  <a:srgbClr val="FFFFFF"/>
+                </a:solidFill>
+                <a:effectLst/>
+                <a:uLnTx/>
+                <a:uFillTx/>
+                <a:latin typeface="Arial"/>
+                <a:ea typeface="+mn-ea"/>
+                <a:cs typeface="+mn-cs"/>
+              </a:rPr>
+              <a:t>Веб-клиент</a:t>
+            </a:r>
+          </a:p>
+        </p:txBody>
+      </p:sp>
+      <p:sp>
+        <p:nvSpPr>
+          <p:cNvPr id="28" name="Прямоугольник 27">
+            <a:extLst>
+              <a:ext uri="{FF2B5EF4-FFF2-40B4-BE49-F238E27FC236}">
+                <a16:creationId xmlns:a16="http://schemas.microsoft.com/office/drawing/2014/main" id="{B8AA0E6D-6FD7-4D96-A9CC-95CD39B053F5}"/>
+              </a:ext>
+            </a:extLst>
+          </p:cNvPr>
+          <p:cNvSpPr/>
+          <p:nvPr/>
+        </p:nvSpPr>
+        <p:spPr>
+          <a:xfrm>
+            <a:off x="4187570" y="3447611"/>
+            <a:ext cx="1734671" cy="817360"/>
+          </a:xfrm>
+          <a:prstGeom prst="rect">
+            <a:avLst/>
+          </a:prstGeom>
+          <a:solidFill>
+            <a:schemeClr val="tx2">
+              <a:lumMod val="75000"/>
+              <a:lumOff val="25000"/>
+            </a:schemeClr>
+          </a:solidFill>
+          <a:ln>
+            <a:solidFill>
+              <a:schemeClr val="tx2">
+                <a:lumMod val="75000"/>
+                <a:lumOff val="25000"/>
+              </a:schemeClr>
+            </a:solidFill>
+          </a:ln>
+        </p:spPr>
+        <p:style>
+          <a:lnRef idx="1">
+            <a:schemeClr val="accent1"/>
+          </a:lnRef>
+          <a:fillRef idx="2">
+            <a:schemeClr val="accent1"/>
+          </a:fillRef>
+          <a:effectRef idx="1">
+            <a:schemeClr val="accent1"/>
+          </a:effectRef>
+          <a:fontRef idx="minor">
+            <a:schemeClr val="dk1"/>
+          </a:fontRef>
+        </p:style>
+        <p:txBody>
+          <a:bodyPr rot="0" spcFirstLastPara="0" vertOverflow="overflow" horzOverflow="overflow" vert="horz" wrap="square" lIns="91440" tIns="45720" rIns="91440" bIns="45720" numCol="1" spcCol="0" rtlCol="0" fromWordArt="0" anchor="ctr" anchorCtr="0" forceAA="0" compatLnSpc="1">
+            <a:prstTxWarp prst="textNoShape">
+              <a:avLst/>
+            </a:prstTxWarp>
+            <a:noAutofit/>
+          </a:bodyPr>
+          <a:lstStyle/>
+          <a:p>
+            <a:pPr marL="0" marR="0" lvl="0" indent="0" algn="ctr" defTabSz="914400" rtl="0" eaLnBrk="1" fontAlgn="auto" latinLnBrk="0" hangingPunct="1">
+              <a:lnSpc>
+                <a:spcPct val="100000"/>
+              </a:lnSpc>
+              <a:spcBef>
+                <a:spcPts val="0"/>
+              </a:spcBef>
+              <a:spcAft>
+                <a:spcPts val="0"/>
+              </a:spcAft>
+              <a:buClrTx/>
+              <a:buSzTx/>
+              <a:buFontTx/>
+              <a:buNone/>
+              <a:tabLst/>
+              <a:defRPr/>
+            </a:pPr>
+            <a:r>
+              <a:rPr kumimoji="0" lang="en-US" sz="1600" b="1" i="0" u="none" strike="noStrike" kern="1200" cap="none" spc="0" normalizeH="0" baseline="0" noProof="0" dirty="0">
+                <a:ln>
+                  <a:noFill/>
+                </a:ln>
+                <a:solidFill>
+                  <a:srgbClr val="FFFFFF"/>
+                </a:solidFill>
+                <a:effectLst/>
+                <a:uLnTx/>
+                <a:uFillTx/>
+                <a:latin typeface="Arial"/>
+                <a:ea typeface="+mn-ea"/>
+                <a:cs typeface="+mn-cs"/>
+              </a:rPr>
+              <a:t>API Gateway</a:t>
+            </a:r>
+            <a:endParaRPr kumimoji="0" lang="ru-RU" sz="1600" b="1" i="0" u="none" strike="noStrike" kern="1200" cap="none" spc="0" normalizeH="0" baseline="0" noProof="0" dirty="0">
+              <a:ln>
+                <a:noFill/>
+              </a:ln>
+              <a:solidFill>
+                <a:srgbClr val="FFFFFF"/>
+              </a:solidFill>
+              <a:effectLst/>
+              <a:uLnTx/>
+              <a:uFillTx/>
+              <a:latin typeface="Arial"/>
+              <a:ea typeface="+mn-ea"/>
+              <a:cs typeface="+mn-cs"/>
+            </a:endParaRPr>
+          </a:p>
+        </p:txBody>
+      </p:sp>
+      <p:sp>
+        <p:nvSpPr>
+          <p:cNvPr id="30" name="Прямоугольник 29">
+            <a:extLst>
+              <a:ext uri="{FF2B5EF4-FFF2-40B4-BE49-F238E27FC236}">
+                <a16:creationId xmlns:a16="http://schemas.microsoft.com/office/drawing/2014/main" id="{73BF7F3C-7D3A-416A-9D7F-D988E2C09F5F}"/>
+              </a:ext>
+            </a:extLst>
+          </p:cNvPr>
+          <p:cNvSpPr/>
+          <p:nvPr/>
+        </p:nvSpPr>
+        <p:spPr>
+          <a:xfrm>
+            <a:off x="3534203" y="4666779"/>
+            <a:ext cx="2023914" cy="817360"/>
+          </a:xfrm>
+          <a:prstGeom prst="rect">
+            <a:avLst/>
+          </a:prstGeom>
+          <a:solidFill>
+            <a:schemeClr val="tx2">
+              <a:lumMod val="75000"/>
+              <a:lumOff val="25000"/>
+            </a:schemeClr>
+          </a:solidFill>
+          <a:ln>
+            <a:solidFill>
+              <a:schemeClr val="tx2">
+                <a:lumMod val="75000"/>
+                <a:lumOff val="25000"/>
+              </a:schemeClr>
+            </a:solidFill>
+          </a:ln>
+        </p:spPr>
+        <p:style>
+          <a:lnRef idx="1">
+            <a:schemeClr val="accent1"/>
+          </a:lnRef>
+          <a:fillRef idx="2">
+            <a:schemeClr val="accent1"/>
+          </a:fillRef>
+          <a:effectRef idx="1">
+            <a:schemeClr val="accent1"/>
+          </a:effectRef>
+          <a:fontRef idx="minor">
+            <a:schemeClr val="dk1"/>
+          </a:fontRef>
+        </p:style>
+        <p:txBody>
+          <a:bodyPr rot="0" spcFirstLastPara="0" vertOverflow="overflow" horzOverflow="overflow" vert="horz" wrap="square" lIns="91440" tIns="45720" rIns="91440" bIns="45720" numCol="1" spcCol="0" rtlCol="0" fromWordArt="0" anchor="ctr" anchorCtr="0" forceAA="0" compatLnSpc="1">
+            <a:prstTxWarp prst="textNoShape">
+              <a:avLst/>
+            </a:prstTxWarp>
+            <a:noAutofit/>
+          </a:bodyPr>
+          <a:lstStyle/>
+          <a:p>
+            <a:pPr marL="0" marR="0" lvl="0" indent="0" algn="ctr" defTabSz="914400" rtl="0" eaLnBrk="1" fontAlgn="auto" latinLnBrk="0" hangingPunct="1">
+              <a:lnSpc>
+                <a:spcPct val="100000"/>
+              </a:lnSpc>
+              <a:spcBef>
+                <a:spcPts val="0"/>
+              </a:spcBef>
+              <a:spcAft>
+                <a:spcPts val="0"/>
+              </a:spcAft>
+              <a:buClrTx/>
+              <a:buSzTx/>
+              <a:buFontTx/>
+              <a:buNone/>
+              <a:tabLst/>
+              <a:defRPr/>
+            </a:pPr>
+            <a:r>
+              <a:rPr kumimoji="0" lang="ru-RU" sz="1600" b="1" i="0" u="none" strike="noStrike" kern="1200" cap="none" spc="0" normalizeH="0" baseline="0" noProof="0" dirty="0">
+                <a:ln>
+                  <a:noFill/>
+                </a:ln>
+                <a:solidFill>
+                  <a:srgbClr val="FFFFFF"/>
+                </a:solidFill>
+                <a:effectLst/>
+                <a:uLnTx/>
+                <a:uFillTx/>
+                <a:latin typeface="Arial"/>
+                <a:ea typeface="+mn-ea"/>
+                <a:cs typeface="+mn-cs"/>
+              </a:rPr>
+              <a:t>Пространственно-временной поиск</a:t>
+            </a:r>
+          </a:p>
+        </p:txBody>
+      </p:sp>
+      <p:sp>
+        <p:nvSpPr>
+          <p:cNvPr id="31" name="Прямоугольник 30">
+            <a:extLst>
+              <a:ext uri="{FF2B5EF4-FFF2-40B4-BE49-F238E27FC236}">
+                <a16:creationId xmlns:a16="http://schemas.microsoft.com/office/drawing/2014/main" id="{6364DC6E-8633-47B7-BD6D-21559693C0E9}"/>
+              </a:ext>
+            </a:extLst>
+          </p:cNvPr>
+          <p:cNvSpPr/>
+          <p:nvPr/>
+        </p:nvSpPr>
+        <p:spPr>
+          <a:xfrm>
+            <a:off x="6096000" y="4666779"/>
+            <a:ext cx="2023914" cy="817360"/>
+          </a:xfrm>
+          <a:prstGeom prst="rect">
+            <a:avLst/>
+          </a:prstGeom>
+          <a:solidFill>
+            <a:schemeClr val="tx2">
+              <a:lumMod val="75000"/>
+              <a:lumOff val="25000"/>
+            </a:schemeClr>
+          </a:solidFill>
+          <a:ln>
+            <a:solidFill>
+              <a:schemeClr val="tx2">
+                <a:lumMod val="75000"/>
+                <a:lumOff val="25000"/>
+              </a:schemeClr>
+            </a:solidFill>
+          </a:ln>
+        </p:spPr>
+        <p:style>
+          <a:lnRef idx="1">
+            <a:schemeClr val="accent1"/>
+          </a:lnRef>
+          <a:fillRef idx="2">
+            <a:schemeClr val="accent1"/>
+          </a:fillRef>
+          <a:effectRef idx="1">
+            <a:schemeClr val="accent1"/>
+          </a:effectRef>
+          <a:fontRef idx="minor">
+            <a:schemeClr val="dk1"/>
+          </a:fontRef>
+        </p:style>
+        <p:txBody>
+          <a:bodyPr rot="0" spcFirstLastPara="0" vertOverflow="overflow" horzOverflow="overflow" vert="horz" wrap="square" lIns="91440" tIns="45720" rIns="91440" bIns="45720" numCol="1" spcCol="0" rtlCol="0" fromWordArt="0" anchor="ctr" anchorCtr="0" forceAA="0" compatLnSpc="1">
+            <a:prstTxWarp prst="textNoShape">
+              <a:avLst/>
+            </a:prstTxWarp>
+            <a:noAutofit/>
+          </a:bodyPr>
+          <a:lstStyle/>
+          <a:p>
+            <a:pPr marL="0" marR="0" lvl="0" indent="0" algn="ctr" defTabSz="914400" rtl="0" eaLnBrk="1" fontAlgn="auto" latinLnBrk="0" hangingPunct="1">
+              <a:lnSpc>
+                <a:spcPct val="100000"/>
+              </a:lnSpc>
+              <a:spcBef>
+                <a:spcPts val="0"/>
+              </a:spcBef>
+              <a:spcAft>
+                <a:spcPts val="0"/>
+              </a:spcAft>
+              <a:buClrTx/>
+              <a:buSzTx/>
+              <a:buFontTx/>
+              <a:buNone/>
+              <a:tabLst/>
+              <a:defRPr/>
+            </a:pPr>
+            <a:r>
+              <a:rPr kumimoji="0" lang="ru-RU" sz="1600" b="1" i="0" u="none" strike="noStrike" kern="1200" cap="none" spc="0" normalizeH="0" baseline="0" noProof="0" dirty="0">
+                <a:ln>
+                  <a:noFill/>
+                </a:ln>
+                <a:solidFill>
+                  <a:srgbClr val="FFFFFF"/>
+                </a:solidFill>
+                <a:effectLst/>
+                <a:uLnTx/>
+                <a:uFillTx/>
+                <a:latin typeface="Arial"/>
+                <a:ea typeface="+mn-ea"/>
+                <a:cs typeface="+mn-cs"/>
+              </a:rPr>
+              <a:t>Сохранение телеметрии</a:t>
+            </a:r>
+          </a:p>
+        </p:txBody>
+      </p:sp>
+      <p:sp>
+        <p:nvSpPr>
+          <p:cNvPr id="32" name="Прямоугольник 31">
+            <a:extLst>
+              <a:ext uri="{FF2B5EF4-FFF2-40B4-BE49-F238E27FC236}">
+                <a16:creationId xmlns:a16="http://schemas.microsoft.com/office/drawing/2014/main" id="{B2142BF1-BE1F-41B5-B94F-0BBD3CD91817}"/>
+              </a:ext>
+            </a:extLst>
+          </p:cNvPr>
+          <p:cNvSpPr/>
+          <p:nvPr/>
+        </p:nvSpPr>
+        <p:spPr>
+          <a:xfrm>
+            <a:off x="8657797" y="4658191"/>
+            <a:ext cx="2023914" cy="817360"/>
+          </a:xfrm>
+          <a:prstGeom prst="rect">
+            <a:avLst/>
+          </a:prstGeom>
+          <a:solidFill>
+            <a:schemeClr val="tx2">
+              <a:lumMod val="75000"/>
+              <a:lumOff val="25000"/>
+            </a:schemeClr>
+          </a:solidFill>
+          <a:ln>
+            <a:solidFill>
+              <a:schemeClr val="tx2">
+                <a:lumMod val="75000"/>
+                <a:lumOff val="25000"/>
+              </a:schemeClr>
+            </a:solidFill>
+          </a:ln>
+        </p:spPr>
+        <p:style>
+          <a:lnRef idx="1">
+            <a:schemeClr val="accent1"/>
+          </a:lnRef>
+          <a:fillRef idx="2">
+            <a:schemeClr val="accent1"/>
+          </a:fillRef>
+          <a:effectRef idx="1">
+            <a:schemeClr val="accent1"/>
+          </a:effectRef>
+          <a:fontRef idx="minor">
+            <a:schemeClr val="dk1"/>
+          </a:fontRef>
+        </p:style>
+        <p:txBody>
+          <a:bodyPr rot="0" spcFirstLastPara="0" vertOverflow="overflow" horzOverflow="overflow" vert="horz" wrap="square" lIns="91440" tIns="45720" rIns="91440" bIns="45720" numCol="1" spcCol="0" rtlCol="0" fromWordArt="0" anchor="ctr" anchorCtr="0" forceAA="0" compatLnSpc="1">
+            <a:prstTxWarp prst="textNoShape">
+              <a:avLst/>
+            </a:prstTxWarp>
+            <a:noAutofit/>
+          </a:bodyPr>
+          <a:lstStyle/>
+          <a:p>
+            <a:pPr marL="0" marR="0" lvl="0" indent="0" algn="ctr" defTabSz="914400" rtl="0" eaLnBrk="1" fontAlgn="auto" latinLnBrk="0" hangingPunct="1">
+              <a:lnSpc>
+                <a:spcPct val="100000"/>
+              </a:lnSpc>
+              <a:spcBef>
+                <a:spcPts val="0"/>
+              </a:spcBef>
+              <a:spcAft>
+                <a:spcPts val="0"/>
+              </a:spcAft>
+              <a:buClrTx/>
+              <a:buSzTx/>
+              <a:buFontTx/>
+              <a:buNone/>
+              <a:tabLst/>
+              <a:defRPr/>
+            </a:pPr>
+            <a:r>
+              <a:rPr kumimoji="0" lang="ru-RU" sz="1600" b="1" i="0" u="none" strike="noStrike" kern="1200" cap="none" spc="0" normalizeH="0" baseline="0" noProof="0" dirty="0">
+                <a:ln>
+                  <a:noFill/>
+                </a:ln>
+                <a:solidFill>
+                  <a:srgbClr val="FFFFFF"/>
+                </a:solidFill>
+                <a:effectLst/>
+                <a:uLnTx/>
+                <a:uFillTx/>
+                <a:latin typeface="Arial"/>
+                <a:ea typeface="+mn-ea"/>
+                <a:cs typeface="+mn-cs"/>
+              </a:rPr>
+              <a:t>Зональное отслеживание</a:t>
+            </a:r>
+          </a:p>
+        </p:txBody>
+      </p:sp>
+      <p:sp>
+        <p:nvSpPr>
+          <p:cNvPr id="33" name="Прямоугольник 32">
+            <a:extLst>
+              <a:ext uri="{FF2B5EF4-FFF2-40B4-BE49-F238E27FC236}">
+                <a16:creationId xmlns:a16="http://schemas.microsoft.com/office/drawing/2014/main" id="{2677B0DF-5BC2-435E-ADF7-8E0F54888F5F}"/>
+              </a:ext>
+            </a:extLst>
+          </p:cNvPr>
+          <p:cNvSpPr/>
+          <p:nvPr/>
+        </p:nvSpPr>
+        <p:spPr>
+          <a:xfrm>
+            <a:off x="6240621" y="5707925"/>
+            <a:ext cx="1734671" cy="817360"/>
+          </a:xfrm>
+          <a:prstGeom prst="rect">
+            <a:avLst/>
+          </a:prstGeom>
+          <a:solidFill>
+            <a:schemeClr val="tx2">
+              <a:lumMod val="75000"/>
+              <a:lumOff val="25000"/>
+            </a:schemeClr>
+          </a:solidFill>
+          <a:ln>
+            <a:solidFill>
+              <a:schemeClr val="tx2">
+                <a:lumMod val="75000"/>
+                <a:lumOff val="25000"/>
+              </a:schemeClr>
+            </a:solidFill>
+          </a:ln>
+        </p:spPr>
+        <p:style>
+          <a:lnRef idx="1">
+            <a:schemeClr val="accent1"/>
+          </a:lnRef>
+          <a:fillRef idx="2">
+            <a:schemeClr val="accent1"/>
+          </a:fillRef>
+          <a:effectRef idx="1">
+            <a:schemeClr val="accent1"/>
+          </a:effectRef>
+          <a:fontRef idx="minor">
+            <a:schemeClr val="dk1"/>
+          </a:fontRef>
+        </p:style>
+        <p:txBody>
+          <a:bodyPr rot="0" spcFirstLastPara="0" vertOverflow="overflow" horzOverflow="overflow" vert="horz" wrap="square" lIns="91440" tIns="45720" rIns="91440" bIns="45720" numCol="1" spcCol="0" rtlCol="0" fromWordArt="0" anchor="ctr" anchorCtr="0" forceAA="0" compatLnSpc="1">
+            <a:prstTxWarp prst="textNoShape">
+              <a:avLst/>
+            </a:prstTxWarp>
+            <a:noAutofit/>
+          </a:bodyPr>
+          <a:lstStyle/>
+          <a:p>
+            <a:pPr marL="0" marR="0" lvl="0" indent="0" algn="ctr" defTabSz="914400" rtl="0" eaLnBrk="1" fontAlgn="auto" latinLnBrk="0" hangingPunct="1">
+              <a:lnSpc>
+                <a:spcPct val="100000"/>
+              </a:lnSpc>
+              <a:spcBef>
+                <a:spcPts val="0"/>
+              </a:spcBef>
+              <a:spcAft>
+                <a:spcPts val="0"/>
+              </a:spcAft>
+              <a:buClrTx/>
+              <a:buSzTx/>
+              <a:buFontTx/>
+              <a:buNone/>
+              <a:tabLst/>
+              <a:defRPr/>
+            </a:pPr>
+            <a:r>
+              <a:rPr kumimoji="0" lang="en-US" sz="1600" b="1" i="0" u="none" strike="noStrike" kern="1200" cap="none" spc="0" normalizeH="0" baseline="0" noProof="0" dirty="0">
+                <a:ln>
+                  <a:noFill/>
+                </a:ln>
+                <a:solidFill>
+                  <a:srgbClr val="FFFFFF"/>
+                </a:solidFill>
+                <a:effectLst/>
+                <a:uLnTx/>
+                <a:uFillTx/>
+                <a:latin typeface="Arial"/>
+                <a:ea typeface="+mn-ea"/>
+                <a:cs typeface="+mn-cs"/>
+              </a:rPr>
+              <a:t>PostgreSQL</a:t>
+            </a:r>
+            <a:endParaRPr kumimoji="0" lang="ru-RU" sz="1600" b="1" i="0" u="none" strike="noStrike" kern="1200" cap="none" spc="0" normalizeH="0" baseline="0" noProof="0" dirty="0">
+              <a:ln>
+                <a:noFill/>
+              </a:ln>
+              <a:solidFill>
+                <a:srgbClr val="FFFFFF"/>
+              </a:solidFill>
+              <a:effectLst/>
+              <a:uLnTx/>
+              <a:uFillTx/>
+              <a:latin typeface="Arial"/>
+              <a:ea typeface="+mn-ea"/>
+              <a:cs typeface="+mn-cs"/>
+            </a:endParaRPr>
+          </a:p>
+        </p:txBody>
+      </p:sp>
+      <p:sp>
+        <p:nvSpPr>
+          <p:cNvPr id="34" name="Прямоугольник 33">
+            <a:extLst>
+              <a:ext uri="{FF2B5EF4-FFF2-40B4-BE49-F238E27FC236}">
+                <a16:creationId xmlns:a16="http://schemas.microsoft.com/office/drawing/2014/main" id="{A74DCB33-1374-4FF9-AA22-60F5AF594D30}"/>
+              </a:ext>
+            </a:extLst>
+          </p:cNvPr>
+          <p:cNvSpPr/>
+          <p:nvPr/>
+        </p:nvSpPr>
+        <p:spPr>
+          <a:xfrm>
+            <a:off x="6579567" y="3447611"/>
+            <a:ext cx="1734671" cy="817360"/>
+          </a:xfrm>
+          <a:prstGeom prst="rect">
+            <a:avLst/>
+          </a:prstGeom>
+          <a:solidFill>
+            <a:schemeClr val="tx2">
+              <a:lumMod val="75000"/>
+              <a:lumOff val="25000"/>
+            </a:schemeClr>
+          </a:solidFill>
+          <a:ln>
+            <a:solidFill>
+              <a:schemeClr val="tx2">
+                <a:lumMod val="75000"/>
+                <a:lumOff val="25000"/>
+              </a:schemeClr>
+            </a:solidFill>
+          </a:ln>
+        </p:spPr>
+        <p:style>
+          <a:lnRef idx="1">
+            <a:schemeClr val="accent1"/>
+          </a:lnRef>
+          <a:fillRef idx="2">
+            <a:schemeClr val="accent1"/>
+          </a:fillRef>
+          <a:effectRef idx="1">
+            <a:schemeClr val="accent1"/>
+          </a:effectRef>
+          <a:fontRef idx="minor">
+            <a:schemeClr val="dk1"/>
+          </a:fontRef>
+        </p:style>
+        <p:txBody>
+          <a:bodyPr rot="0" spcFirstLastPara="0" vertOverflow="overflow" horzOverflow="overflow" vert="horz" wrap="square" lIns="91440" tIns="45720" rIns="91440" bIns="45720" numCol="1" spcCol="0" rtlCol="0" fromWordArt="0" anchor="ctr" anchorCtr="0" forceAA="0" compatLnSpc="1">
+            <a:prstTxWarp prst="textNoShape">
+              <a:avLst/>
+            </a:prstTxWarp>
+            <a:noAutofit/>
+          </a:bodyPr>
+          <a:lstStyle/>
+          <a:p>
+            <a:pPr marL="0" marR="0" lvl="0" indent="0" algn="ctr" defTabSz="914400" rtl="0" eaLnBrk="1" fontAlgn="auto" latinLnBrk="0" hangingPunct="1">
+              <a:lnSpc>
+                <a:spcPct val="100000"/>
+              </a:lnSpc>
+              <a:spcBef>
+                <a:spcPts val="0"/>
+              </a:spcBef>
+              <a:spcAft>
+                <a:spcPts val="0"/>
+              </a:spcAft>
+              <a:buClrTx/>
+              <a:buSzTx/>
+              <a:buFontTx/>
+              <a:buNone/>
+              <a:tabLst/>
+              <a:defRPr/>
+            </a:pPr>
+            <a:r>
+              <a:rPr kumimoji="0" lang="en-US" sz="1600" b="1" i="0" u="none" strike="noStrike" kern="1200" cap="none" spc="0" normalizeH="0" baseline="0" noProof="0" dirty="0">
+                <a:ln>
+                  <a:noFill/>
+                </a:ln>
+                <a:solidFill>
+                  <a:srgbClr val="FFFFFF"/>
+                </a:solidFill>
+                <a:effectLst/>
+                <a:uLnTx/>
+                <a:uFillTx/>
+                <a:latin typeface="Arial"/>
+                <a:ea typeface="+mn-ea"/>
+                <a:cs typeface="+mn-cs"/>
+              </a:rPr>
+              <a:t>Redis</a:t>
+            </a:r>
+            <a:endParaRPr kumimoji="0" lang="ru-RU" sz="1600" b="1" i="0" u="none" strike="noStrike" kern="1200" cap="none" spc="0" normalizeH="0" baseline="0" noProof="0" dirty="0">
+              <a:ln>
+                <a:noFill/>
+              </a:ln>
+              <a:solidFill>
+                <a:srgbClr val="FFFFFF"/>
+              </a:solidFill>
+              <a:effectLst/>
+              <a:uLnTx/>
+              <a:uFillTx/>
+              <a:latin typeface="Arial"/>
+              <a:ea typeface="+mn-ea"/>
+              <a:cs typeface="+mn-cs"/>
+            </a:endParaRPr>
+          </a:p>
+        </p:txBody>
+      </p:sp>
+      <p:sp>
+        <p:nvSpPr>
+          <p:cNvPr id="35" name="Прямоугольник 34">
+            <a:extLst>
+              <a:ext uri="{FF2B5EF4-FFF2-40B4-BE49-F238E27FC236}">
+                <a16:creationId xmlns:a16="http://schemas.microsoft.com/office/drawing/2014/main" id="{2A1DE57D-BD2E-4763-B3A0-B7735B593C73}"/>
+              </a:ext>
+            </a:extLst>
+          </p:cNvPr>
+          <p:cNvSpPr/>
+          <p:nvPr/>
+        </p:nvSpPr>
+        <p:spPr>
+          <a:xfrm>
+            <a:off x="9140922" y="3520045"/>
+            <a:ext cx="1734671" cy="817360"/>
+          </a:xfrm>
+          <a:prstGeom prst="rect">
+            <a:avLst/>
+          </a:prstGeom>
+          <a:solidFill>
+            <a:schemeClr val="tx2">
+              <a:lumMod val="75000"/>
+              <a:lumOff val="25000"/>
+            </a:schemeClr>
+          </a:solidFill>
+          <a:ln>
+            <a:solidFill>
+              <a:schemeClr val="tx2">
+                <a:lumMod val="75000"/>
+                <a:lumOff val="25000"/>
+              </a:schemeClr>
+            </a:solidFill>
+          </a:ln>
+        </p:spPr>
+        <p:style>
+          <a:lnRef idx="1">
+            <a:schemeClr val="accent1"/>
+          </a:lnRef>
+          <a:fillRef idx="2">
+            <a:schemeClr val="accent1"/>
+          </a:fillRef>
+          <a:effectRef idx="1">
+            <a:schemeClr val="accent1"/>
+          </a:effectRef>
+          <a:fontRef idx="minor">
+            <a:schemeClr val="dk1"/>
+          </a:fontRef>
+        </p:style>
+        <p:txBody>
+          <a:bodyPr rot="0" spcFirstLastPara="0" vertOverflow="overflow" horzOverflow="overflow" vert="horz" wrap="square" lIns="91440" tIns="45720" rIns="91440" bIns="45720" numCol="1" spcCol="0" rtlCol="0" fromWordArt="0" anchor="ctr" anchorCtr="0" forceAA="0" compatLnSpc="1">
+            <a:prstTxWarp prst="textNoShape">
+              <a:avLst/>
+            </a:prstTxWarp>
+            <a:noAutofit/>
+          </a:bodyPr>
+          <a:lstStyle/>
+          <a:p>
+            <a:pPr marL="0" marR="0" lvl="0" indent="0" algn="ctr" defTabSz="914400" rtl="0" eaLnBrk="1" fontAlgn="auto" latinLnBrk="0" hangingPunct="1">
+              <a:lnSpc>
+                <a:spcPct val="100000"/>
+              </a:lnSpc>
+              <a:spcBef>
+                <a:spcPts val="0"/>
+              </a:spcBef>
+              <a:spcAft>
+                <a:spcPts val="0"/>
+              </a:spcAft>
+              <a:buClrTx/>
+              <a:buSzTx/>
+              <a:buFontTx/>
+              <a:buNone/>
+              <a:tabLst/>
+              <a:defRPr/>
+            </a:pPr>
+            <a:r>
+              <a:rPr kumimoji="0" lang="en-US" sz="1600" b="1" i="0" u="none" strike="noStrike" kern="1200" cap="none" spc="0" normalizeH="0" baseline="0" noProof="0" dirty="0">
+                <a:ln>
+                  <a:noFill/>
+                </a:ln>
+                <a:solidFill>
+                  <a:srgbClr val="FFFFFF"/>
+                </a:solidFill>
+                <a:effectLst/>
+                <a:uLnTx/>
+                <a:uFillTx/>
+                <a:latin typeface="Arial"/>
+                <a:ea typeface="+mn-ea"/>
+                <a:cs typeface="+mn-cs"/>
+              </a:rPr>
+              <a:t>Kafka</a:t>
+            </a:r>
+            <a:endParaRPr kumimoji="0" lang="ru-RU" sz="1600" b="1" i="0" u="none" strike="noStrike" kern="1200" cap="none" spc="0" normalizeH="0" baseline="0" noProof="0" dirty="0">
+              <a:ln>
+                <a:noFill/>
+              </a:ln>
+              <a:solidFill>
+                <a:srgbClr val="FFFFFF"/>
+              </a:solidFill>
+              <a:effectLst/>
+              <a:uLnTx/>
+              <a:uFillTx/>
+              <a:latin typeface="Arial"/>
+              <a:ea typeface="+mn-ea"/>
+              <a:cs typeface="+mn-cs"/>
+            </a:endParaRPr>
+          </a:p>
+        </p:txBody>
+      </p:sp>
+      <p:sp>
+        <p:nvSpPr>
+          <p:cNvPr id="36" name="Прямоугольник 35">
+            <a:extLst>
+              <a:ext uri="{FF2B5EF4-FFF2-40B4-BE49-F238E27FC236}">
+                <a16:creationId xmlns:a16="http://schemas.microsoft.com/office/drawing/2014/main" id="{4B6077BB-6D45-4466-B470-AAB5891FCC72}"/>
+              </a:ext>
+            </a:extLst>
+          </p:cNvPr>
+          <p:cNvSpPr/>
+          <p:nvPr/>
+        </p:nvSpPr>
+        <p:spPr>
+          <a:xfrm>
+            <a:off x="9140922" y="2449068"/>
+            <a:ext cx="1734671" cy="817360"/>
+          </a:xfrm>
+          <a:prstGeom prst="rect">
+            <a:avLst/>
+          </a:prstGeom>
+          <a:solidFill>
+            <a:schemeClr val="tx2">
+              <a:lumMod val="75000"/>
+              <a:lumOff val="25000"/>
+            </a:schemeClr>
+          </a:solidFill>
+          <a:ln>
+            <a:solidFill>
+              <a:schemeClr val="tx2">
+                <a:lumMod val="75000"/>
+                <a:lumOff val="25000"/>
+              </a:schemeClr>
+            </a:solidFill>
+          </a:ln>
+        </p:spPr>
+        <p:style>
+          <a:lnRef idx="1">
+            <a:schemeClr val="accent1"/>
+          </a:lnRef>
+          <a:fillRef idx="2">
+            <a:schemeClr val="accent1"/>
+          </a:fillRef>
+          <a:effectRef idx="1">
+            <a:schemeClr val="accent1"/>
+          </a:effectRef>
+          <a:fontRef idx="minor">
+            <a:schemeClr val="dk1"/>
+          </a:fontRef>
+        </p:style>
+        <p:txBody>
+          <a:bodyPr rot="0" spcFirstLastPara="0" vertOverflow="overflow" horzOverflow="overflow" vert="horz" wrap="square" lIns="91440" tIns="45720" rIns="91440" bIns="45720" numCol="1" spcCol="0" rtlCol="0" fromWordArt="0" anchor="ctr" anchorCtr="0" forceAA="0" compatLnSpc="1">
+            <a:prstTxWarp prst="textNoShape">
+              <a:avLst/>
+            </a:prstTxWarp>
+            <a:noAutofit/>
+          </a:bodyPr>
+          <a:lstStyle/>
+          <a:p>
+            <a:pPr marL="0" marR="0" lvl="0" indent="0" algn="ctr" defTabSz="914400" rtl="0" eaLnBrk="1" fontAlgn="auto" latinLnBrk="0" hangingPunct="1">
+              <a:lnSpc>
+                <a:spcPct val="100000"/>
+              </a:lnSpc>
+              <a:spcBef>
+                <a:spcPts val="0"/>
+              </a:spcBef>
+              <a:spcAft>
+                <a:spcPts val="0"/>
+              </a:spcAft>
+              <a:buClrTx/>
+              <a:buSzTx/>
+              <a:buFontTx/>
+              <a:buNone/>
+              <a:tabLst/>
+              <a:defRPr/>
+            </a:pPr>
+            <a:r>
+              <a:rPr kumimoji="0" lang="ru-RU" sz="1600" b="1" i="0" u="none" strike="noStrike" kern="1200" cap="none" spc="0" normalizeH="0" baseline="0" noProof="0" dirty="0">
+                <a:ln>
+                  <a:noFill/>
+                </a:ln>
+                <a:solidFill>
+                  <a:srgbClr val="FFFFFF"/>
+                </a:solidFill>
+                <a:effectLst/>
+                <a:uLnTx/>
+                <a:uFillTx/>
+                <a:latin typeface="Arial"/>
+                <a:ea typeface="+mn-ea"/>
+                <a:cs typeface="+mn-cs"/>
+              </a:rPr>
+              <a:t>Приёмник телеметрии</a:t>
+            </a:r>
+          </a:p>
+        </p:txBody>
+      </p:sp>
+      <p:sp>
+        <p:nvSpPr>
+          <p:cNvPr id="37" name="Прямоугольник 36">
+            <a:extLst>
+              <a:ext uri="{FF2B5EF4-FFF2-40B4-BE49-F238E27FC236}">
+                <a16:creationId xmlns:a16="http://schemas.microsoft.com/office/drawing/2014/main" id="{F4DE42AD-7255-4193-8BAB-4FF7045CD1DB}"/>
+              </a:ext>
+            </a:extLst>
+          </p:cNvPr>
+          <p:cNvSpPr/>
+          <p:nvPr/>
+        </p:nvSpPr>
+        <p:spPr>
+          <a:xfrm>
+            <a:off x="9140922" y="1378091"/>
+            <a:ext cx="1734671" cy="817360"/>
+          </a:xfrm>
+          <a:prstGeom prst="rect">
+            <a:avLst/>
+          </a:prstGeom>
+          <a:solidFill>
+            <a:schemeClr val="tx2">
+              <a:lumMod val="50000"/>
+              <a:lumOff val="50000"/>
+            </a:schemeClr>
+          </a:solidFill>
+          <a:ln>
+            <a:solidFill>
+              <a:schemeClr val="tx2">
+                <a:lumMod val="50000"/>
+                <a:lumOff val="50000"/>
+              </a:schemeClr>
+            </a:solidFill>
+          </a:ln>
+        </p:spPr>
+        <p:style>
+          <a:lnRef idx="1">
+            <a:schemeClr val="accent1"/>
+          </a:lnRef>
+          <a:fillRef idx="2">
+            <a:schemeClr val="accent1"/>
+          </a:fillRef>
+          <a:effectRef idx="1">
+            <a:schemeClr val="accent1"/>
+          </a:effectRef>
+          <a:fontRef idx="minor">
+            <a:schemeClr val="dk1"/>
+          </a:fontRef>
+        </p:style>
+        <p:txBody>
+          <a:bodyPr rot="0" spcFirstLastPara="0" vertOverflow="overflow" horzOverflow="overflow" vert="horz" wrap="square" lIns="91440" tIns="45720" rIns="91440" bIns="45720" numCol="1" spcCol="0" rtlCol="0" fromWordArt="0" anchor="ctr" anchorCtr="0" forceAA="0" compatLnSpc="1">
+            <a:prstTxWarp prst="textNoShape">
+              <a:avLst/>
+            </a:prstTxWarp>
+            <a:noAutofit/>
+          </a:bodyPr>
+          <a:lstStyle/>
+          <a:p>
+            <a:pPr marL="0" marR="0" lvl="0" indent="0" algn="ctr" defTabSz="914400" rtl="0" eaLnBrk="1" fontAlgn="auto" latinLnBrk="0" hangingPunct="1">
+              <a:lnSpc>
+                <a:spcPct val="100000"/>
+              </a:lnSpc>
+              <a:spcBef>
+                <a:spcPts val="0"/>
+              </a:spcBef>
+              <a:spcAft>
+                <a:spcPts val="0"/>
+              </a:spcAft>
+              <a:buClrTx/>
+              <a:buSzTx/>
+              <a:buFontTx/>
+              <a:buNone/>
+              <a:tabLst/>
+              <a:defRPr/>
+            </a:pPr>
+            <a:r>
+              <a:rPr kumimoji="0" lang="ru-RU" sz="1600" b="1" i="0" u="none" strike="noStrike" kern="1200" cap="none" spc="0" normalizeH="0" baseline="0" noProof="0" dirty="0">
+                <a:ln>
+                  <a:noFill/>
+                </a:ln>
+                <a:solidFill>
+                  <a:srgbClr val="FFFFFF"/>
+                </a:solidFill>
+                <a:effectLst/>
+                <a:uLnTx/>
+                <a:uFillTx/>
+                <a:latin typeface="Arial"/>
+                <a:ea typeface="+mn-ea"/>
+                <a:cs typeface="+mn-cs"/>
+              </a:rPr>
+              <a:t>Бортовые устройства</a:t>
+            </a:r>
+          </a:p>
+        </p:txBody>
+      </p:sp>
+      <p:cxnSp>
+        <p:nvCxnSpPr>
+          <p:cNvPr id="39" name="Прямая со стрелкой 38">
+            <a:extLst>
+              <a:ext uri="{FF2B5EF4-FFF2-40B4-BE49-F238E27FC236}">
+                <a16:creationId xmlns:a16="http://schemas.microsoft.com/office/drawing/2014/main" id="{B87A67FB-FAA3-49DE-8DFF-A5AC9C617CBC}"/>
+              </a:ext>
+            </a:extLst>
+          </p:cNvPr>
+          <p:cNvCxnSpPr>
+            <a:stCxn id="3" idx="2"/>
+            <a:endCxn id="22" idx="0"/>
+          </p:cNvCxnSpPr>
+          <p:nvPr/>
+        </p:nvCxnSpPr>
+        <p:spPr>
+          <a:xfrm flipH="1">
+            <a:off x="5054906" y="2228443"/>
+            <a:ext cx="1" cy="212799"/>
+          </a:xfrm>
+          <a:prstGeom prst="straightConnector1">
+            <a:avLst/>
+          </a:prstGeom>
+          <a:ln w="31750">
+            <a:solidFill>
+              <a:schemeClr val="tx2"/>
+            </a:solidFill>
+            <a:tailEnd type="triangle"/>
+          </a:ln>
+        </p:spPr>
+        <p:style>
+          <a:lnRef idx="1">
+            <a:schemeClr val="dk1"/>
+          </a:lnRef>
+          <a:fillRef idx="0">
+            <a:schemeClr val="dk1"/>
+          </a:fillRef>
+          <a:effectRef idx="0">
+            <a:schemeClr val="dk1"/>
+          </a:effectRef>
+          <a:fontRef idx="minor">
+            <a:schemeClr val="tx1"/>
+          </a:fontRef>
+        </p:style>
+      </p:cxnSp>
+      <p:cxnSp>
+        <p:nvCxnSpPr>
+          <p:cNvPr id="41" name="Прямая со стрелкой 40">
+            <a:extLst>
+              <a:ext uri="{FF2B5EF4-FFF2-40B4-BE49-F238E27FC236}">
+                <a16:creationId xmlns:a16="http://schemas.microsoft.com/office/drawing/2014/main" id="{E990142A-522A-4EF3-9D90-BBF128E00024}"/>
+              </a:ext>
+            </a:extLst>
+          </p:cNvPr>
+          <p:cNvCxnSpPr>
+            <a:stCxn id="22" idx="2"/>
+            <a:endCxn id="28" idx="0"/>
+          </p:cNvCxnSpPr>
+          <p:nvPr/>
+        </p:nvCxnSpPr>
+        <p:spPr>
+          <a:xfrm>
+            <a:off x="5054906" y="3258602"/>
+            <a:ext cx="0" cy="189009"/>
+          </a:xfrm>
+          <a:prstGeom prst="straightConnector1">
+            <a:avLst/>
+          </a:prstGeom>
+          <a:ln w="31750">
+            <a:solidFill>
+              <a:schemeClr val="tx2"/>
+            </a:solidFill>
+            <a:tailEnd type="triangle"/>
+          </a:ln>
+        </p:spPr>
+        <p:style>
+          <a:lnRef idx="1">
+            <a:schemeClr val="accent1"/>
+          </a:lnRef>
+          <a:fillRef idx="0">
+            <a:schemeClr val="accent1"/>
+          </a:fillRef>
+          <a:effectRef idx="0">
+            <a:schemeClr val="accent1"/>
+          </a:effectRef>
+          <a:fontRef idx="minor">
+            <a:schemeClr val="tx1"/>
+          </a:fontRef>
+        </p:style>
+      </p:cxnSp>
+      <p:cxnSp>
+        <p:nvCxnSpPr>
+          <p:cNvPr id="45" name="Соединитель: уступ 44">
+            <a:extLst>
+              <a:ext uri="{FF2B5EF4-FFF2-40B4-BE49-F238E27FC236}">
+                <a16:creationId xmlns:a16="http://schemas.microsoft.com/office/drawing/2014/main" id="{E4DD9B4C-FA66-47C7-A9B9-8B0571216F5F}"/>
+              </a:ext>
+            </a:extLst>
+          </p:cNvPr>
+          <p:cNvCxnSpPr>
+            <a:stCxn id="28" idx="1"/>
+          </p:cNvCxnSpPr>
+          <p:nvPr/>
+        </p:nvCxnSpPr>
+        <p:spPr>
+          <a:xfrm rot="10800000" flipV="1">
+            <a:off x="3753294" y="3856291"/>
+            <a:ext cx="434277" cy="801900"/>
+          </a:xfrm>
+          <a:prstGeom prst="bentConnector2">
+            <a:avLst/>
+          </a:prstGeom>
+          <a:ln w="28575">
+            <a:solidFill>
+              <a:schemeClr val="tx2"/>
+            </a:solidFill>
+            <a:tailEnd type="triangle"/>
+          </a:ln>
+        </p:spPr>
+        <p:style>
+          <a:lnRef idx="1">
+            <a:schemeClr val="accent1"/>
+          </a:lnRef>
+          <a:fillRef idx="0">
+            <a:schemeClr val="accent1"/>
+          </a:fillRef>
+          <a:effectRef idx="0">
+            <a:schemeClr val="accent1"/>
+          </a:effectRef>
+          <a:fontRef idx="minor">
+            <a:schemeClr val="tx1"/>
+          </a:fontRef>
+        </p:style>
+      </p:cxnSp>
+      <p:cxnSp>
+        <p:nvCxnSpPr>
+          <p:cNvPr id="49" name="Соединитель: уступ 48">
+            <a:extLst>
+              <a:ext uri="{FF2B5EF4-FFF2-40B4-BE49-F238E27FC236}">
+                <a16:creationId xmlns:a16="http://schemas.microsoft.com/office/drawing/2014/main" id="{64B96C48-7A46-40E7-8EB5-B9CA120584A5}"/>
+              </a:ext>
+            </a:extLst>
+          </p:cNvPr>
+          <p:cNvCxnSpPr>
+            <a:stCxn id="30" idx="2"/>
+            <a:endCxn id="33" idx="1"/>
+          </p:cNvCxnSpPr>
+          <p:nvPr/>
+        </p:nvCxnSpPr>
+        <p:spPr>
+          <a:xfrm rot="16200000" flipH="1">
+            <a:off x="5077157" y="4953141"/>
+            <a:ext cx="632466" cy="1694461"/>
+          </a:xfrm>
+          <a:prstGeom prst="bentConnector2">
+            <a:avLst/>
+          </a:prstGeom>
+          <a:ln w="31750">
+            <a:solidFill>
+              <a:schemeClr val="tx2"/>
+            </a:solidFill>
+            <a:tailEnd type="triangle"/>
+          </a:ln>
+        </p:spPr>
+        <p:style>
+          <a:lnRef idx="1">
+            <a:schemeClr val="accent1"/>
+          </a:lnRef>
+          <a:fillRef idx="0">
+            <a:schemeClr val="accent1"/>
+          </a:fillRef>
+          <a:effectRef idx="0">
+            <a:schemeClr val="accent1"/>
+          </a:effectRef>
+          <a:fontRef idx="minor">
+            <a:schemeClr val="tx1"/>
+          </a:fontRef>
+        </p:style>
+      </p:cxnSp>
+      <p:cxnSp>
+        <p:nvCxnSpPr>
+          <p:cNvPr id="58" name="Соединитель: уступ 57">
+            <a:extLst>
+              <a:ext uri="{FF2B5EF4-FFF2-40B4-BE49-F238E27FC236}">
+                <a16:creationId xmlns:a16="http://schemas.microsoft.com/office/drawing/2014/main" id="{BBEDBEBC-6B4C-425E-9C3B-A41ABE845330}"/>
+              </a:ext>
+            </a:extLst>
+          </p:cNvPr>
+          <p:cNvCxnSpPr>
+            <a:stCxn id="28" idx="2"/>
+          </p:cNvCxnSpPr>
+          <p:nvPr/>
+        </p:nvCxnSpPr>
+        <p:spPr>
+          <a:xfrm rot="16200000" flipH="1">
+            <a:off x="5297892" y="4021984"/>
+            <a:ext cx="232601" cy="718573"/>
+          </a:xfrm>
+          <a:prstGeom prst="bentConnector2">
+            <a:avLst/>
+          </a:prstGeom>
+          <a:ln w="31750">
+            <a:solidFill>
+              <a:schemeClr val="tx2"/>
+            </a:solidFill>
+          </a:ln>
+        </p:spPr>
+        <p:style>
+          <a:lnRef idx="1">
+            <a:schemeClr val="accent1"/>
+          </a:lnRef>
+          <a:fillRef idx="0">
+            <a:schemeClr val="accent1"/>
+          </a:fillRef>
+          <a:effectRef idx="0">
+            <a:schemeClr val="accent1"/>
+          </a:effectRef>
+          <a:fontRef idx="minor">
+            <a:schemeClr val="tx1"/>
+          </a:fontRef>
+        </p:style>
+      </p:cxnSp>
+      <p:cxnSp>
+        <p:nvCxnSpPr>
+          <p:cNvPr id="60" name="Соединитель: уступ 59">
+            <a:extLst>
+              <a:ext uri="{FF2B5EF4-FFF2-40B4-BE49-F238E27FC236}">
+                <a16:creationId xmlns:a16="http://schemas.microsoft.com/office/drawing/2014/main" id="{28B5EBE8-EDCC-4EB1-8D02-2DC557C1945D}"/>
+              </a:ext>
+            </a:extLst>
+          </p:cNvPr>
+          <p:cNvCxnSpPr>
+            <a:endCxn id="31" idx="1"/>
+          </p:cNvCxnSpPr>
+          <p:nvPr/>
+        </p:nvCxnSpPr>
+        <p:spPr>
+          <a:xfrm rot="16200000" flipH="1">
+            <a:off x="5635497" y="4614956"/>
+            <a:ext cx="577888" cy="343117"/>
+          </a:xfrm>
+          <a:prstGeom prst="bentConnector2">
+            <a:avLst/>
+          </a:prstGeom>
+          <a:ln w="31750">
+            <a:solidFill>
+              <a:schemeClr val="tx2"/>
+            </a:solidFill>
+            <a:tailEnd type="triangle"/>
+          </a:ln>
+        </p:spPr>
+        <p:style>
+          <a:lnRef idx="1">
+            <a:schemeClr val="accent1"/>
+          </a:lnRef>
+          <a:fillRef idx="0">
+            <a:schemeClr val="accent1"/>
+          </a:fillRef>
+          <a:effectRef idx="0">
+            <a:schemeClr val="accent1"/>
+          </a:effectRef>
+          <a:fontRef idx="minor">
+            <a:schemeClr val="tx1"/>
+          </a:fontRef>
+        </p:style>
+      </p:cxnSp>
+      <p:cxnSp>
+        <p:nvCxnSpPr>
+          <p:cNvPr id="62" name="Прямая со стрелкой 61">
+            <a:extLst>
+              <a:ext uri="{FF2B5EF4-FFF2-40B4-BE49-F238E27FC236}">
+                <a16:creationId xmlns:a16="http://schemas.microsoft.com/office/drawing/2014/main" id="{2908EF96-461E-479C-98D4-68BF7CDA6534}"/>
+              </a:ext>
+            </a:extLst>
+          </p:cNvPr>
+          <p:cNvCxnSpPr>
+            <a:stCxn id="31" idx="2"/>
+            <a:endCxn id="33" idx="0"/>
+          </p:cNvCxnSpPr>
+          <p:nvPr/>
+        </p:nvCxnSpPr>
+        <p:spPr>
+          <a:xfrm>
+            <a:off x="7107957" y="5484139"/>
+            <a:ext cx="0" cy="223786"/>
+          </a:xfrm>
+          <a:prstGeom prst="straightConnector1">
+            <a:avLst/>
+          </a:prstGeom>
+          <a:ln w="31750">
+            <a:solidFill>
+              <a:schemeClr val="tx2"/>
+            </a:solidFill>
+            <a:tailEnd type="triangle"/>
+          </a:ln>
+        </p:spPr>
+        <p:style>
+          <a:lnRef idx="1">
+            <a:schemeClr val="accent1"/>
+          </a:lnRef>
+          <a:fillRef idx="0">
+            <a:schemeClr val="accent1"/>
+          </a:fillRef>
+          <a:effectRef idx="0">
+            <a:schemeClr val="accent1"/>
+          </a:effectRef>
+          <a:fontRef idx="minor">
+            <a:schemeClr val="tx1"/>
+          </a:fontRef>
+        </p:style>
+      </p:cxnSp>
+      <p:cxnSp>
+        <p:nvCxnSpPr>
+          <p:cNvPr id="64" name="Соединитель: уступ 63">
+            <a:extLst>
+              <a:ext uri="{FF2B5EF4-FFF2-40B4-BE49-F238E27FC236}">
+                <a16:creationId xmlns:a16="http://schemas.microsoft.com/office/drawing/2014/main" id="{97FF15E0-B481-4407-9C1C-169FD52FFB9A}"/>
+              </a:ext>
+            </a:extLst>
+          </p:cNvPr>
+          <p:cNvCxnSpPr>
+            <a:stCxn id="32" idx="2"/>
+            <a:endCxn id="33" idx="3"/>
+          </p:cNvCxnSpPr>
+          <p:nvPr/>
+        </p:nvCxnSpPr>
+        <p:spPr>
+          <a:xfrm rot="5400000">
+            <a:off x="8501996" y="4948847"/>
+            <a:ext cx="641054" cy="1694462"/>
+          </a:xfrm>
+          <a:prstGeom prst="bentConnector2">
+            <a:avLst/>
+          </a:prstGeom>
+          <a:ln w="31750">
+            <a:solidFill>
+              <a:schemeClr val="tx2"/>
+            </a:solidFill>
+            <a:tailEnd type="triangle"/>
+          </a:ln>
+        </p:spPr>
+        <p:style>
+          <a:lnRef idx="1">
+            <a:schemeClr val="accent1"/>
+          </a:lnRef>
+          <a:fillRef idx="0">
+            <a:schemeClr val="accent1"/>
+          </a:fillRef>
+          <a:effectRef idx="0">
+            <a:schemeClr val="accent1"/>
+          </a:effectRef>
+          <a:fontRef idx="minor">
+            <a:schemeClr val="tx1"/>
+          </a:fontRef>
+        </p:style>
+      </p:cxnSp>
+      <p:cxnSp>
+        <p:nvCxnSpPr>
+          <p:cNvPr id="66" name="Прямая со стрелкой 65">
+            <a:extLst>
+              <a:ext uri="{FF2B5EF4-FFF2-40B4-BE49-F238E27FC236}">
+                <a16:creationId xmlns:a16="http://schemas.microsoft.com/office/drawing/2014/main" id="{B18148D9-E9B9-4D24-B323-7D369798B2FC}"/>
+              </a:ext>
+            </a:extLst>
+          </p:cNvPr>
+          <p:cNvCxnSpPr>
+            <a:stCxn id="37" idx="2"/>
+            <a:endCxn id="36" idx="0"/>
+          </p:cNvCxnSpPr>
+          <p:nvPr/>
+        </p:nvCxnSpPr>
+        <p:spPr>
+          <a:xfrm>
+            <a:off x="10008258" y="2195451"/>
+            <a:ext cx="0" cy="253617"/>
+          </a:xfrm>
+          <a:prstGeom prst="straightConnector1">
+            <a:avLst/>
+          </a:prstGeom>
+          <a:ln w="31750">
+            <a:solidFill>
+              <a:schemeClr val="tx2"/>
+            </a:solidFill>
+            <a:tailEnd type="triangle"/>
+          </a:ln>
+        </p:spPr>
+        <p:style>
+          <a:lnRef idx="1">
+            <a:schemeClr val="accent1"/>
+          </a:lnRef>
+          <a:fillRef idx="0">
+            <a:schemeClr val="accent1"/>
+          </a:fillRef>
+          <a:effectRef idx="0">
+            <a:schemeClr val="accent1"/>
+          </a:effectRef>
+          <a:fontRef idx="minor">
+            <a:schemeClr val="tx1"/>
+          </a:fontRef>
+        </p:style>
+      </p:cxnSp>
+      <p:cxnSp>
+        <p:nvCxnSpPr>
+          <p:cNvPr id="70" name="Прямая со стрелкой 69">
+            <a:extLst>
+              <a:ext uri="{FF2B5EF4-FFF2-40B4-BE49-F238E27FC236}">
+                <a16:creationId xmlns:a16="http://schemas.microsoft.com/office/drawing/2014/main" id="{524367C1-CADE-43B5-B034-D0184C941F52}"/>
+              </a:ext>
+            </a:extLst>
+          </p:cNvPr>
+          <p:cNvCxnSpPr>
+            <a:stCxn id="36" idx="2"/>
+            <a:endCxn id="35" idx="0"/>
+          </p:cNvCxnSpPr>
+          <p:nvPr/>
+        </p:nvCxnSpPr>
+        <p:spPr>
+          <a:xfrm>
+            <a:off x="10008258" y="3266428"/>
+            <a:ext cx="0" cy="253617"/>
+          </a:xfrm>
+          <a:prstGeom prst="straightConnector1">
+            <a:avLst/>
+          </a:prstGeom>
+          <a:ln w="31750">
+            <a:solidFill>
+              <a:schemeClr val="tx2"/>
+            </a:solidFill>
+            <a:tailEnd type="triangle"/>
+          </a:ln>
+        </p:spPr>
+        <p:style>
+          <a:lnRef idx="1">
+            <a:schemeClr val="accent1"/>
+          </a:lnRef>
+          <a:fillRef idx="0">
+            <a:schemeClr val="accent1"/>
+          </a:fillRef>
+          <a:effectRef idx="0">
+            <a:schemeClr val="accent1"/>
+          </a:effectRef>
+          <a:fontRef idx="minor">
+            <a:schemeClr val="tx1"/>
+          </a:fontRef>
+        </p:style>
+      </p:cxnSp>
+      <p:cxnSp>
+        <p:nvCxnSpPr>
+          <p:cNvPr id="72" name="Соединитель: уступ 71">
+            <a:extLst>
+              <a:ext uri="{FF2B5EF4-FFF2-40B4-BE49-F238E27FC236}">
+                <a16:creationId xmlns:a16="http://schemas.microsoft.com/office/drawing/2014/main" id="{B1C9292A-583F-4632-8B9B-FAC2F528B49F}"/>
+              </a:ext>
+            </a:extLst>
+          </p:cNvPr>
+          <p:cNvCxnSpPr>
+            <a:stCxn id="35" idx="3"/>
+            <a:endCxn id="32" idx="3"/>
+          </p:cNvCxnSpPr>
+          <p:nvPr/>
+        </p:nvCxnSpPr>
+        <p:spPr>
+          <a:xfrm flipH="1">
+            <a:off x="10681711" y="3928725"/>
+            <a:ext cx="193882" cy="1138146"/>
+          </a:xfrm>
+          <a:prstGeom prst="bentConnector3">
+            <a:avLst>
+              <a:gd name="adj1" fmla="val -216619"/>
+            </a:avLst>
+          </a:prstGeom>
+          <a:ln w="31750">
+            <a:solidFill>
+              <a:schemeClr val="tx2"/>
+            </a:solidFill>
+            <a:tailEnd type="triangle"/>
+          </a:ln>
+        </p:spPr>
+        <p:style>
+          <a:lnRef idx="1">
+            <a:schemeClr val="accent1"/>
+          </a:lnRef>
+          <a:fillRef idx="0">
+            <a:schemeClr val="accent1"/>
+          </a:fillRef>
+          <a:effectRef idx="0">
+            <a:schemeClr val="accent1"/>
+          </a:effectRef>
+          <a:fontRef idx="minor">
+            <a:schemeClr val="tx1"/>
+          </a:fontRef>
+        </p:style>
+      </p:cxnSp>
+      <p:cxnSp>
+        <p:nvCxnSpPr>
+          <p:cNvPr id="75" name="Прямая со стрелкой 74">
+            <a:extLst>
+              <a:ext uri="{FF2B5EF4-FFF2-40B4-BE49-F238E27FC236}">
+                <a16:creationId xmlns:a16="http://schemas.microsoft.com/office/drawing/2014/main" id="{034986AF-5E1A-4530-A46C-8C86C9DD52AB}"/>
+              </a:ext>
+            </a:extLst>
+          </p:cNvPr>
+          <p:cNvCxnSpPr>
+            <a:stCxn id="28" idx="3"/>
+            <a:endCxn id="34" idx="1"/>
+          </p:cNvCxnSpPr>
+          <p:nvPr/>
+        </p:nvCxnSpPr>
+        <p:spPr>
+          <a:xfrm>
+            <a:off x="5922241" y="3856291"/>
+            <a:ext cx="657326" cy="0"/>
+          </a:xfrm>
+          <a:prstGeom prst="straightConnector1">
+            <a:avLst/>
+          </a:prstGeom>
+          <a:ln w="31750">
+            <a:solidFill>
+              <a:schemeClr val="tx2"/>
+            </a:solidFill>
+            <a:tailEnd type="triangle"/>
+          </a:ln>
+        </p:spPr>
+        <p:style>
+          <a:lnRef idx="1">
+            <a:schemeClr val="accent1"/>
+          </a:lnRef>
+          <a:fillRef idx="0">
+            <a:schemeClr val="accent1"/>
+          </a:fillRef>
+          <a:effectRef idx="0">
+            <a:schemeClr val="accent1"/>
+          </a:effectRef>
+          <a:fontRef idx="minor">
+            <a:schemeClr val="tx1"/>
+          </a:fontRef>
+        </p:style>
+      </p:cxnSp>
+      <p:cxnSp>
+        <p:nvCxnSpPr>
+          <p:cNvPr id="79" name="Соединитель: уступ 78">
+            <a:extLst>
+              <a:ext uri="{FF2B5EF4-FFF2-40B4-BE49-F238E27FC236}">
+                <a16:creationId xmlns:a16="http://schemas.microsoft.com/office/drawing/2014/main" id="{7509E080-3FFE-4ACB-A09D-0BBFAFF31D58}"/>
+              </a:ext>
+            </a:extLst>
+          </p:cNvPr>
+          <p:cNvCxnSpPr/>
+          <p:nvPr/>
+        </p:nvCxnSpPr>
+        <p:spPr>
+          <a:xfrm>
+            <a:off x="5922242" y="4157330"/>
+            <a:ext cx="1185714" cy="340240"/>
+          </a:xfrm>
+          <a:prstGeom prst="bentConnector3">
+            <a:avLst>
+              <a:gd name="adj1" fmla="val 23098"/>
+            </a:avLst>
+          </a:prstGeom>
+          <a:ln w="31750">
+            <a:solidFill>
+              <a:schemeClr val="tx2"/>
+            </a:solidFill>
+          </a:ln>
+        </p:spPr>
+        <p:style>
+          <a:lnRef idx="1">
+            <a:schemeClr val="accent1"/>
+          </a:lnRef>
+          <a:fillRef idx="0">
+            <a:schemeClr val="accent1"/>
+          </a:fillRef>
+          <a:effectRef idx="0">
+            <a:schemeClr val="accent1"/>
+          </a:effectRef>
+          <a:fontRef idx="minor">
+            <a:schemeClr val="tx1"/>
+          </a:fontRef>
+        </p:style>
+      </p:cxnSp>
+      <p:cxnSp>
+        <p:nvCxnSpPr>
+          <p:cNvPr id="93" name="Прямая соединительная линия 92">
+            <a:extLst>
+              <a:ext uri="{FF2B5EF4-FFF2-40B4-BE49-F238E27FC236}">
+                <a16:creationId xmlns:a16="http://schemas.microsoft.com/office/drawing/2014/main" id="{6912E718-CEEA-4C7D-A8A1-1A7E71B7E9AB}"/>
+              </a:ext>
+            </a:extLst>
+          </p:cNvPr>
+          <p:cNvCxnSpPr/>
+          <p:nvPr/>
+        </p:nvCxnSpPr>
+        <p:spPr>
+          <a:xfrm>
+            <a:off x="7075636" y="4497571"/>
+            <a:ext cx="1714567" cy="0"/>
+          </a:xfrm>
+          <a:prstGeom prst="line">
+            <a:avLst/>
+          </a:prstGeom>
+          <a:ln w="31750">
+            <a:solidFill>
+              <a:schemeClr val="tx2"/>
+            </a:solidFill>
+          </a:ln>
+        </p:spPr>
+        <p:style>
+          <a:lnRef idx="1">
+            <a:schemeClr val="accent1"/>
+          </a:lnRef>
+          <a:fillRef idx="0">
+            <a:schemeClr val="accent1"/>
+          </a:fillRef>
+          <a:effectRef idx="0">
+            <a:schemeClr val="accent1"/>
+          </a:effectRef>
+          <a:fontRef idx="minor">
+            <a:schemeClr val="tx1"/>
+          </a:fontRef>
+        </p:style>
+      </p:cxnSp>
+      <p:cxnSp>
+        <p:nvCxnSpPr>
+          <p:cNvPr id="95" name="Прямая со стрелкой 94">
+            <a:extLst>
+              <a:ext uri="{FF2B5EF4-FFF2-40B4-BE49-F238E27FC236}">
+                <a16:creationId xmlns:a16="http://schemas.microsoft.com/office/drawing/2014/main" id="{EE91F2FB-757A-4C26-86A3-970B2861B9AD}"/>
+              </a:ext>
+            </a:extLst>
+          </p:cNvPr>
+          <p:cNvCxnSpPr/>
+          <p:nvPr/>
+        </p:nvCxnSpPr>
+        <p:spPr>
+          <a:xfrm>
+            <a:off x="8790203" y="4497570"/>
+            <a:ext cx="0" cy="160621"/>
+          </a:xfrm>
+          <a:prstGeom prst="straightConnector1">
+            <a:avLst/>
+          </a:prstGeom>
+          <a:ln w="31750">
+            <a:solidFill>
+              <a:schemeClr val="tx2"/>
+            </a:solidFill>
+            <a:tailEnd type="triangle"/>
+          </a:ln>
+        </p:spPr>
+        <p:style>
+          <a:lnRef idx="1">
+            <a:schemeClr val="accent1"/>
+          </a:lnRef>
+          <a:fillRef idx="0">
+            <a:schemeClr val="accent1"/>
+          </a:fillRef>
+          <a:effectRef idx="0">
+            <a:schemeClr val="accent1"/>
+          </a:effectRef>
+          <a:fontRef idx="minor">
+            <a:schemeClr val="tx1"/>
+          </a:fontRef>
+        </p:style>
+      </p:cxnSp>
+      <p:cxnSp>
+        <p:nvCxnSpPr>
+          <p:cNvPr id="97" name="Прямая со стрелкой 96">
+            <a:extLst>
+              <a:ext uri="{FF2B5EF4-FFF2-40B4-BE49-F238E27FC236}">
+                <a16:creationId xmlns:a16="http://schemas.microsoft.com/office/drawing/2014/main" id="{29152922-28AC-4A1D-B112-B649AA4A1B6C}"/>
+              </a:ext>
+            </a:extLst>
+          </p:cNvPr>
+          <p:cNvCxnSpPr>
+            <a:stCxn id="31" idx="0"/>
+          </p:cNvCxnSpPr>
+          <p:nvPr/>
+        </p:nvCxnSpPr>
+        <p:spPr>
+          <a:xfrm flipH="1" flipV="1">
+            <a:off x="7107956" y="4264971"/>
+            <a:ext cx="1" cy="401808"/>
+          </a:xfrm>
+          <a:prstGeom prst="straightConnector1">
+            <a:avLst/>
+          </a:prstGeom>
+          <a:ln w="31750">
+            <a:solidFill>
+              <a:schemeClr val="tx2"/>
+            </a:solidFill>
+            <a:tailEnd type="triangle"/>
+          </a:ln>
+        </p:spPr>
+        <p:style>
+          <a:lnRef idx="1">
+            <a:schemeClr val="accent1"/>
+          </a:lnRef>
+          <a:fillRef idx="0">
+            <a:schemeClr val="accent1"/>
+          </a:fillRef>
+          <a:effectRef idx="0">
+            <a:schemeClr val="accent1"/>
+          </a:effectRef>
+          <a:fontRef idx="minor">
+            <a:schemeClr val="tx1"/>
+          </a:fontRef>
+        </p:style>
+      </p:cxnSp>
+      <p:cxnSp>
+        <p:nvCxnSpPr>
+          <p:cNvPr id="99" name="Соединитель: уступ 98">
+            <a:extLst>
+              <a:ext uri="{FF2B5EF4-FFF2-40B4-BE49-F238E27FC236}">
+                <a16:creationId xmlns:a16="http://schemas.microsoft.com/office/drawing/2014/main" id="{08E23A2F-4E6E-474F-A56F-AFD65B82C571}"/>
+              </a:ext>
+            </a:extLst>
+          </p:cNvPr>
+          <p:cNvCxnSpPr>
+            <a:cxnSpLocks/>
+          </p:cNvCxnSpPr>
+          <p:nvPr/>
+        </p:nvCxnSpPr>
+        <p:spPr>
+          <a:xfrm rot="16200000" flipV="1">
+            <a:off x="8248425" y="3922103"/>
+            <a:ext cx="801900" cy="670274"/>
+          </a:xfrm>
+          <a:prstGeom prst="bentConnector2">
+            <a:avLst/>
+          </a:prstGeom>
+          <a:ln w="31750">
+            <a:solidFill>
+              <a:schemeClr val="tx2"/>
+            </a:solidFill>
+            <a:tailEnd type="triangle"/>
+          </a:ln>
+        </p:spPr>
+        <p:style>
+          <a:lnRef idx="1">
+            <a:schemeClr val="accent1"/>
+          </a:lnRef>
+          <a:fillRef idx="0">
+            <a:schemeClr val="accent1"/>
+          </a:fillRef>
+          <a:effectRef idx="0">
+            <a:schemeClr val="accent1"/>
+          </a:effectRef>
+          <a:fontRef idx="minor">
+            <a:schemeClr val="tx1"/>
+          </a:fontRef>
+        </p:style>
+      </p:cxnSp>
+      <p:cxnSp>
+        <p:nvCxnSpPr>
+          <p:cNvPr id="101" name="Соединитель: уступ 100">
+            <a:extLst>
+              <a:ext uri="{FF2B5EF4-FFF2-40B4-BE49-F238E27FC236}">
+                <a16:creationId xmlns:a16="http://schemas.microsoft.com/office/drawing/2014/main" id="{4E7AC0C2-CE3D-4E6E-9256-E4F29DB91C5F}"/>
+              </a:ext>
+            </a:extLst>
+          </p:cNvPr>
+          <p:cNvCxnSpPr>
+            <a:endCxn id="31" idx="3"/>
+          </p:cNvCxnSpPr>
+          <p:nvPr/>
+        </p:nvCxnSpPr>
+        <p:spPr>
+          <a:xfrm rot="10800000" flipV="1">
+            <a:off x="8119914" y="4157329"/>
+            <a:ext cx="1021008" cy="918129"/>
+          </a:xfrm>
+          <a:prstGeom prst="bentConnector3">
+            <a:avLst>
+              <a:gd name="adj1" fmla="val 70828"/>
+            </a:avLst>
+          </a:prstGeom>
+          <a:ln w="31750">
+            <a:solidFill>
+              <a:schemeClr val="tx2"/>
+            </a:solidFill>
+            <a:tailEnd type="triangle"/>
+          </a:ln>
+        </p:spPr>
+        <p:style>
+          <a:lnRef idx="1">
+            <a:schemeClr val="accent1"/>
+          </a:lnRef>
+          <a:fillRef idx="0">
+            <a:schemeClr val="accent1"/>
+          </a:fillRef>
+          <a:effectRef idx="0">
+            <a:schemeClr val="accent1"/>
+          </a:effectRef>
+          <a:fontRef idx="minor">
+            <a:schemeClr val="tx1"/>
+          </a:fontRef>
+        </p:style>
+      </p:cxnSp>
     </p:spTree>
     <p:extLst>
       <p:ext uri="{BB962C8B-B14F-4D97-AF65-F5344CB8AC3E}">
-        <p14:creationId xmlns:p14="http://schemas.microsoft.com/office/powerpoint/2010/main" val="677253107"/>
+        <p14:creationId xmlns:p14="http://schemas.microsoft.com/office/powerpoint/2010/main" val="2739496860"/>
       </p:ext>
     </p:extLst>
   </p:cSld>
@@ -12970,8 +15657,8 @@
         </p:nvSpPr>
         <p:spPr>
           <a:xfrm>
-            <a:off x="96115" y="1404911"/>
-            <a:ext cx="2254536" cy="2531348"/>
+            <a:off x="157524" y="1733394"/>
+            <a:ext cx="2123349" cy="1616701"/>
           </a:xfrm>
           <a:prstGeom prst="roundRect">
             <a:avLst/>
@@ -13008,15 +15695,15 @@
           <a:p>
             <a:pPr algn="l"/>
             <a:r>
-              <a:rPr lang="ru-RU" sz="2000" dirty="0">
+              <a:rPr lang="ru-RU" dirty="0">
                 <a:solidFill>
                   <a:srgbClr val="272D3A"/>
                 </a:solidFill>
                 <a:latin typeface="Arial"/>
               </a:rPr>
-              <a:t>Составной индекс по  временному и пространственному показателям</a:t>
-            </a:r>
-            <a:endParaRPr sz="2000" dirty="0">
+              <a:t>Составной индекс по  времени и пространству</a:t>
+            </a:r>
+            <a:endParaRPr dirty="0">
               <a:solidFill>
                 <a:srgbClr val="272D3A"/>
               </a:solidFill>

--- a/BystrovMD_4131z_Presentation.pptx
+++ b/BystrovMD_4131z_Presentation.pptx
@@ -3237,6 +3237,7 @@
   <p:sldLayoutIdLst>
     <p:sldLayoutId id="2147483773" r:id="rId1"/>
   </p:sldLayoutIdLst>
+  <p:hf hdr="0" ftr="0"/>
   <p:txStyles>
     <p:titleStyle>
       <a:lvl1pPr algn="l" defTabSz="914400" rtl="0" eaLnBrk="1" latinLnBrk="0" hangingPunct="1">
@@ -3786,7 +3787,7 @@
         </p:nvSpPr>
         <p:spPr>
           <a:xfrm>
-            <a:off x="9212262" y="6513813"/>
+            <a:off x="9295390" y="6513813"/>
             <a:ext cx="2428875" cy="184666"/>
           </a:xfrm>
           <a:prstGeom prst="rect">
@@ -3815,16 +3816,19 @@
               <a:pPr algn="r"/>
               <a:t>‹#›</a:t>
             </a:fld>
-            <a:endParaRPr lang="ru-RU" sz="1200" kern="1200" dirty="0">
-              <a:solidFill>
-                <a:schemeClr val="tx2">
-                  <a:lumMod val="90000"/>
-                </a:schemeClr>
-              </a:solidFill>
-              <a:latin typeface="+mn-lt"/>
-              <a:ea typeface="+mn-ea"/>
-              <a:cs typeface="+mn-cs"/>
-            </a:endParaRPr>
+            <a:r>
+              <a:rPr lang="en-US" sz="1200" kern="1200" dirty="0">
+                <a:solidFill>
+                  <a:schemeClr val="tx2">
+                    <a:lumMod val="90000"/>
+                  </a:schemeClr>
+                </a:solidFill>
+                <a:latin typeface="+mn-lt"/>
+                <a:ea typeface="+mn-ea"/>
+                <a:cs typeface="+mn-cs"/>
+              </a:rPr>
+              <a:t>/14</a:t>
+            </a:r>
           </a:p>
         </p:txBody>
       </p:sp>
@@ -3841,7 +3845,7 @@
     <p:sldLayoutId id="2147483801" r:id="rId2"/>
     <p:sldLayoutId id="2147483759" r:id="rId3"/>
   </p:sldLayoutIdLst>
-  <p:hf hdr="0" dt="0"/>
+  <p:hf hdr="0" ftr="0"/>
   <p:txStyles>
     <p:titleStyle>
       <a:lvl1pPr algn="l" defTabSz="914400" rtl="0" eaLnBrk="1" latinLnBrk="0" hangingPunct="1">
@@ -4505,7 +4509,7 @@
     <p:sldLayoutId id="2147483850" r:id="rId5"/>
     <p:sldLayoutId id="2147483843" r:id="rId6"/>
   </p:sldLayoutIdLst>
-  <p:hf hdr="0" dt="0"/>
+  <p:hf hdr="0" ftr="0"/>
   <p:txStyles>
     <p:titleStyle>
       <a:lvl1pPr algn="l" defTabSz="914400" rtl="0" eaLnBrk="1" latinLnBrk="0" hangingPunct="1">
